--- a/docs/PromptKit-Intro.pptx
+++ b/docs/PromptKit-Intro.pptx
@@ -790,7 +790,7 @@
           <a:lstStyle/>
           <a:p>
             <a:r>
-              <a:t>Inventory slide. Emphasize breadth: 6 domain-expert personas, 12 protocols across 3 categories (guardrails that prevent errors, analysis for domain-specific checks, reasoning for systematic approaches), 9 output format specs, and 19 task templates. All MIT-licensed, all composable.</a:t>
+              <a:t>Inventory slide. Emphasize breadth: 10 domain-expert personas, 20 protocols across 3 categories (guardrails that prevent errors, analysis for domain-specific checks, reasoning for systematic approaches), 11 output format specs, and 27 task templates. All MIT-licensed, all composable.</a:t>
             </a:r>
           </a:p>
         </p:txBody>
@@ -4276,7 +4276,7 @@
               </a:defRPr>
             </a:pPr>
             <a:r>
-              <a:t>github.com/microsoft/promptkit  ·  MIT License  ·  v0.1.0</a:t>
+              <a:t>github.com/microsoft/promptkit  ·  MIT License  ·  v0.2.0</a:t>
             </a:r>
           </a:p>
         </p:txBody>
@@ -7336,7 +7336,7 @@
               </a:defRPr>
             </a:pPr>
             <a:r>
-              <a:t>6 Personas</a:t>
+              <a:t>10 Personas</a:t>
             </a:r>
           </a:p>
         </p:txBody>
@@ -7378,7 +7378,7 @@
               </a:defRPr>
             </a:pPr>
             <a:r>
-              <a:t>systems-engineer</a:t>
+              <a:t>systems-engineer, security-auditor</a:t>
             </a:r>
           </a:p>
         </p:txBody>
@@ -7391,7 +7391,7 @@
         </p:nvSpPr>
         <p:spPr>
           <a:xfrm>
-            <a:off x="1066647" y="2651759"/>
+            <a:off x="1066647" y="2651760"/>
             <a:ext cx="2743200" cy="365760"/>
           </a:xfrm>
           <a:prstGeom prst="rect">
@@ -7420,7 +7420,7 @@
               </a:defRPr>
             </a:pPr>
             <a:r>
-              <a:t>security-auditor</a:t>
+              <a:t>software-architect, devops-engineer</a:t>
             </a:r>
           </a:p>
         </p:txBody>
@@ -7462,7 +7462,7 @@
               </a:defRPr>
             </a:pPr>
             <a:r>
-              <a:t>software-architect</a:t>
+              <a:t>reverse-engineer, specification-analyst</a:t>
             </a:r>
           </a:p>
         </p:txBody>
@@ -7504,7 +7504,7 @@
               </a:defRPr>
             </a:pPr>
             <a:r>
-              <a:t>devops-engineer</a:t>
+              <a:t>workflow-arbiter, implementation-engineer</a:t>
             </a:r>
           </a:p>
         </p:txBody>
@@ -7517,7 +7517,7 @@
         </p:nvSpPr>
         <p:spPr>
           <a:xfrm>
-            <a:off x="1066647" y="4297679"/>
+            <a:off x="1066647" y="4297680"/>
             <a:ext cx="2743200" cy="365760"/>
           </a:xfrm>
           <a:prstGeom prst="rect">
@@ -7546,21 +7546,107 @@
               </a:defRPr>
             </a:pPr>
             <a:r>
-              <a:t>reverse-engineer</a:t>
-            </a:r>
-          </a:p>
-        </p:txBody>
-      </p:sp>
-      <p:sp>
-        <p:nvSpPr>
-          <p:cNvPr id="11" name="TextBox 10"/>
+              <a:t>test-engineer, promptkit-contributor</a:t>
+            </a:r>
+          </a:p>
+        </p:txBody>
+      </p:sp>
+      <p:sp>
+        <p:nvSpPr>
+          <p:cNvPr id="11" name="Rounded Rectangle 10"/>
+          <p:cNvSpPr/>
+          <p:nvPr/>
+        </p:nvSpPr>
+        <p:spPr>
+          <a:xfrm>
+            <a:off x="4449927" y="1463040"/>
+            <a:ext cx="3291840" cy="4114800"/>
+          </a:xfrm>
+          <a:prstGeom prst="roundRect">
+            <a:avLst/>
+          </a:prstGeom>
+          <a:solidFill>
+            <a:srgbClr val="313244"/>
+          </a:solidFill>
+          <a:ln>
+            <a:noFill/>
+          </a:ln>
+          <a:effectLst/>
+        </p:spPr>
+        <p:style>
+          <a:lnRef idx="1">
+            <a:schemeClr val="accent1"/>
+          </a:lnRef>
+          <a:fillRef idx="3">
+            <a:schemeClr val="accent1"/>
+          </a:fillRef>
+          <a:effectRef idx="2">
+            <a:schemeClr val="accent1"/>
+          </a:effectRef>
+          <a:fontRef idx="minor">
+            <a:schemeClr val="lt1"/>
+          </a:fontRef>
+        </p:style>
+        <p:txBody>
+          <a:bodyPr rtlCol="0" anchor="ctr"/>
+          <a:lstStyle/>
+          <a:p>
+            <a:pPr algn="ctr"/>
+          </a:p>
+        </p:txBody>
+      </p:sp>
+      <p:sp>
+        <p:nvSpPr>
+          <p:cNvPr id="12" name="TextBox 11"/>
           <p:cNvSpPr txBox="1"/>
           <p:nvPr/>
         </p:nvSpPr>
         <p:spPr>
           <a:xfrm>
-            <a:off x="1066647" y="4846320"/>
-            <a:ext cx="2743200" cy="365760"/>
+            <a:off x="4632807" y="1600200"/>
+            <a:ext cx="2926080" cy="365760"/>
+          </a:xfrm>
+          <a:prstGeom prst="rect">
+            <a:avLst/>
+          </a:prstGeom>
+          <a:noFill/>
+        </p:spPr>
+        <p:txBody>
+          <a:bodyPr wrap="square">
+            <a:spAutoFit/>
+          </a:bodyPr>
+          <a:lstStyle/>
+          <a:p>
+            <a:pPr algn="ctr">
+              <a:lnSpc>
+                <a:spcPts val="2640"/>
+              </a:lnSpc>
+              <a:spcAft>
+                <a:spcPts val="660"/>
+              </a:spcAft>
+              <a:defRPr sz="2200" b="1">
+                <a:solidFill>
+                  <a:srgbClr val="A6E3A1"/>
+                </a:solidFill>
+                <a:latin typeface="Segoe UI"/>
+              </a:defRPr>
+            </a:pPr>
+            <a:r>
+              <a:t>20 Protocols</a:t>
+            </a:r>
+          </a:p>
+        </p:txBody>
+      </p:sp>
+      <p:sp>
+        <p:nvSpPr>
+          <p:cNvPr id="13" name="TextBox 12"/>
+          <p:cNvSpPr txBox="1"/>
+          <p:nvPr/>
+        </p:nvSpPr>
+        <p:spPr>
+          <a:xfrm>
+            <a:off x="4724247" y="2103120"/>
+            <a:ext cx="2743200" cy="594360"/>
           </a:xfrm>
           <a:prstGeom prst="rect">
             <a:avLst/>
@@ -7588,20 +7674,120 @@
               </a:defRPr>
             </a:pPr>
             <a:r>
-              <a:t>spl-contributor</a:t>
-            </a:r>
-          </a:p>
-        </p:txBody>
-      </p:sp>
-      <p:sp>
-        <p:nvSpPr>
-          <p:cNvPr id="12" name="Rounded Rectangle 11"/>
+              <a:t>Guardrails (3): anti-hallucination,</a:t>
+            </a:r>
+            <a:br/>
+            <a:r>
+              <a:t>  self-verification, operational-constraints</a:t>
+            </a:r>
+          </a:p>
+        </p:txBody>
+      </p:sp>
+      <p:sp>
+        <p:nvSpPr>
+          <p:cNvPr id="14" name="TextBox 13"/>
+          <p:cNvSpPr txBox="1"/>
+          <p:nvPr/>
+        </p:nvSpPr>
+        <p:spPr>
+          <a:xfrm>
+            <a:off x="4724247" y="2880360"/>
+            <a:ext cx="2743200" cy="594360"/>
+          </a:xfrm>
+          <a:prstGeom prst="rect">
+            <a:avLst/>
+          </a:prstGeom>
+          <a:noFill/>
+        </p:spPr>
+        <p:txBody>
+          <a:bodyPr wrap="square">
+            <a:spAutoFit/>
+          </a:bodyPr>
+          <a:lstStyle/>
+          <a:p>
+            <a:pPr algn="l">
+              <a:lnSpc>
+                <a:spcPts val="1439"/>
+              </a:lnSpc>
+              <a:spcAft>
+                <a:spcPts val="359"/>
+              </a:spcAft>
+              <a:defRPr sz="1200" b="0">
+                <a:solidFill>
+                  <a:srgbClr val="CDD6F4"/>
+                </a:solidFill>
+                <a:latin typeface="Cascadia Code"/>
+              </a:defRPr>
+            </a:pPr>
+            <a:r>
+              <a:t>Analysis (4): memory-safety-c, memory-safety-rust,</a:t>
+            </a:r>
+            <a:br/>
+            <a:r>
+              <a:t>  thread-safety, security-vulnerability</a:t>
+            </a:r>
+          </a:p>
+        </p:txBody>
+      </p:sp>
+      <p:sp>
+        <p:nvSpPr>
+          <p:cNvPr id="15" name="TextBox 14"/>
+          <p:cNvSpPr txBox="1"/>
+          <p:nvPr/>
+        </p:nvSpPr>
+        <p:spPr>
+          <a:xfrm>
+            <a:off x="4724247" y="3657600"/>
+            <a:ext cx="2743200" cy="822960"/>
+          </a:xfrm>
+          <a:prstGeom prst="rect">
+            <a:avLst/>
+          </a:prstGeom>
+          <a:noFill/>
+        </p:spPr>
+        <p:txBody>
+          <a:bodyPr wrap="square">
+            <a:spAutoFit/>
+          </a:bodyPr>
+          <a:lstStyle/>
+          <a:p>
+            <a:pPr algn="l">
+              <a:lnSpc>
+                <a:spcPts val="1439"/>
+              </a:lnSpc>
+              <a:spcAft>
+                <a:spcPts val="359"/>
+              </a:spcAft>
+              <a:defRPr sz="1200" b="0">
+                <a:solidFill>
+                  <a:srgbClr val="CDD6F4"/>
+                </a:solidFill>
+                <a:latin typeface="Cascadia Code"/>
+              </a:defRPr>
+            </a:pPr>
+            <a:r>
+              <a:t>Reasoning (13): root-cause-analysis,</a:t>
+            </a:r>
+            <a:br/>
+            <a:r>
+              <a:t>  traceability-audit, code-compliance-audit,</a:t>
+            </a:r>
+            <a:br/>
+            <a:r>
+              <a:t>  requirements-elicitation … and 9 more</a:t>
+            </a:r>
+          </a:p>
+        </p:txBody>
+      </p:sp>
+      <p:sp>
+        <p:nvSpPr>
+          <p:cNvPr id="16" name="Rounded Rectangle 15"/>
           <p:cNvSpPr/>
           <p:nvPr/>
         </p:nvSpPr>
         <p:spPr>
           <a:xfrm>
-            <a:off x="4449927" y="1463040"/>
+            <a:off x="8107527" y="1463040"/>
             <a:ext cx="3291840" cy="4114800"/>
           </a:xfrm>
           <a:prstGeom prst="roundRect">
@@ -7639,13 +7825,13 @@
       </p:sp>
       <p:sp>
         <p:nvSpPr>
-          <p:cNvPr id="13" name="TextBox 12"/>
+          <p:cNvPr id="17" name="TextBox 16"/>
           <p:cNvSpPr txBox="1"/>
           <p:nvPr/>
         </p:nvSpPr>
         <p:spPr>
           <a:xfrm>
-            <a:off x="4632807" y="1600200"/>
+            <a:off x="8290407" y="1600200"/>
             <a:ext cx="2926080" cy="365760"/>
           </a:xfrm>
           <a:prstGeom prst="rect">
@@ -7668,26 +7854,26 @@
               </a:spcAft>
               <a:defRPr sz="2200" b="1">
                 <a:solidFill>
-                  <a:srgbClr val="A6E3A1"/>
+                  <a:srgbClr val="F9E2AF"/>
                 </a:solidFill>
                 <a:latin typeface="Segoe UI"/>
               </a:defRPr>
             </a:pPr>
             <a:r>
-              <a:t>12 Protocols</a:t>
-            </a:r>
-          </a:p>
-        </p:txBody>
-      </p:sp>
-      <p:sp>
-        <p:nvSpPr>
-          <p:cNvPr id="14" name="TextBox 13"/>
+              <a:t>11 Formats</a:t>
+            </a:r>
+          </a:p>
+        </p:txBody>
+      </p:sp>
+      <p:sp>
+        <p:nvSpPr>
+          <p:cNvPr id="18" name="TextBox 17"/>
           <p:cNvSpPr txBox="1"/>
           <p:nvPr/>
         </p:nvSpPr>
         <p:spPr>
           <a:xfrm>
-            <a:off x="4724247" y="2103120"/>
+            <a:off x="8381847" y="2103120"/>
             <a:ext cx="2743200" cy="594360"/>
           </a:xfrm>
           <a:prstGeom prst="rect">
@@ -7716,24 +7902,24 @@
               </a:defRPr>
             </a:pPr>
             <a:r>
-              <a:t>Guardrails: anti-hallucination,</a:t>
+              <a:t>requirements-doc, design-doc,</a:t>
             </a:r>
             <a:br/>
             <a:r>
-              <a:t>  self-verification, operational-constraints</a:t>
-            </a:r>
-          </a:p>
-        </p:txBody>
-      </p:sp>
-      <p:sp>
-        <p:nvSpPr>
-          <p:cNvPr id="15" name="TextBox 14"/>
+              <a:t>validation-plan, investigation-report</a:t>
+            </a:r>
+          </a:p>
+        </p:txBody>
+      </p:sp>
+      <p:sp>
+        <p:nvSpPr>
+          <p:cNvPr id="19" name="TextBox 18"/>
           <p:cNvSpPr txBox="1"/>
           <p:nvPr/>
         </p:nvSpPr>
         <p:spPr>
           <a:xfrm>
-            <a:off x="4724247" y="2880359"/>
+            <a:off x="8381847" y="2880360"/>
             <a:ext cx="2743200" cy="594360"/>
           </a:xfrm>
           <a:prstGeom prst="rect">
@@ -7762,25 +7948,25 @@
               </a:defRPr>
             </a:pPr>
             <a:r>
-              <a:t>Analysis: memory-safety-c, memory-safety-rust,</a:t>
+              <a:t>implementation-plan, agent-instructions,</a:t>
             </a:r>
             <a:br/>
             <a:r>
-              <a:t>  thread-safety, security-vulnerability</a:t>
-            </a:r>
-          </a:p>
-        </p:txBody>
-      </p:sp>
-      <p:sp>
-        <p:nvSpPr>
-          <p:cNvPr id="16" name="TextBox 15"/>
+              <a:t>pipeline-spec, release-notes</a:t>
+            </a:r>
+          </a:p>
+        </p:txBody>
+      </p:sp>
+      <p:sp>
+        <p:nvSpPr>
+          <p:cNvPr id="20" name="TextBox 19"/>
           <p:cNvSpPr txBox="1"/>
           <p:nvPr/>
         </p:nvSpPr>
         <p:spPr>
           <a:xfrm>
-            <a:off x="4724247" y="4114800"/>
-            <a:ext cx="2743200" cy="822960"/>
+            <a:off x="8381847" y="3657600"/>
+            <a:ext cx="2743200" cy="594360"/>
           </a:xfrm>
           <a:prstGeom prst="rect">
             <a:avLst/>
@@ -7808,193 +7994,11 @@
               </a:defRPr>
             </a:pPr>
             <a:r>
-              <a:t>Reasoning: root-cause-analysis,</a:t>
+              <a:t>multi-artifact, triage-report,</a:t>
             </a:r>
             <a:br/>
             <a:r>
-              <a:t>  requirements-elicitation, iterative-refinement,</a:t>
-            </a:r>
-            <a:br/>
-            <a:r>
-              <a:t>  devops-platform-analysis, requirements-from-impl</a:t>
-            </a:r>
-          </a:p>
-        </p:txBody>
-      </p:sp>
-      <p:sp>
-        <p:nvSpPr>
-          <p:cNvPr id="17" name="Rounded Rectangle 16"/>
-          <p:cNvSpPr/>
-          <p:nvPr/>
-        </p:nvSpPr>
-        <p:spPr>
-          <a:xfrm>
-            <a:off x="8107527" y="1463040"/>
-            <a:ext cx="3291840" cy="4114800"/>
-          </a:xfrm>
-          <a:prstGeom prst="roundRect">
-            <a:avLst/>
-          </a:prstGeom>
-          <a:solidFill>
-            <a:srgbClr val="313244"/>
-          </a:solidFill>
-          <a:ln>
-            <a:noFill/>
-          </a:ln>
-          <a:effectLst/>
-        </p:spPr>
-        <p:style>
-          <a:lnRef idx="1">
-            <a:schemeClr val="accent1"/>
-          </a:lnRef>
-          <a:fillRef idx="3">
-            <a:schemeClr val="accent1"/>
-          </a:fillRef>
-          <a:effectRef idx="2">
-            <a:schemeClr val="accent1"/>
-          </a:effectRef>
-          <a:fontRef idx="minor">
-            <a:schemeClr val="lt1"/>
-          </a:fontRef>
-        </p:style>
-        <p:txBody>
-          <a:bodyPr rtlCol="0" anchor="ctr"/>
-          <a:lstStyle/>
-          <a:p>
-            <a:pPr algn="ctr"/>
-          </a:p>
-        </p:txBody>
-      </p:sp>
-      <p:sp>
-        <p:nvSpPr>
-          <p:cNvPr id="18" name="TextBox 17"/>
-          <p:cNvSpPr txBox="1"/>
-          <p:nvPr/>
-        </p:nvSpPr>
-        <p:spPr>
-          <a:xfrm>
-            <a:off x="8290407" y="1600200"/>
-            <a:ext cx="2926080" cy="365760"/>
-          </a:xfrm>
-          <a:prstGeom prst="rect">
-            <a:avLst/>
-          </a:prstGeom>
-          <a:noFill/>
-        </p:spPr>
-        <p:txBody>
-          <a:bodyPr wrap="square">
-            <a:spAutoFit/>
-          </a:bodyPr>
-          <a:lstStyle/>
-          <a:p>
-            <a:pPr algn="ctr">
-              <a:lnSpc>
-                <a:spcPts val="2640"/>
-              </a:lnSpc>
-              <a:spcAft>
-                <a:spcPts val="660"/>
-              </a:spcAft>
-              <a:defRPr sz="2200" b="1">
-                <a:solidFill>
-                  <a:srgbClr val="F9E2AF"/>
-                </a:solidFill>
-                <a:latin typeface="Segoe UI"/>
-              </a:defRPr>
-            </a:pPr>
-            <a:r>
-              <a:t>9 Formats</a:t>
-            </a:r>
-          </a:p>
-        </p:txBody>
-      </p:sp>
-      <p:sp>
-        <p:nvSpPr>
-          <p:cNvPr id="19" name="TextBox 18"/>
-          <p:cNvSpPr txBox="1"/>
-          <p:nvPr/>
-        </p:nvSpPr>
-        <p:spPr>
-          <a:xfrm>
-            <a:off x="8381847" y="2103120"/>
-            <a:ext cx="2743200" cy="594360"/>
-          </a:xfrm>
-          <a:prstGeom prst="rect">
-            <a:avLst/>
-          </a:prstGeom>
-          <a:noFill/>
-        </p:spPr>
-        <p:txBody>
-          <a:bodyPr wrap="square">
-            <a:spAutoFit/>
-          </a:bodyPr>
-          <a:lstStyle/>
-          <a:p>
-            <a:pPr algn="l">
-              <a:lnSpc>
-                <a:spcPts val="1439"/>
-              </a:lnSpc>
-              <a:spcAft>
-                <a:spcPts val="359"/>
-              </a:spcAft>
-              <a:defRPr sz="1200" b="0">
-                <a:solidFill>
-                  <a:srgbClr val="CDD6F4"/>
-                </a:solidFill>
-                <a:latin typeface="Cascadia Code"/>
-              </a:defRPr>
-            </a:pPr>
-            <a:r>
-              <a:t>requirements-doc, design-doc,</a:t>
-            </a:r>
-            <a:br/>
-            <a:r>
-              <a:t>validation-plan, investigation-report</a:t>
-            </a:r>
-          </a:p>
-        </p:txBody>
-      </p:sp>
-      <p:sp>
-        <p:nvSpPr>
-          <p:cNvPr id="20" name="TextBox 19"/>
-          <p:cNvSpPr txBox="1"/>
-          <p:nvPr/>
-        </p:nvSpPr>
-        <p:spPr>
-          <a:xfrm>
-            <a:off x="8381847" y="2880359"/>
-            <a:ext cx="2743200" cy="594360"/>
-          </a:xfrm>
-          <a:prstGeom prst="rect">
-            <a:avLst/>
-          </a:prstGeom>
-          <a:noFill/>
-        </p:spPr>
-        <p:txBody>
-          <a:bodyPr wrap="square">
-            <a:spAutoFit/>
-          </a:bodyPr>
-          <a:lstStyle/>
-          <a:p>
-            <a:pPr algn="l">
-              <a:lnSpc>
-                <a:spcPts val="1439"/>
-              </a:lnSpc>
-              <a:spcAft>
-                <a:spcPts val="359"/>
-              </a:spcAft>
-              <a:defRPr sz="1200" b="0">
-                <a:solidFill>
-                  <a:srgbClr val="CDD6F4"/>
-                </a:solidFill>
-                <a:latin typeface="Cascadia Code"/>
-              </a:defRPr>
-            </a:pPr>
-            <a:r>
-              <a:t>implementation-plan, agent-instructions,</a:t>
-            </a:r>
-            <a:br/>
-            <a:r>
-              <a:t>pipeline-spec, release-notes, multi-artifact</a:t>
+              <a:t>promptkit-pull-request</a:t>
             </a:r>
           </a:p>
         </p:txBody>
@@ -8080,7 +8084,7 @@
               </a:defRPr>
             </a:pPr>
             <a:r>
-              <a:t>19 Task Templates:  investigate-bug · review-code · author-requirements-doc · author-design-doc · plan-implementation · author-pipeline · triage-issues · author-agent-instructions · extend-library  … and more</a:t>
+              <a:t>27 Task Templates:  investigate-bug · review-code · author-requirements-doc · author-design-doc · audit-traceability · audit-code-compliance · plan-implementation · author-pipeline · triage-issues · extend-library  … and more</a:t>
             </a:r>
           </a:p>
         </p:txBody>

--- a/docs/PromptKit-Intro.pptx
+++ b/docs/PromptKit-Intro.pptx
@@ -8,6 +8,7 @@
     <p:sldId id="256" r:id="rId7"/>
     <p:sldId id="257" r:id="rId9"/>
     <p:sldId id="258" r:id="rId10"/>
+    <p:sldId id="265" r:id="rId17"/>
     <p:sldId id="259" r:id="rId11"/>
     <p:sldId id="260" r:id="rId12"/>
     <p:sldId id="261" r:id="rId13"/>
@@ -4234,7 +4235,7 @@
             </a:r>
             <a:br/>
             <a:r>
-              <a:t>for AI-assisted software engineering</a:t>
+              <a:t>for the AI-assisted engineering lifecycle</a:t>
             </a:r>
           </a:p>
         </p:txBody>
@@ -4276,7 +4277,7 @@
               </a:defRPr>
             </a:pPr>
             <a:r>
-              <a:t>aka.ms/PromptKit  ·  MIT License  ·  v0.2.0</a:t>
+              <a:t>aka.ms/PromptKit  ·  MIT License  ·  v0.4.0</a:t>
             </a:r>
           </a:p>
         </p:txBody>
@@ -4319,6 +4320,813 @@
             </a:pPr>
             <a:r>
               <a:t>Engineering Deep-Dive  ·  Getting Started</a:t>
+            </a:r>
+          </a:p>
+        </p:txBody>
+      </p:sp>
+    </p:spTree>
+  </p:cSld>
+  <p:clrMapOvr>
+    <a:masterClrMapping/>
+  </p:clrMapOvr>
+</p:sld>
+</file>
+
+<file path=ppt/slides/slide10.xml><?xml version="1.0" encoding="utf-8"?>
+<p:sld xmlns:a="http://schemas.openxmlformats.org/drawingml/2006/main" xmlns:p="http://schemas.openxmlformats.org/presentationml/2006/main" xmlns:r="http://schemas.openxmlformats.org/officeDocument/2006/relationships">
+  <p:cSld>
+    <p:bg>
+      <p:bgPr>
+        <a:solidFill>
+          <a:srgbClr val="1E1E2E"/>
+        </a:solidFill>
+        <a:effectLst/>
+      </p:bgPr>
+    </p:bg>
+    <p:spTree>
+      <p:nvGrpSpPr>
+        <p:cNvPr id="1" name=""/>
+        <p:cNvGrpSpPr/>
+        <p:nvPr/>
+      </p:nvGrpSpPr>
+      <p:grpSpPr/>
+      <p:sp>
+        <p:nvSpPr>
+          <p:cNvPr id="2" name="Rectangle 1"/>
+          <p:cNvSpPr/>
+          <p:nvPr/>
+        </p:nvSpPr>
+        <p:spPr>
+          <a:xfrm>
+            <a:off x="0" y="0"/>
+            <a:ext cx="12191695" cy="54864"/>
+          </a:xfrm>
+          <a:prstGeom prst="rect">
+            <a:avLst/>
+          </a:prstGeom>
+          <a:solidFill>
+            <a:srgbClr val="89B4FA"/>
+          </a:solidFill>
+          <a:ln>
+            <a:noFill/>
+          </a:ln>
+        </p:spPr>
+        <p:style>
+          <a:lnRef idx="1">
+            <a:schemeClr val="accent1"/>
+          </a:lnRef>
+          <a:fillRef idx="3">
+            <a:schemeClr val="accent1"/>
+          </a:fillRef>
+          <a:effectRef idx="2">
+            <a:schemeClr val="accent1"/>
+          </a:effectRef>
+          <a:fontRef idx="minor">
+            <a:schemeClr val="lt1"/>
+          </a:fontRef>
+        </p:style>
+        <p:txBody>
+          <a:bodyPr rtlCol="0" anchor="ctr"/>
+          <a:lstStyle/>
+          <a:p>
+            <a:pPr algn="ctr"/>
+          </a:p>
+        </p:txBody>
+      </p:sp>
+      <p:sp>
+        <p:nvSpPr>
+          <p:cNvPr id="3" name="TextBox 2"/>
+          <p:cNvSpPr txBox="1"/>
+          <p:nvPr/>
+        </p:nvSpPr>
+        <p:spPr>
+          <a:xfrm>
+            <a:off x="731520" y="320040"/>
+            <a:ext cx="10058400" cy="594360"/>
+          </a:xfrm>
+          <a:prstGeom prst="rect">
+            <a:avLst/>
+          </a:prstGeom>
+          <a:noFill/>
+        </p:spPr>
+        <p:txBody>
+          <a:bodyPr wrap="square">
+            <a:spAutoFit/>
+          </a:bodyPr>
+          <a:lstStyle/>
+          <a:p>
+            <a:pPr algn="l">
+              <a:lnSpc>
+                <a:spcPts val="3840"/>
+              </a:lnSpc>
+              <a:spcAft>
+                <a:spcPts val="960"/>
+              </a:spcAft>
+              <a:defRPr sz="3200" b="1">
+                <a:solidFill>
+                  <a:srgbClr val="CDD6F4"/>
+                </a:solidFill>
+                <a:latin typeface="Segoe UI"/>
+              </a:defRPr>
+            </a:pPr>
+            <a:r>
+              <a:t>Get Started Today</a:t>
+            </a:r>
+          </a:p>
+        </p:txBody>
+      </p:sp>
+      <p:sp>
+        <p:nvSpPr>
+          <p:cNvPr id="4" name="Rectangle 3"/>
+          <p:cNvSpPr/>
+          <p:nvPr/>
+        </p:nvSpPr>
+        <p:spPr>
+          <a:xfrm>
+            <a:off x="822960" y="1417320"/>
+            <a:ext cx="54864" cy="822960"/>
+          </a:xfrm>
+          <a:prstGeom prst="rect">
+            <a:avLst/>
+          </a:prstGeom>
+          <a:solidFill>
+            <a:srgbClr val="89B4FA"/>
+          </a:solidFill>
+          <a:ln>
+            <a:noFill/>
+          </a:ln>
+        </p:spPr>
+        <p:style>
+          <a:lnRef idx="1">
+            <a:schemeClr val="accent1"/>
+          </a:lnRef>
+          <a:fillRef idx="3">
+            <a:schemeClr val="accent1"/>
+          </a:fillRef>
+          <a:effectRef idx="2">
+            <a:schemeClr val="accent1"/>
+          </a:effectRef>
+          <a:fontRef idx="minor">
+            <a:schemeClr val="lt1"/>
+          </a:fontRef>
+        </p:style>
+        <p:txBody>
+          <a:bodyPr rtlCol="0" anchor="ctr"/>
+          <a:lstStyle/>
+          <a:p>
+            <a:pPr algn="ctr"/>
+          </a:p>
+        </p:txBody>
+      </p:sp>
+      <p:sp>
+        <p:nvSpPr>
+          <p:cNvPr id="5" name="TextBox 4"/>
+          <p:cNvSpPr txBox="1"/>
+          <p:nvPr/>
+        </p:nvSpPr>
+        <p:spPr>
+          <a:xfrm>
+            <a:off x="1097280" y="1399032"/>
+            <a:ext cx="3657600" cy="320040"/>
+          </a:xfrm>
+          <a:prstGeom prst="rect">
+            <a:avLst/>
+          </a:prstGeom>
+          <a:noFill/>
+        </p:spPr>
+        <p:txBody>
+          <a:bodyPr wrap="square">
+            <a:spAutoFit/>
+          </a:bodyPr>
+          <a:lstStyle/>
+          <a:p>
+            <a:pPr algn="l">
+              <a:lnSpc>
+                <a:spcPts val="2400"/>
+              </a:lnSpc>
+              <a:spcAft>
+                <a:spcPts val="600"/>
+              </a:spcAft>
+              <a:defRPr sz="2000" b="1">
+                <a:solidFill>
+                  <a:srgbClr val="89B4FA"/>
+                </a:solidFill>
+                <a:latin typeface="Segoe UI"/>
+              </a:defRPr>
+            </a:pPr>
+            <a:r>
+              <a:t>Try it now</a:t>
+            </a:r>
+          </a:p>
+        </p:txBody>
+      </p:sp>
+      <p:sp>
+        <p:nvSpPr>
+          <p:cNvPr id="6" name="TextBox 5"/>
+          <p:cNvSpPr txBox="1"/>
+          <p:nvPr/>
+        </p:nvSpPr>
+        <p:spPr>
+          <a:xfrm>
+            <a:off x="1097280" y="1737360"/>
+            <a:ext cx="4572000" cy="320040"/>
+          </a:xfrm>
+          <a:prstGeom prst="rect">
+            <a:avLst/>
+          </a:prstGeom>
+          <a:noFill/>
+        </p:spPr>
+        <p:txBody>
+          <a:bodyPr wrap="square">
+            <a:spAutoFit/>
+          </a:bodyPr>
+          <a:lstStyle/>
+          <a:p>
+            <a:pPr algn="l">
+              <a:lnSpc>
+                <a:spcPts val="1680"/>
+              </a:lnSpc>
+              <a:spcAft>
+                <a:spcPts val="420"/>
+              </a:spcAft>
+              <a:defRPr sz="1400" b="0">
+                <a:solidFill>
+                  <a:srgbClr val="CDD6F4"/>
+                </a:solidFill>
+                <a:latin typeface="Cascadia Code"/>
+              </a:defRPr>
+            </a:pPr>
+            <a:r>
+              <a:t>npx @alan-jowett/promptkit</a:t>
+            </a:r>
+          </a:p>
+        </p:txBody>
+      </p:sp>
+      <p:sp>
+        <p:nvSpPr>
+          <p:cNvPr id="7" name="TextBox 6"/>
+          <p:cNvSpPr txBox="1"/>
+          <p:nvPr/>
+        </p:nvSpPr>
+        <p:spPr>
+          <a:xfrm>
+            <a:off x="6400800" y="1463040"/>
+            <a:ext cx="5029200" cy="731520"/>
+          </a:xfrm>
+          <a:prstGeom prst="rect">
+            <a:avLst/>
+          </a:prstGeom>
+          <a:noFill/>
+        </p:spPr>
+        <p:txBody>
+          <a:bodyPr wrap="square">
+            <a:spAutoFit/>
+          </a:bodyPr>
+          <a:lstStyle/>
+          <a:p>
+            <a:pPr algn="l">
+              <a:lnSpc>
+                <a:spcPts val="1560"/>
+              </a:lnSpc>
+              <a:spcAft>
+                <a:spcPts val="390"/>
+              </a:spcAft>
+              <a:defRPr sz="1300" b="0">
+                <a:solidFill>
+                  <a:srgbClr val="6C7086"/>
+                </a:solidFill>
+                <a:latin typeface="Segoe UI"/>
+              </a:defRPr>
+            </a:pPr>
+            <a:r>
+              <a:t>Zero install — just run it. Walks you through</a:t>
+            </a:r>
+            <a:br/>
+            <a:r>
+              <a:t>template selection and prompt assembly.</a:t>
+            </a:r>
+          </a:p>
+        </p:txBody>
+      </p:sp>
+      <p:sp>
+        <p:nvSpPr>
+          <p:cNvPr id="8" name="Rectangle 7"/>
+          <p:cNvSpPr/>
+          <p:nvPr/>
+        </p:nvSpPr>
+        <p:spPr>
+          <a:xfrm>
+            <a:off x="822960" y="2651760"/>
+            <a:ext cx="54864" cy="822960"/>
+          </a:xfrm>
+          <a:prstGeom prst="rect">
+            <a:avLst/>
+          </a:prstGeom>
+          <a:solidFill>
+            <a:srgbClr val="A6E3A1"/>
+          </a:solidFill>
+          <a:ln>
+            <a:noFill/>
+          </a:ln>
+        </p:spPr>
+        <p:style>
+          <a:lnRef idx="1">
+            <a:schemeClr val="accent1"/>
+          </a:lnRef>
+          <a:fillRef idx="3">
+            <a:schemeClr val="accent1"/>
+          </a:fillRef>
+          <a:effectRef idx="2">
+            <a:schemeClr val="accent1"/>
+          </a:effectRef>
+          <a:fontRef idx="minor">
+            <a:schemeClr val="lt1"/>
+          </a:fontRef>
+        </p:style>
+        <p:txBody>
+          <a:bodyPr rtlCol="0" anchor="ctr"/>
+          <a:lstStyle/>
+          <a:p>
+            <a:pPr algn="ctr"/>
+          </a:p>
+        </p:txBody>
+      </p:sp>
+      <p:sp>
+        <p:nvSpPr>
+          <p:cNvPr id="9" name="TextBox 8"/>
+          <p:cNvSpPr txBox="1"/>
+          <p:nvPr/>
+        </p:nvSpPr>
+        <p:spPr>
+          <a:xfrm>
+            <a:off x="1097280" y="2633472"/>
+            <a:ext cx="3657600" cy="320040"/>
+          </a:xfrm>
+          <a:prstGeom prst="rect">
+            <a:avLst/>
+          </a:prstGeom>
+          <a:noFill/>
+        </p:spPr>
+        <p:txBody>
+          <a:bodyPr wrap="square">
+            <a:spAutoFit/>
+          </a:bodyPr>
+          <a:lstStyle/>
+          <a:p>
+            <a:pPr algn="l">
+              <a:lnSpc>
+                <a:spcPts val="2400"/>
+              </a:lnSpc>
+              <a:spcAft>
+                <a:spcPts val="600"/>
+              </a:spcAft>
+              <a:defRPr sz="2000" b="1">
+                <a:solidFill>
+                  <a:srgbClr val="A6E3A1"/>
+                </a:solidFill>
+                <a:latin typeface="Segoe UI"/>
+              </a:defRPr>
+            </a:pPr>
+            <a:r>
+              <a:t>Browse the repo</a:t>
+            </a:r>
+          </a:p>
+        </p:txBody>
+      </p:sp>
+      <p:sp>
+        <p:nvSpPr>
+          <p:cNvPr id="10" name="TextBox 9"/>
+          <p:cNvSpPr txBox="1"/>
+          <p:nvPr/>
+        </p:nvSpPr>
+        <p:spPr>
+          <a:xfrm>
+            <a:off x="1097280" y="2971800"/>
+            <a:ext cx="4572000" cy="320040"/>
+          </a:xfrm>
+          <a:prstGeom prst="rect">
+            <a:avLst/>
+          </a:prstGeom>
+          <a:noFill/>
+        </p:spPr>
+        <p:txBody>
+          <a:bodyPr wrap="square">
+            <a:spAutoFit/>
+          </a:bodyPr>
+          <a:lstStyle/>
+          <a:p>
+            <a:pPr algn="l">
+              <a:lnSpc>
+                <a:spcPts val="1680"/>
+              </a:lnSpc>
+              <a:spcAft>
+                <a:spcPts val="420"/>
+              </a:spcAft>
+              <a:defRPr sz="1400" b="0">
+                <a:solidFill>
+                  <a:srgbClr val="CDD6F4"/>
+                </a:solidFill>
+                <a:latin typeface="Cascadia Code"/>
+              </a:defRPr>
+            </a:pPr>
+            <a:r>
+              <a:t>aka.ms/PromptKit</a:t>
+            </a:r>
+          </a:p>
+        </p:txBody>
+      </p:sp>
+      <p:sp>
+        <p:nvSpPr>
+          <p:cNvPr id="11" name="TextBox 10"/>
+          <p:cNvSpPr txBox="1"/>
+          <p:nvPr/>
+        </p:nvSpPr>
+        <p:spPr>
+          <a:xfrm>
+            <a:off x="6400800" y="2697480"/>
+            <a:ext cx="5029200" cy="731520"/>
+          </a:xfrm>
+          <a:prstGeom prst="rect">
+            <a:avLst/>
+          </a:prstGeom>
+          <a:noFill/>
+        </p:spPr>
+        <p:txBody>
+          <a:bodyPr wrap="square">
+            <a:spAutoFit/>
+          </a:bodyPr>
+          <a:lstStyle/>
+          <a:p>
+            <a:pPr algn="l">
+              <a:lnSpc>
+                <a:spcPts val="1560"/>
+              </a:lnSpc>
+              <a:spcAft>
+                <a:spcPts val="390"/>
+              </a:spcAft>
+              <a:defRPr sz="1300" b="0">
+                <a:solidFill>
+                  <a:srgbClr val="6C7086"/>
+                </a:solidFill>
+                <a:latin typeface="Segoe UI"/>
+              </a:defRPr>
+            </a:pPr>
+            <a:r>
+              <a:t>Read the templates, protocols, personas.</a:t>
+            </a:r>
+            <a:br/>
+            <a:r>
+              <a:t>Understand the composition model.</a:t>
+            </a:r>
+          </a:p>
+        </p:txBody>
+      </p:sp>
+      <p:sp>
+        <p:nvSpPr>
+          <p:cNvPr id="12" name="Rectangle 11"/>
+          <p:cNvSpPr/>
+          <p:nvPr/>
+        </p:nvSpPr>
+        <p:spPr>
+          <a:xfrm>
+            <a:off x="822960" y="3886200"/>
+            <a:ext cx="54864" cy="822960"/>
+          </a:xfrm>
+          <a:prstGeom prst="rect">
+            <a:avLst/>
+          </a:prstGeom>
+          <a:solidFill>
+            <a:srgbClr val="F9E2AF"/>
+          </a:solidFill>
+          <a:ln>
+            <a:noFill/>
+          </a:ln>
+        </p:spPr>
+        <p:style>
+          <a:lnRef idx="1">
+            <a:schemeClr val="accent1"/>
+          </a:lnRef>
+          <a:fillRef idx="3">
+            <a:schemeClr val="accent1"/>
+          </a:fillRef>
+          <a:effectRef idx="2">
+            <a:schemeClr val="accent1"/>
+          </a:effectRef>
+          <a:fontRef idx="minor">
+            <a:schemeClr val="lt1"/>
+          </a:fontRef>
+        </p:style>
+        <p:txBody>
+          <a:bodyPr rtlCol="0" anchor="ctr"/>
+          <a:lstStyle/>
+          <a:p>
+            <a:pPr algn="ctr"/>
+          </a:p>
+        </p:txBody>
+      </p:sp>
+      <p:sp>
+        <p:nvSpPr>
+          <p:cNvPr id="13" name="TextBox 12"/>
+          <p:cNvSpPr txBox="1"/>
+          <p:nvPr/>
+        </p:nvSpPr>
+        <p:spPr>
+          <a:xfrm>
+            <a:off x="1097280" y="3867912"/>
+            <a:ext cx="3657600" cy="320040"/>
+          </a:xfrm>
+          <a:prstGeom prst="rect">
+            <a:avLst/>
+          </a:prstGeom>
+          <a:noFill/>
+        </p:spPr>
+        <p:txBody>
+          <a:bodyPr wrap="square">
+            <a:spAutoFit/>
+          </a:bodyPr>
+          <a:lstStyle/>
+          <a:p>
+            <a:pPr algn="l">
+              <a:lnSpc>
+                <a:spcPts val="2400"/>
+              </a:lnSpc>
+              <a:spcAft>
+                <a:spcPts val="600"/>
+              </a:spcAft>
+              <a:defRPr sz="2000" b="1">
+                <a:solidFill>
+                  <a:srgbClr val="F9E2AF"/>
+                </a:solidFill>
+                <a:latin typeface="Segoe UI"/>
+              </a:defRPr>
+            </a:pPr>
+            <a:r>
+              <a:t>Contribute</a:t>
+            </a:r>
+          </a:p>
+        </p:txBody>
+      </p:sp>
+      <p:sp>
+        <p:nvSpPr>
+          <p:cNvPr id="14" name="TextBox 13"/>
+          <p:cNvSpPr txBox="1"/>
+          <p:nvPr/>
+        </p:nvSpPr>
+        <p:spPr>
+          <a:xfrm>
+            <a:off x="1097280" y="4206240"/>
+            <a:ext cx="4572000" cy="320040"/>
+          </a:xfrm>
+          <a:prstGeom prst="rect">
+            <a:avLst/>
+          </a:prstGeom>
+          <a:noFill/>
+        </p:spPr>
+        <p:txBody>
+          <a:bodyPr wrap="square">
+            <a:spAutoFit/>
+          </a:bodyPr>
+          <a:lstStyle/>
+          <a:p>
+            <a:pPr algn="l">
+              <a:lnSpc>
+                <a:spcPts val="1680"/>
+              </a:lnSpc>
+              <a:spcAft>
+                <a:spcPts val="420"/>
+              </a:spcAft>
+              <a:defRPr sz="1400" b="0">
+                <a:solidFill>
+                  <a:srgbClr val="CDD6F4"/>
+                </a:solidFill>
+                <a:latin typeface="Cascadia Code"/>
+              </a:defRPr>
+            </a:pPr>
+            <a:r>
+              <a:t>Use the extend-library template</a:t>
+            </a:r>
+          </a:p>
+        </p:txBody>
+      </p:sp>
+      <p:sp>
+        <p:nvSpPr>
+          <p:cNvPr id="15" name="TextBox 14"/>
+          <p:cNvSpPr txBox="1"/>
+          <p:nvPr/>
+        </p:nvSpPr>
+        <p:spPr>
+          <a:xfrm>
+            <a:off x="6400800" y="3931920"/>
+            <a:ext cx="5029200" cy="731520"/>
+          </a:xfrm>
+          <a:prstGeom prst="rect">
+            <a:avLst/>
+          </a:prstGeom>
+          <a:noFill/>
+        </p:spPr>
+        <p:txBody>
+          <a:bodyPr wrap="square">
+            <a:spAutoFit/>
+          </a:bodyPr>
+          <a:lstStyle/>
+          <a:p>
+            <a:pPr algn="l">
+              <a:lnSpc>
+                <a:spcPts val="1560"/>
+              </a:lnSpc>
+              <a:spcAft>
+                <a:spcPts val="390"/>
+              </a:spcAft>
+              <a:defRPr sz="1300" b="0">
+                <a:solidFill>
+                  <a:srgbClr val="6C7086"/>
+                </a:solidFill>
+                <a:latin typeface="Segoe UI"/>
+              </a:defRPr>
+            </a:pPr>
+            <a:r>
+              <a:t>Add your own personas, protocols, or templates.</a:t>
+            </a:r>
+            <a:br/>
+            <a:r>
+              <a:t>PromptKit eats its own dog food — the contribution</a:t>
+            </a:r>
+            <a:br/>
+            <a:r>
+              <a:t>workflow is itself a PromptKit template.</a:t>
+            </a:r>
+          </a:p>
+        </p:txBody>
+      </p:sp>
+      <p:sp>
+        <p:nvSpPr>
+          <p:cNvPr id="16" name="Rectangle 15"/>
+          <p:cNvSpPr/>
+          <p:nvPr/>
+        </p:nvSpPr>
+        <p:spPr>
+          <a:xfrm>
+            <a:off x="822960" y="5120640"/>
+            <a:ext cx="54864" cy="822960"/>
+          </a:xfrm>
+          <a:prstGeom prst="rect">
+            <a:avLst/>
+          </a:prstGeom>
+          <a:solidFill>
+            <a:srgbClr val="FAB387"/>
+          </a:solidFill>
+          <a:ln>
+            <a:noFill/>
+          </a:ln>
+        </p:spPr>
+        <p:style>
+          <a:lnRef idx="1">
+            <a:schemeClr val="accent1"/>
+          </a:lnRef>
+          <a:fillRef idx="3">
+            <a:schemeClr val="accent1"/>
+          </a:fillRef>
+          <a:effectRef idx="2">
+            <a:schemeClr val="accent1"/>
+          </a:effectRef>
+          <a:fontRef idx="minor">
+            <a:schemeClr val="lt1"/>
+          </a:fontRef>
+        </p:style>
+        <p:txBody>
+          <a:bodyPr rtlCol="0" anchor="ctr"/>
+          <a:lstStyle/>
+          <a:p>
+            <a:pPr algn="ctr"/>
+          </a:p>
+        </p:txBody>
+      </p:sp>
+      <p:sp>
+        <p:nvSpPr>
+          <p:cNvPr id="17" name="TextBox 16"/>
+          <p:cNvSpPr txBox="1"/>
+          <p:nvPr/>
+        </p:nvSpPr>
+        <p:spPr>
+          <a:xfrm>
+            <a:off x="1097280" y="5102352"/>
+            <a:ext cx="3657600" cy="320040"/>
+          </a:xfrm>
+          <a:prstGeom prst="rect">
+            <a:avLst/>
+          </a:prstGeom>
+          <a:noFill/>
+        </p:spPr>
+        <p:txBody>
+          <a:bodyPr wrap="square">
+            <a:spAutoFit/>
+          </a:bodyPr>
+          <a:lstStyle/>
+          <a:p>
+            <a:pPr algn="l">
+              <a:lnSpc>
+                <a:spcPts val="2400"/>
+              </a:lnSpc>
+              <a:spcAft>
+                <a:spcPts val="600"/>
+              </a:spcAft>
+              <a:defRPr sz="2000" b="1">
+                <a:solidFill>
+                  <a:srgbClr val="FAB387"/>
+                </a:solidFill>
+                <a:latin typeface="Segoe UI"/>
+              </a:defRPr>
+            </a:pPr>
+            <a:r>
+              <a:t>Share feedback</a:t>
+            </a:r>
+          </a:p>
+        </p:txBody>
+      </p:sp>
+      <p:sp>
+        <p:nvSpPr>
+          <p:cNvPr id="18" name="TextBox 17"/>
+          <p:cNvSpPr txBox="1"/>
+          <p:nvPr/>
+        </p:nvSpPr>
+        <p:spPr>
+          <a:xfrm>
+            <a:off x="1097280" y="5440680"/>
+            <a:ext cx="4572000" cy="320040"/>
+          </a:xfrm>
+          <a:prstGeom prst="rect">
+            <a:avLst/>
+          </a:prstGeom>
+          <a:noFill/>
+        </p:spPr>
+        <p:txBody>
+          <a:bodyPr wrap="square">
+            <a:spAutoFit/>
+          </a:bodyPr>
+          <a:lstStyle/>
+          <a:p>
+            <a:pPr algn="l">
+              <a:lnSpc>
+                <a:spcPts val="1680"/>
+              </a:lnSpc>
+              <a:spcAft>
+                <a:spcPts val="420"/>
+              </a:spcAft>
+              <a:defRPr sz="1400" b="0">
+                <a:solidFill>
+                  <a:srgbClr val="CDD6F4"/>
+                </a:solidFill>
+                <a:latin typeface="Cascadia Code"/>
+              </a:defRPr>
+            </a:pPr>
+            <a:r>
+              <a:t>File issues or start discussions</a:t>
+            </a:r>
+          </a:p>
+        </p:txBody>
+      </p:sp>
+      <p:sp>
+        <p:nvSpPr>
+          <p:cNvPr id="19" name="TextBox 18"/>
+          <p:cNvSpPr txBox="1"/>
+          <p:nvPr/>
+        </p:nvSpPr>
+        <p:spPr>
+          <a:xfrm>
+            <a:off x="6400800" y="5166360"/>
+            <a:ext cx="5029200" cy="731520"/>
+          </a:xfrm>
+          <a:prstGeom prst="rect">
+            <a:avLst/>
+          </a:prstGeom>
+          <a:noFill/>
+        </p:spPr>
+        <p:txBody>
+          <a:bodyPr wrap="square">
+            <a:spAutoFit/>
+          </a:bodyPr>
+          <a:lstStyle/>
+          <a:p>
+            <a:pPr algn="l">
+              <a:lnSpc>
+                <a:spcPts val="1560"/>
+              </a:lnSpc>
+              <a:spcAft>
+                <a:spcPts val="390"/>
+              </a:spcAft>
+              <a:defRPr sz="1300" b="0">
+                <a:solidFill>
+                  <a:srgbClr val="6C7086"/>
+                </a:solidFill>
+                <a:latin typeface="Segoe UI"/>
+              </a:defRPr>
+            </a:pPr>
+            <a:r>
+              <a:t>What templates are missing? What workflows</a:t>
+            </a:r>
+            <a:br/>
+            <a:r>
+              <a:t>do you wish PromptKit supported?</a:t>
             </a:r>
           </a:p>
         </p:txBody>
@@ -5954,7 +6762,7 @@
       <p:grpSpPr/>
       <p:sp>
         <p:nvSpPr>
-          <p:cNvPr id="2" name="Rectangle 1"/>
+          <p:cNvPr id="2" name="TopBar"/>
           <p:cNvSpPr/>
           <p:nvPr/>
         </p:nvSpPr>
@@ -5973,20 +6781,6 @@
             <a:noFill/>
           </a:ln>
         </p:spPr>
-        <p:style>
-          <a:lnRef idx="1">
-            <a:schemeClr val="accent1"/>
-          </a:lnRef>
-          <a:fillRef idx="3">
-            <a:schemeClr val="accent1"/>
-          </a:fillRef>
-          <a:effectRef idx="2">
-            <a:schemeClr val="accent1"/>
-          </a:effectRef>
-          <a:fontRef idx="minor">
-            <a:schemeClr val="lt1"/>
-          </a:fontRef>
-        </p:style>
         <p:txBody>
           <a:bodyPr rtlCol="0" anchor="ctr"/>
           <a:lstStyle/>
@@ -6032,21 +6826,63 @@
               </a:defRPr>
             </a:pPr>
             <a:r>
-              <a:t>Architecture: The 5-Layer Composition Stack</a:t>
-            </a:r>
-          </a:p>
-        </p:txBody>
-      </p:sp>
-      <p:sp>
-        <p:nvSpPr>
-          <p:cNvPr id="4" name="Rounded Rectangle 3"/>
+              <a:t>The Engineering Lifecycle</a:t>
+            </a:r>
+          </a:p>
+        </p:txBody>
+      </p:sp>
+      <p:sp>
+        <p:nvSpPr>
+          <p:cNvPr id="4" name="TextBox 3"/>
+          <p:cNvSpPr txBox="1"/>
+          <p:nvPr/>
+        </p:nvSpPr>
+        <p:spPr>
+          <a:xfrm>
+            <a:off x="731520" y="1005840"/>
+            <a:ext cx="10058400" cy="365760"/>
+          </a:xfrm>
+          <a:prstGeom prst="rect">
+            <a:avLst/>
+          </a:prstGeom>
+          <a:noFill/>
+        </p:spPr>
+        <p:txBody>
+          <a:bodyPr wrap="square">
+            <a:spAutoFit/>
+          </a:bodyPr>
+          <a:lstStyle/>
+          <a:p>
+            <a:pPr algn="l">
+              <a:lnSpc>
+                <a:spcPts val="2160"/>
+              </a:lnSpc>
+              <a:spcAft>
+                <a:spcPts val="540"/>
+              </a:spcAft>
+              <a:defRPr sz="1800" b="0">
+                <a:solidFill>
+                  <a:srgbClr val="A6ADC8"/>
+                </a:solidFill>
+                <a:latin typeface="Segoe UI"/>
+              </a:defRPr>
+            </a:pPr>
+            <a:r>
+              <a:t>Three composable workflows that cover the full lifecycle of any engineering project</a:t>
+            </a:r>
+          </a:p>
+        </p:txBody>
+      </p:sp>
+      <p:sp>
+        <p:nvSpPr>
+          <p:cNvPr id="5" name="RoundRect5"/>
           <p:cNvSpPr/>
           <p:nvPr/>
         </p:nvSpPr>
         <p:spPr>
           <a:xfrm>
-            <a:off x="838047" y="1417320"/>
-            <a:ext cx="10515600" cy="777240"/>
+            <a:off x="548640" y="1737360"/>
+            <a:ext cx="2926080" cy="2560320"/>
           </a:xfrm>
           <a:prstGeom prst="roundRect">
             <a:avLst/>
@@ -6059,20 +6895,6 @@
           </a:ln>
           <a:effectLst/>
         </p:spPr>
-        <p:style>
-          <a:lnRef idx="1">
-            <a:schemeClr val="accent1"/>
-          </a:lnRef>
-          <a:fillRef idx="3">
-            <a:schemeClr val="accent1"/>
-          </a:fillRef>
-          <a:effectRef idx="2">
-            <a:schemeClr val="accent1"/>
-          </a:effectRef>
-          <a:fontRef idx="minor">
-            <a:schemeClr val="lt1"/>
-          </a:fontRef>
-        </p:style>
         <p:txBody>
           <a:bodyPr rtlCol="0" anchor="ctr"/>
           <a:lstStyle/>
@@ -6083,14 +6905,14 @@
       </p:sp>
       <p:sp>
         <p:nvSpPr>
-          <p:cNvPr id="5" name="Rectangle 4"/>
+          <p:cNvPr id="6" name="AccentBar6"/>
           <p:cNvSpPr/>
           <p:nvPr/>
         </p:nvSpPr>
         <p:spPr>
           <a:xfrm>
-            <a:off x="838047" y="1417320"/>
-            <a:ext cx="64008" cy="777240"/>
+            <a:off x="548640" y="1737360"/>
+            <a:ext cx="2926080" cy="54864"/>
           </a:xfrm>
           <a:prstGeom prst="rect">
             <a:avLst/>
@@ -6102,20 +6924,6 @@
             <a:noFill/>
           </a:ln>
         </p:spPr>
-        <p:style>
-          <a:lnRef idx="1">
-            <a:schemeClr val="accent1"/>
-          </a:lnRef>
-          <a:fillRef idx="3">
-            <a:schemeClr val="accent1"/>
-          </a:fillRef>
-          <a:effectRef idx="2">
-            <a:schemeClr val="accent1"/>
-          </a:effectRef>
-          <a:fontRef idx="minor">
-            <a:schemeClr val="lt1"/>
-          </a:fontRef>
-        </p:style>
         <p:txBody>
           <a:bodyPr rtlCol="0" anchor="ctr"/>
           <a:lstStyle/>
@@ -6126,14 +6934,132 @@
       </p:sp>
       <p:sp>
         <p:nvSpPr>
-          <p:cNvPr id="6" name="TextBox 5"/>
+          <p:cNvPr id="7" name="RoundRect7"/>
+          <p:cNvSpPr/>
+          <p:nvPr/>
+        </p:nvSpPr>
+        <p:spPr>
+          <a:xfrm>
+            <a:off x="4389120" y="1737360"/>
+            <a:ext cx="2926080" cy="2560320"/>
+          </a:xfrm>
+          <a:prstGeom prst="roundRect">
+            <a:avLst/>
+          </a:prstGeom>
+          <a:solidFill>
+            <a:srgbClr val="313244"/>
+          </a:solidFill>
+          <a:ln>
+            <a:noFill/>
+          </a:ln>
+          <a:effectLst/>
+        </p:spPr>
+        <p:txBody>
+          <a:bodyPr rtlCol="0" anchor="ctr"/>
+          <a:lstStyle/>
+          <a:p>
+            <a:pPr algn="ctr"/>
+          </a:p>
+        </p:txBody>
+      </p:sp>
+      <p:sp>
+        <p:nvSpPr>
+          <p:cNvPr id="8" name="AccentBar8"/>
+          <p:cNvSpPr/>
+          <p:nvPr/>
+        </p:nvSpPr>
+        <p:spPr>
+          <a:xfrm>
+            <a:off x="4389120" y="1737360"/>
+            <a:ext cx="2926080" cy="54864"/>
+          </a:xfrm>
+          <a:prstGeom prst="rect">
+            <a:avLst/>
+          </a:prstGeom>
+          <a:solidFill>
+            <a:srgbClr val="89B4FA"/>
+          </a:solidFill>
+          <a:ln>
+            <a:noFill/>
+          </a:ln>
+        </p:spPr>
+        <p:txBody>
+          <a:bodyPr rtlCol="0" anchor="ctr"/>
+          <a:lstStyle/>
+          <a:p>
+            <a:pPr algn="ctr"/>
+          </a:p>
+        </p:txBody>
+      </p:sp>
+      <p:sp>
+        <p:nvSpPr>
+          <p:cNvPr id="9" name="RoundRect9"/>
+          <p:cNvSpPr/>
+          <p:nvPr/>
+        </p:nvSpPr>
+        <p:spPr>
+          <a:xfrm>
+            <a:off x="8229600" y="1737360"/>
+            <a:ext cx="2926080" cy="2560320"/>
+          </a:xfrm>
+          <a:prstGeom prst="roundRect">
+            <a:avLst/>
+          </a:prstGeom>
+          <a:solidFill>
+            <a:srgbClr val="313244"/>
+          </a:solidFill>
+          <a:ln>
+            <a:noFill/>
+          </a:ln>
+          <a:effectLst/>
+        </p:spPr>
+        <p:txBody>
+          <a:bodyPr rtlCol="0" anchor="ctr"/>
+          <a:lstStyle/>
+          <a:p>
+            <a:pPr algn="ctr"/>
+          </a:p>
+        </p:txBody>
+      </p:sp>
+      <p:sp>
+        <p:nvSpPr>
+          <p:cNvPr id="10" name="AccentBar10"/>
+          <p:cNvSpPr/>
+          <p:nvPr/>
+        </p:nvSpPr>
+        <p:spPr>
+          <a:xfrm>
+            <a:off x="8229600" y="1737360"/>
+            <a:ext cx="2926080" cy="54864"/>
+          </a:xfrm>
+          <a:prstGeom prst="rect">
+            <a:avLst/>
+          </a:prstGeom>
+          <a:solidFill>
+            <a:srgbClr val="89B4FA"/>
+          </a:solidFill>
+          <a:ln>
+            <a:noFill/>
+          </a:ln>
+        </p:spPr>
+        <p:txBody>
+          <a:bodyPr rtlCol="0" anchor="ctr"/>
+          <a:lstStyle/>
+          <a:p>
+            <a:pPr algn="ctr"/>
+          </a:p>
+        </p:txBody>
+      </p:sp>
+      <p:sp>
+        <p:nvSpPr>
+          <p:cNvPr id="11" name="TextBox 10"/>
           <p:cNvSpPr txBox="1"/>
           <p:nvPr/>
         </p:nvSpPr>
         <p:spPr>
           <a:xfrm>
-            <a:off x="1066647" y="1463040"/>
-            <a:ext cx="2011680" cy="365760"/>
+            <a:off x="548640" y="1874520"/>
+            <a:ext cx="2926080" cy="365760"/>
           </a:xfrm>
           <a:prstGeom prst="rect">
             <a:avLst/>
@@ -6146,14 +7072,14 @@
           </a:bodyPr>
           <a:lstStyle/>
           <a:p>
-            <a:pPr algn="l">
+            <a:pPr algn="ctr">
               <a:lnSpc>
-                <a:spcPts val="2160"/>
+                <a:spcPts val="2400"/>
               </a:lnSpc>
               <a:spcAft>
-                <a:spcPts val="540"/>
+                <a:spcPts val="600"/>
               </a:spcAft>
-              <a:defRPr sz="1800" b="1">
+              <a:defRPr sz="2000" b="1">
                 <a:solidFill>
                   <a:srgbClr val="89B4FA"/>
                 </a:solidFill>
@@ -6161,21 +7087,21 @@
               </a:defRPr>
             </a:pPr>
             <a:r>
-              <a:t>① Persona</a:t>
-            </a:r>
-          </a:p>
-        </p:txBody>
-      </p:sp>
-      <p:sp>
-        <p:nvSpPr>
-          <p:cNvPr id="7" name="TextBox 6"/>
+              <a:t>Bootstrap</a:t>
+            </a:r>
+          </a:p>
+        </p:txBody>
+      </p:sp>
+      <p:sp>
+        <p:nvSpPr>
+          <p:cNvPr id="12" name="TextBox 11"/>
           <p:cNvSpPr txBox="1"/>
           <p:nvPr/>
         </p:nvSpPr>
         <p:spPr>
           <a:xfrm>
-            <a:off x="3124047" y="1463040"/>
-            <a:ext cx="2743200" cy="365760"/>
+            <a:off x="548640" y="2286000"/>
+            <a:ext cx="2926080" cy="457200"/>
           </a:xfrm>
           <a:prstGeom prst="rect">
             <a:avLst/>
@@ -6188,7 +7114,49 @@
           </a:bodyPr>
           <a:lstStyle/>
           <a:p>
-            <a:pPr algn="l">
+            <a:pPr algn="ctr">
+              <a:lnSpc>
+                <a:spcPts val="1680"/>
+              </a:lnSpc>
+              <a:spcAft>
+                <a:spcPts val="420"/>
+              </a:spcAft>
+              <a:defRPr sz="1400" b="0">
+                <a:solidFill>
+                  <a:srgbClr val="89B4FA"/>
+                </a:solidFill>
+                <a:latin typeface="Cascadia Code"/>
+              </a:defRPr>
+            </a:pPr>
+            <a:r>
+              <a:t>spec-extraction-workflow</a:t>
+            </a:r>
+          </a:p>
+        </p:txBody>
+      </p:sp>
+      <p:sp>
+        <p:nvSpPr>
+          <p:cNvPr id="13" name="TextBox 12"/>
+          <p:cNvSpPr txBox="1"/>
+          <p:nvPr/>
+        </p:nvSpPr>
+        <p:spPr>
+          <a:xfrm>
+            <a:off x="548640" y="2743200"/>
+            <a:ext cx="2926080" cy="1371600"/>
+          </a:xfrm>
+          <a:prstGeom prst="rect">
+            <a:avLst/>
+          </a:prstGeom>
+          <a:noFill/>
+        </p:spPr>
+        <p:txBody>
+          <a:bodyPr wrap="square">
+            <a:spAutoFit/>
+          </a:bodyPr>
+          <a:lstStyle/>
+          <a:p>
+            <a:pPr algn="ctr">
               <a:lnSpc>
                 <a:spcPts val="1800"/>
               </a:lnSpc>
@@ -6203,21 +7171,33 @@
               </a:defRPr>
             </a:pPr>
             <a:r>
-              <a:t>Who the LLM becomes</a:t>
-            </a:r>
-          </a:p>
-        </p:txBody>
-      </p:sp>
-      <p:sp>
-        <p:nvSpPr>
-          <p:cNvPr id="8" name="TextBox 7"/>
+              <a:t>Extract a clean semantic</a:t>
+            </a:r>
+            <a:br/>
+            <a:r>
+              <a:t>baseline from any existing</a:t>
+            </a:r>
+            <a:br/>
+            <a:r>
+              <a:t>repository: requirements,</a:t>
+            </a:r>
+            <a:br/>
+            <a:r>
+              <a:t>design, and validation plan</a:t>
+            </a:r>
+          </a:p>
+        </p:txBody>
+      </p:sp>
+      <p:sp>
+        <p:nvSpPr>
+          <p:cNvPr id="14" name="TextBox 13"/>
           <p:cNvSpPr txBox="1"/>
           <p:nvPr/>
         </p:nvSpPr>
         <p:spPr>
           <a:xfrm>
-            <a:off x="3124047" y="1801368"/>
-            <a:ext cx="8046720" cy="365760"/>
+            <a:off x="3474720" y="2651760"/>
+            <a:ext cx="548640" cy="457200"/>
           </a:xfrm>
           <a:prstGeom prst="rect">
             <a:avLst/>
@@ -6230,14 +7210,14 @@
           </a:bodyPr>
           <a:lstStyle/>
           <a:p>
-            <a:pPr algn="l">
+            <a:pPr algn="ctr">
               <a:lnSpc>
-                <a:spcPts val="1439"/>
+                <a:spcPts val="4320"/>
               </a:lnSpc>
               <a:spcAft>
-                <a:spcPts val="359"/>
+                <a:spcPts val="1080"/>
               </a:spcAft>
-              <a:defRPr sz="1200" b="0">
+              <a:defRPr sz="3600" b="0">
                 <a:solidFill>
                   <a:srgbClr val="6C7086"/>
                 </a:solidFill>
@@ -6245,108 +7225,21 @@
               </a:defRPr>
             </a:pPr>
             <a:r>
-              <a:t>systems-engineer, security-auditor, devops-engineer …</a:t>
-            </a:r>
-          </a:p>
-        </p:txBody>
-      </p:sp>
-      <p:sp>
-        <p:nvSpPr>
-          <p:cNvPr id="9" name="Rounded Rectangle 8"/>
-          <p:cNvSpPr/>
-          <p:nvPr/>
-        </p:nvSpPr>
-        <p:spPr>
-          <a:xfrm>
-            <a:off x="1112367" y="2377440"/>
-            <a:ext cx="9966960" cy="777240"/>
-          </a:xfrm>
-          <a:prstGeom prst="roundRect">
-            <a:avLst/>
-          </a:prstGeom>
-          <a:solidFill>
-            <a:srgbClr val="313244"/>
-          </a:solidFill>
-          <a:ln>
-            <a:noFill/>
-          </a:ln>
-          <a:effectLst/>
-        </p:spPr>
-        <p:style>
-          <a:lnRef idx="1">
-            <a:schemeClr val="accent1"/>
-          </a:lnRef>
-          <a:fillRef idx="3">
-            <a:schemeClr val="accent1"/>
-          </a:fillRef>
-          <a:effectRef idx="2">
-            <a:schemeClr val="accent1"/>
-          </a:effectRef>
-          <a:fontRef idx="minor">
-            <a:schemeClr val="lt1"/>
-          </a:fontRef>
-        </p:style>
-        <p:txBody>
-          <a:bodyPr rtlCol="0" anchor="ctr"/>
-          <a:lstStyle/>
-          <a:p>
-            <a:pPr algn="ctr"/>
-          </a:p>
-        </p:txBody>
-      </p:sp>
-      <p:sp>
-        <p:nvSpPr>
-          <p:cNvPr id="10" name="Rectangle 9"/>
-          <p:cNvSpPr/>
-          <p:nvPr/>
-        </p:nvSpPr>
-        <p:spPr>
-          <a:xfrm>
-            <a:off x="1112367" y="2377440"/>
-            <a:ext cx="64008" cy="777240"/>
-          </a:xfrm>
-          <a:prstGeom prst="rect">
-            <a:avLst/>
-          </a:prstGeom>
-          <a:solidFill>
-            <a:srgbClr val="A6E3A1"/>
-          </a:solidFill>
-          <a:ln>
-            <a:noFill/>
-          </a:ln>
-        </p:spPr>
-        <p:style>
-          <a:lnRef idx="1">
-            <a:schemeClr val="accent1"/>
-          </a:lnRef>
-          <a:fillRef idx="3">
-            <a:schemeClr val="accent1"/>
-          </a:fillRef>
-          <a:effectRef idx="2">
-            <a:schemeClr val="accent1"/>
-          </a:effectRef>
-          <a:fontRef idx="minor">
-            <a:schemeClr val="lt1"/>
-          </a:fontRef>
-        </p:style>
-        <p:txBody>
-          <a:bodyPr rtlCol="0" anchor="ctr"/>
-          <a:lstStyle/>
-          <a:p>
-            <a:pPr algn="ctr"/>
-          </a:p>
-        </p:txBody>
-      </p:sp>
-      <p:sp>
-        <p:nvSpPr>
-          <p:cNvPr id="11" name="TextBox 10"/>
+              <a:t>→</a:t>
+            </a:r>
+          </a:p>
+        </p:txBody>
+      </p:sp>
+      <p:sp>
+        <p:nvSpPr>
+          <p:cNvPr id="15" name="TextBox 14"/>
           <p:cNvSpPr txBox="1"/>
           <p:nvPr/>
         </p:nvSpPr>
         <p:spPr>
           <a:xfrm>
-            <a:off x="1340967" y="2423160"/>
-            <a:ext cx="2011680" cy="365760"/>
+            <a:off x="4389120" y="1874520"/>
+            <a:ext cx="2926080" cy="365760"/>
           </a:xfrm>
           <a:prstGeom prst="rect">
             <a:avLst/>
@@ -6359,36 +7252,36 @@
           </a:bodyPr>
           <a:lstStyle/>
           <a:p>
-            <a:pPr algn="l">
+            <a:pPr algn="ctr">
               <a:lnSpc>
-                <a:spcPts val="2160"/>
+                <a:spcPts val="2400"/>
               </a:lnSpc>
               <a:spcAft>
-                <a:spcPts val="540"/>
+                <a:spcPts val="600"/>
               </a:spcAft>
-              <a:defRPr sz="1800" b="1">
-                <a:solidFill>
-                  <a:srgbClr val="A6E3A1"/>
+              <a:defRPr sz="2000" b="1">
+                <a:solidFill>
+                  <a:srgbClr val="89B4FA"/>
                 </a:solidFill>
                 <a:latin typeface="Segoe UI"/>
               </a:defRPr>
             </a:pPr>
             <a:r>
-              <a:t>② Protocols</a:t>
-            </a:r>
-          </a:p>
-        </p:txBody>
-      </p:sp>
-      <p:sp>
-        <p:nvSpPr>
-          <p:cNvPr id="12" name="TextBox 11"/>
+              <a:t>Evolve</a:t>
+            </a:r>
+          </a:p>
+        </p:txBody>
+      </p:sp>
+      <p:sp>
+        <p:nvSpPr>
+          <p:cNvPr id="16" name="TextBox 15"/>
           <p:cNvSpPr txBox="1"/>
           <p:nvPr/>
         </p:nvSpPr>
         <p:spPr>
           <a:xfrm>
-            <a:off x="3398367" y="2423160"/>
-            <a:ext cx="2743200" cy="365760"/>
+            <a:off x="4389120" y="2286000"/>
+            <a:ext cx="2926080" cy="457200"/>
           </a:xfrm>
           <a:prstGeom prst="rect">
             <a:avLst/>
@@ -6401,7 +7294,49 @@
           </a:bodyPr>
           <a:lstStyle/>
           <a:p>
-            <a:pPr algn="l">
+            <a:pPr algn="ctr">
+              <a:lnSpc>
+                <a:spcPts val="1680"/>
+              </a:lnSpc>
+              <a:spcAft>
+                <a:spcPts val="420"/>
+              </a:spcAft>
+              <a:defRPr sz="1400" b="0">
+                <a:solidFill>
+                  <a:srgbClr val="89B4FA"/>
+                </a:solidFill>
+                <a:latin typeface="Cascadia Code"/>
+              </a:defRPr>
+            </a:pPr>
+            <a:r>
+              <a:t>engineering-workflow</a:t>
+            </a:r>
+          </a:p>
+        </p:txBody>
+      </p:sp>
+      <p:sp>
+        <p:nvSpPr>
+          <p:cNvPr id="17" name="TextBox 16"/>
+          <p:cNvSpPr txBox="1"/>
+          <p:nvPr/>
+        </p:nvSpPr>
+        <p:spPr>
+          <a:xfrm>
+            <a:off x="4389120" y="2743200"/>
+            <a:ext cx="2926080" cy="1371600"/>
+          </a:xfrm>
+          <a:prstGeom prst="rect">
+            <a:avLst/>
+          </a:prstGeom>
+          <a:noFill/>
+        </p:spPr>
+        <p:txBody>
+          <a:bodyPr wrap="square">
+            <a:spAutoFit/>
+          </a:bodyPr>
+          <a:lstStyle/>
+          <a:p>
+            <a:pPr algn="ctr">
               <a:lnSpc>
                 <a:spcPts val="1800"/>
               </a:lnSpc>
@@ -6416,21 +7351,33 @@
               </a:defRPr>
             </a:pPr>
             <a:r>
-              <a:t>How it reasons + guardrails</a:t>
-            </a:r>
-          </a:p>
-        </p:txBody>
-      </p:sp>
-      <p:sp>
-        <p:nvSpPr>
-          <p:cNvPr id="13" name="TextBox 12"/>
+              <a:t>Incremental development with</a:t>
+            </a:r>
+            <a:br/>
+            <a:r>
+              <a:t>human-in-the-loop review.</a:t>
+            </a:r>
+            <a:br/>
+            <a:r>
+              <a:t>Propagates changes through</a:t>
+            </a:r>
+            <a:br/>
+            <a:r>
+              <a:t>specs → impl with audits</a:t>
+            </a:r>
+          </a:p>
+        </p:txBody>
+      </p:sp>
+      <p:sp>
+        <p:nvSpPr>
+          <p:cNvPr id="18" name="TextBox 17"/>
           <p:cNvSpPr txBox="1"/>
           <p:nvPr/>
         </p:nvSpPr>
         <p:spPr>
           <a:xfrm>
-            <a:off x="3398367" y="2761488"/>
-            <a:ext cx="7498080" cy="365760"/>
+            <a:off x="7315200" y="2651760"/>
+            <a:ext cx="548640" cy="457200"/>
           </a:xfrm>
           <a:prstGeom prst="rect">
             <a:avLst/>
@@ -6443,14 +7390,14 @@
           </a:bodyPr>
           <a:lstStyle/>
           <a:p>
-            <a:pPr algn="l">
+            <a:pPr algn="ctr">
               <a:lnSpc>
-                <a:spcPts val="1439"/>
+                <a:spcPts val="4320"/>
               </a:lnSpc>
               <a:spcAft>
-                <a:spcPts val="359"/>
+                <a:spcPts val="1080"/>
               </a:spcAft>
-              <a:defRPr sz="1200" b="0">
+              <a:defRPr sz="3600" b="0">
                 <a:solidFill>
                   <a:srgbClr val="6C7086"/>
                 </a:solidFill>
@@ -6458,108 +7405,21 @@
               </a:defRPr>
             </a:pPr>
             <a:r>
-              <a:t>anti-hallucination, root-cause-analysis, thread-safety …</a:t>
-            </a:r>
-          </a:p>
-        </p:txBody>
-      </p:sp>
-      <p:sp>
-        <p:nvSpPr>
-          <p:cNvPr id="14" name="Rounded Rectangle 13"/>
-          <p:cNvSpPr/>
-          <p:nvPr/>
-        </p:nvSpPr>
-        <p:spPr>
-          <a:xfrm>
-            <a:off x="1386687" y="3337560"/>
-            <a:ext cx="9418320" cy="777240"/>
-          </a:xfrm>
-          <a:prstGeom prst="roundRect">
-            <a:avLst/>
-          </a:prstGeom>
-          <a:solidFill>
-            <a:srgbClr val="313244"/>
-          </a:solidFill>
-          <a:ln>
-            <a:noFill/>
-          </a:ln>
-          <a:effectLst/>
-        </p:spPr>
-        <p:style>
-          <a:lnRef idx="1">
-            <a:schemeClr val="accent1"/>
-          </a:lnRef>
-          <a:fillRef idx="3">
-            <a:schemeClr val="accent1"/>
-          </a:fillRef>
-          <a:effectRef idx="2">
-            <a:schemeClr val="accent1"/>
-          </a:effectRef>
-          <a:fontRef idx="minor">
-            <a:schemeClr val="lt1"/>
-          </a:fontRef>
-        </p:style>
-        <p:txBody>
-          <a:bodyPr rtlCol="0" anchor="ctr"/>
-          <a:lstStyle/>
-          <a:p>
-            <a:pPr algn="ctr"/>
-          </a:p>
-        </p:txBody>
-      </p:sp>
-      <p:sp>
-        <p:nvSpPr>
-          <p:cNvPr id="15" name="Rectangle 14"/>
-          <p:cNvSpPr/>
-          <p:nvPr/>
-        </p:nvSpPr>
-        <p:spPr>
-          <a:xfrm>
-            <a:off x="1386687" y="3337560"/>
-            <a:ext cx="64008" cy="777240"/>
-          </a:xfrm>
-          <a:prstGeom prst="rect">
-            <a:avLst/>
-          </a:prstGeom>
-          <a:solidFill>
-            <a:srgbClr val="F9E2AF"/>
-          </a:solidFill>
-          <a:ln>
-            <a:noFill/>
-          </a:ln>
-        </p:spPr>
-        <p:style>
-          <a:lnRef idx="1">
-            <a:schemeClr val="accent1"/>
-          </a:lnRef>
-          <a:fillRef idx="3">
-            <a:schemeClr val="accent1"/>
-          </a:fillRef>
-          <a:effectRef idx="2">
-            <a:schemeClr val="accent1"/>
-          </a:effectRef>
-          <a:fontRef idx="minor">
-            <a:schemeClr val="lt1"/>
-          </a:fontRef>
-        </p:style>
-        <p:txBody>
-          <a:bodyPr rtlCol="0" anchor="ctr"/>
-          <a:lstStyle/>
-          <a:p>
-            <a:pPr algn="ctr"/>
-          </a:p>
-        </p:txBody>
-      </p:sp>
-      <p:sp>
-        <p:nvSpPr>
-          <p:cNvPr id="16" name="TextBox 15"/>
+              <a:t>→</a:t>
+            </a:r>
+          </a:p>
+        </p:txBody>
+      </p:sp>
+      <p:sp>
+        <p:nvSpPr>
+          <p:cNvPr id="19" name="TextBox 18"/>
           <p:cNvSpPr txBox="1"/>
           <p:nvPr/>
         </p:nvSpPr>
         <p:spPr>
           <a:xfrm>
-            <a:off x="1615287" y="3383280"/>
-            <a:ext cx="2011680" cy="365760"/>
+            <a:off x="8229600" y="1874520"/>
+            <a:ext cx="2926080" cy="365760"/>
           </a:xfrm>
           <a:prstGeom prst="rect">
             <a:avLst/>
@@ -6572,36 +7432,36 @@
           </a:bodyPr>
           <a:lstStyle/>
           <a:p>
-            <a:pPr algn="l">
+            <a:pPr algn="ctr">
               <a:lnSpc>
-                <a:spcPts val="2160"/>
+                <a:spcPts val="2400"/>
               </a:lnSpc>
               <a:spcAft>
-                <a:spcPts val="540"/>
+                <a:spcPts val="600"/>
               </a:spcAft>
-              <a:defRPr sz="1800" b="1">
-                <a:solidFill>
-                  <a:srgbClr val="F9E2AF"/>
+              <a:defRPr sz="2000" b="1">
+                <a:solidFill>
+                  <a:srgbClr val="89B4FA"/>
                 </a:solidFill>
                 <a:latin typeface="Segoe UI"/>
               </a:defRPr>
             </a:pPr>
             <a:r>
-              <a:t>③ Format</a:t>
-            </a:r>
-          </a:p>
-        </p:txBody>
-      </p:sp>
-      <p:sp>
-        <p:nvSpPr>
-          <p:cNvPr id="17" name="TextBox 16"/>
+              <a:t>Maintain</a:t>
+            </a:r>
+          </a:p>
+        </p:txBody>
+      </p:sp>
+      <p:sp>
+        <p:nvSpPr>
+          <p:cNvPr id="20" name="TextBox 19"/>
           <p:cNvSpPr txBox="1"/>
           <p:nvPr/>
         </p:nvSpPr>
         <p:spPr>
           <a:xfrm>
-            <a:off x="3672687" y="3383280"/>
-            <a:ext cx="2743200" cy="365760"/>
+            <a:off x="8229600" y="2286000"/>
+            <a:ext cx="2926080" cy="457200"/>
           </a:xfrm>
           <a:prstGeom prst="rect">
             <a:avLst/>
@@ -6614,7 +7474,49 @@
           </a:bodyPr>
           <a:lstStyle/>
           <a:p>
-            <a:pPr algn="l">
+            <a:pPr algn="ctr">
+              <a:lnSpc>
+                <a:spcPts val="1680"/>
+              </a:lnSpc>
+              <a:spcAft>
+                <a:spcPts val="420"/>
+              </a:spcAft>
+              <a:defRPr sz="1400" b="0">
+                <a:solidFill>
+                  <a:srgbClr val="89B4FA"/>
+                </a:solidFill>
+                <a:latin typeface="Cascadia Code"/>
+              </a:defRPr>
+            </a:pPr>
+            <a:r>
+              <a:t>maintenance-workflow</a:t>
+            </a:r>
+          </a:p>
+        </p:txBody>
+      </p:sp>
+      <p:sp>
+        <p:nvSpPr>
+          <p:cNvPr id="21" name="TextBox 20"/>
+          <p:cNvSpPr txBox="1"/>
+          <p:nvPr/>
+        </p:nvSpPr>
+        <p:spPr>
+          <a:xfrm>
+            <a:off x="8229600" y="2743200"/>
+            <a:ext cx="2926080" cy="1371600"/>
+          </a:xfrm>
+          <a:prstGeom prst="rect">
+            <a:avLst/>
+          </a:prstGeom>
+          <a:noFill/>
+        </p:spPr>
+        <p:txBody>
+          <a:bodyPr wrap="square">
+            <a:spAutoFit/>
+          </a:bodyPr>
+          <a:lstStyle/>
+          <a:p>
+            <a:pPr algn="ctr">
               <a:lnSpc>
                 <a:spcPts val="1800"/>
               </a:lnSpc>
@@ -6629,21 +7531,33 @@
               </a:defRPr>
             </a:pPr>
             <a:r>
-              <a:t>Output structure &amp; rules</a:t>
-            </a:r>
-          </a:p>
-        </p:txBody>
-      </p:sp>
-      <p:sp>
-        <p:nvSpPr>
-          <p:cNvPr id="18" name="TextBox 17"/>
+              <a:t>Periodic health check:</a:t>
+            </a:r>
+            <a:br/>
+            <a:r>
+              <a:t>re-audit for drift, classify</a:t>
+            </a:r>
+            <a:br/>
+            <a:r>
+              <a:t>findings, generate corrective</a:t>
+            </a:r>
+            <a:br/>
+            <a:r>
+              <a:t>patches, restore alignment</a:t>
+            </a:r>
+          </a:p>
+        </p:txBody>
+      </p:sp>
+      <p:sp>
+        <p:nvSpPr>
+          <p:cNvPr id="22" name="TextBox 21"/>
           <p:cNvSpPr txBox="1"/>
           <p:nvPr/>
         </p:nvSpPr>
         <p:spPr>
           <a:xfrm>
-            <a:off x="3672687" y="3721608"/>
-            <a:ext cx="6949440" cy="365760"/>
+            <a:off x="1371600" y="4572000"/>
+            <a:ext cx="9144000" cy="365760"/>
           </a:xfrm>
           <a:prstGeom prst="rect">
             <a:avLst/>
@@ -6656,123 +7570,36 @@
           </a:bodyPr>
           <a:lstStyle/>
           <a:p>
-            <a:pPr algn="l">
+            <a:pPr algn="ctr">
               <a:lnSpc>
-                <a:spcPts val="1439"/>
+                <a:spcPts val="2560"/>
               </a:lnSpc>
               <a:spcAft>
-                <a:spcPts val="359"/>
+                <a:spcPts val="480"/>
               </a:spcAft>
-              <a:defRPr sz="1200" b="0">
-                <a:solidFill>
-                  <a:srgbClr val="6C7086"/>
+              <a:defRPr sz="1600" b="0">
+                <a:solidFill>
+                  <a:srgbClr val="CDD6F4"/>
                 </a:solidFill>
                 <a:latin typeface="Segoe UI"/>
               </a:defRPr>
             </a:pPr>
             <a:r>
-              <a:t>requirements-doc, investigation-report, pipeline-spec …</a:t>
-            </a:r>
-          </a:p>
-        </p:txBody>
-      </p:sp>
-      <p:sp>
-        <p:nvSpPr>
-          <p:cNvPr id="19" name="Rounded Rectangle 18"/>
-          <p:cNvSpPr/>
-          <p:nvPr/>
-        </p:nvSpPr>
-        <p:spPr>
-          <a:xfrm>
-            <a:off x="1661007" y="4297680"/>
-            <a:ext cx="8869680" cy="777240"/>
-          </a:xfrm>
-          <a:prstGeom prst="roundRect">
-            <a:avLst/>
-          </a:prstGeom>
-          <a:solidFill>
-            <a:srgbClr val="313244"/>
-          </a:solidFill>
-          <a:ln>
-            <a:noFill/>
-          </a:ln>
-          <a:effectLst/>
-        </p:spPr>
-        <p:style>
-          <a:lnRef idx="1">
-            <a:schemeClr val="accent1"/>
-          </a:lnRef>
-          <a:fillRef idx="3">
-            <a:schemeClr val="accent1"/>
-          </a:fillRef>
-          <a:effectRef idx="2">
-            <a:schemeClr val="accent1"/>
-          </a:effectRef>
-          <a:fontRef idx="minor">
-            <a:schemeClr val="lt1"/>
-          </a:fontRef>
-        </p:style>
-        <p:txBody>
-          <a:bodyPr rtlCol="0" anchor="ctr"/>
-          <a:lstStyle/>
-          <a:p>
-            <a:pPr algn="ctr"/>
-          </a:p>
-        </p:txBody>
-      </p:sp>
-      <p:sp>
-        <p:nvSpPr>
-          <p:cNvPr id="20" name="Rectangle 19"/>
-          <p:cNvSpPr/>
-          <p:nvPr/>
-        </p:nvSpPr>
-        <p:spPr>
-          <a:xfrm>
-            <a:off x="1661007" y="4297680"/>
-            <a:ext cx="64008" cy="777240"/>
-          </a:xfrm>
-          <a:prstGeom prst="rect">
-            <a:avLst/>
-          </a:prstGeom>
-          <a:solidFill>
-            <a:srgbClr val="FAB387"/>
-          </a:solidFill>
-          <a:ln>
-            <a:noFill/>
-          </a:ln>
-        </p:spPr>
-        <p:style>
-          <a:lnRef idx="1">
-            <a:schemeClr val="accent1"/>
-          </a:lnRef>
-          <a:fillRef idx="3">
-            <a:schemeClr val="accent1"/>
-          </a:fillRef>
-          <a:effectRef idx="2">
-            <a:schemeClr val="accent1"/>
-          </a:effectRef>
-          <a:fontRef idx="minor">
-            <a:schemeClr val="lt1"/>
-          </a:fontRef>
-        </p:style>
-        <p:txBody>
-          <a:bodyPr rtlCol="0" anchor="ctr"/>
-          <a:lstStyle/>
-          <a:p>
-            <a:pPr algn="ctr"/>
-          </a:p>
-        </p:txBody>
-      </p:sp>
-      <p:sp>
-        <p:nvSpPr>
-          <p:cNvPr id="21" name="TextBox 20"/>
+              <a:t>↩  Maintain feeds back into Evolve — continuous improvement loop</a:t>
+            </a:r>
+          </a:p>
+        </p:txBody>
+      </p:sp>
+      <p:sp>
+        <p:nvSpPr>
+          <p:cNvPr id="23" name="TextBox 22"/>
           <p:cNvSpPr txBox="1"/>
           <p:nvPr/>
         </p:nvSpPr>
         <p:spPr>
           <a:xfrm>
-            <a:off x="1889607" y="4343400"/>
-            <a:ext cx="2011680" cy="365760"/>
+            <a:off x="822960" y="5120640"/>
+            <a:ext cx="10058400" cy="731520"/>
           </a:xfrm>
           <a:prstGeom prst="rect">
             <a:avLst/>
@@ -6785,361 +7612,26 @@
           </a:bodyPr>
           <a:lstStyle/>
           <a:p>
-            <a:pPr algn="l">
+            <a:pPr algn="ctr">
               <a:lnSpc>
-                <a:spcPts val="2160"/>
+                <a:spcPts val="1680"/>
               </a:lnSpc>
               <a:spcAft>
-                <a:spcPts val="540"/>
+                <a:spcPts val="420"/>
               </a:spcAft>
-              <a:defRPr sz="1800" b="1">
-                <a:solidFill>
-                  <a:srgbClr val="FAB387"/>
+              <a:defRPr sz="1400" b="0">
+                <a:solidFill>
+                  <a:srgbClr val="6C7086"/>
                 </a:solidFill>
                 <a:latin typeface="Segoe UI"/>
               </a:defRPr>
             </a:pPr>
             <a:r>
-              <a:t>④ Taxonomy</a:t>
-            </a:r>
-          </a:p>
-        </p:txBody>
-      </p:sp>
-      <p:sp>
-        <p:nvSpPr>
-          <p:cNvPr id="22" name="TextBox 21"/>
-          <p:cNvSpPr txBox="1"/>
-          <p:nvPr/>
-        </p:nvSpPr>
-        <p:spPr>
-          <a:xfrm>
-            <a:off x="3947007" y="4343400"/>
-            <a:ext cx="2743200" cy="365760"/>
-          </a:xfrm>
-          <a:prstGeom prst="rect">
-            <a:avLst/>
-          </a:prstGeom>
-          <a:noFill/>
-        </p:spPr>
-        <p:txBody>
-          <a:bodyPr wrap="square">
-            <a:spAutoFit/>
-          </a:bodyPr>
-          <a:lstStyle/>
-          <a:p>
-            <a:pPr algn="l">
-              <a:lnSpc>
-                <a:spcPts val="1800"/>
-              </a:lnSpc>
-              <a:spcAft>
-                <a:spcPts val="450"/>
-              </a:spcAft>
-              <a:defRPr sz="1500" b="0">
-                <a:solidFill>
-                  <a:srgbClr val="CDD6F4"/>
-                </a:solidFill>
-                <a:latin typeface="Segoe UI"/>
-              </a:defRPr>
-            </a:pPr>
-            <a:r>
-              <a:t>Domain classification (optional)</a:t>
-            </a:r>
-          </a:p>
-        </p:txBody>
-      </p:sp>
-      <p:sp>
-        <p:nvSpPr>
-          <p:cNvPr id="23" name="TextBox 22"/>
-          <p:cNvSpPr txBox="1"/>
-          <p:nvPr/>
-        </p:nvSpPr>
-        <p:spPr>
-          <a:xfrm>
-            <a:off x="3947007" y="4681728"/>
-            <a:ext cx="6400800" cy="365760"/>
-          </a:xfrm>
-          <a:prstGeom prst="rect">
-            <a:avLst/>
-          </a:prstGeom>
-          <a:noFill/>
-        </p:spPr>
-        <p:txBody>
-          <a:bodyPr wrap="square">
-            <a:spAutoFit/>
-          </a:bodyPr>
-          <a:lstStyle/>
-          <a:p>
-            <a:pPr algn="l">
-              <a:lnSpc>
-                <a:spcPts val="1439"/>
-              </a:lnSpc>
-              <a:spcAft>
-                <a:spcPts val="359"/>
-              </a:spcAft>
-              <a:defRPr sz="1200" b="0">
-                <a:solidFill>
-                  <a:srgbClr val="6C7086"/>
-                </a:solidFill>
-                <a:latin typeface="Segoe UI"/>
-              </a:defRPr>
-            </a:pPr>
-            <a:r>
-              <a:t>Severity levels, priority tiers, risk categories</a:t>
-            </a:r>
-          </a:p>
-        </p:txBody>
-      </p:sp>
-      <p:sp>
-        <p:nvSpPr>
-          <p:cNvPr id="24" name="Rounded Rectangle 23"/>
-          <p:cNvSpPr/>
-          <p:nvPr/>
-        </p:nvSpPr>
-        <p:spPr>
-          <a:xfrm>
-            <a:off x="1935327" y="5257800"/>
-            <a:ext cx="8321040" cy="777240"/>
-          </a:xfrm>
-          <a:prstGeom prst="roundRect">
-            <a:avLst/>
-          </a:prstGeom>
-          <a:solidFill>
-            <a:srgbClr val="313244"/>
-          </a:solidFill>
-          <a:ln>
-            <a:noFill/>
-          </a:ln>
-          <a:effectLst/>
-        </p:spPr>
-        <p:style>
-          <a:lnRef idx="1">
-            <a:schemeClr val="accent1"/>
-          </a:lnRef>
-          <a:fillRef idx="3">
-            <a:schemeClr val="accent1"/>
-          </a:fillRef>
-          <a:effectRef idx="2">
-            <a:schemeClr val="accent1"/>
-          </a:effectRef>
-          <a:fontRef idx="minor">
-            <a:schemeClr val="lt1"/>
-          </a:fontRef>
-        </p:style>
-        <p:txBody>
-          <a:bodyPr rtlCol="0" anchor="ctr"/>
-          <a:lstStyle/>
-          <a:p>
-            <a:pPr algn="ctr"/>
-          </a:p>
-        </p:txBody>
-      </p:sp>
-      <p:sp>
-        <p:nvSpPr>
-          <p:cNvPr id="25" name="Rectangle 24"/>
-          <p:cNvSpPr/>
-          <p:nvPr/>
-        </p:nvSpPr>
-        <p:spPr>
-          <a:xfrm>
-            <a:off x="1935327" y="5257800"/>
-            <a:ext cx="64008" cy="777240"/>
-          </a:xfrm>
-          <a:prstGeom prst="rect">
-            <a:avLst/>
-          </a:prstGeom>
-          <a:solidFill>
-            <a:srgbClr val="F38BA8"/>
-          </a:solidFill>
-          <a:ln>
-            <a:noFill/>
-          </a:ln>
-        </p:spPr>
-        <p:style>
-          <a:lnRef idx="1">
-            <a:schemeClr val="accent1"/>
-          </a:lnRef>
-          <a:fillRef idx="3">
-            <a:schemeClr val="accent1"/>
-          </a:fillRef>
-          <a:effectRef idx="2">
-            <a:schemeClr val="accent1"/>
-          </a:effectRef>
-          <a:fontRef idx="minor">
-            <a:schemeClr val="lt1"/>
-          </a:fontRef>
-        </p:style>
-        <p:txBody>
-          <a:bodyPr rtlCol="0" anchor="ctr"/>
-          <a:lstStyle/>
-          <a:p>
-            <a:pPr algn="ctr"/>
-          </a:p>
-        </p:txBody>
-      </p:sp>
-      <p:sp>
-        <p:nvSpPr>
-          <p:cNvPr id="26" name="TextBox 25"/>
-          <p:cNvSpPr txBox="1"/>
-          <p:nvPr/>
-        </p:nvSpPr>
-        <p:spPr>
-          <a:xfrm>
-            <a:off x="2163927" y="5303520"/>
-            <a:ext cx="2011680" cy="365760"/>
-          </a:xfrm>
-          <a:prstGeom prst="rect">
-            <a:avLst/>
-          </a:prstGeom>
-          <a:noFill/>
-        </p:spPr>
-        <p:txBody>
-          <a:bodyPr wrap="square">
-            <a:spAutoFit/>
-          </a:bodyPr>
-          <a:lstStyle/>
-          <a:p>
-            <a:pPr algn="l">
-              <a:lnSpc>
-                <a:spcPts val="2160"/>
-              </a:lnSpc>
-              <a:spcAft>
-                <a:spcPts val="540"/>
-              </a:spcAft>
-              <a:defRPr sz="1800" b="1">
-                <a:solidFill>
-                  <a:srgbClr val="F38BA8"/>
-                </a:solidFill>
-                <a:latin typeface="Segoe UI"/>
-              </a:defRPr>
-            </a:pPr>
-            <a:r>
-              <a:t>⑤ Template</a:t>
-            </a:r>
-          </a:p>
-        </p:txBody>
-      </p:sp>
-      <p:sp>
-        <p:nvSpPr>
-          <p:cNvPr id="27" name="TextBox 26"/>
-          <p:cNvSpPr txBox="1"/>
-          <p:nvPr/>
-        </p:nvSpPr>
-        <p:spPr>
-          <a:xfrm>
-            <a:off x="4221327" y="5303520"/>
-            <a:ext cx="2743200" cy="365760"/>
-          </a:xfrm>
-          <a:prstGeom prst="rect">
-            <a:avLst/>
-          </a:prstGeom>
-          <a:noFill/>
-        </p:spPr>
-        <p:txBody>
-          <a:bodyPr wrap="square">
-            <a:spAutoFit/>
-          </a:bodyPr>
-          <a:lstStyle/>
-          <a:p>
-            <a:pPr algn="l">
-              <a:lnSpc>
-                <a:spcPts val="1800"/>
-              </a:lnSpc>
-              <a:spcAft>
-                <a:spcPts val="450"/>
-              </a:spcAft>
-              <a:defRPr sz="1500" b="0">
-                <a:solidFill>
-                  <a:srgbClr val="CDD6F4"/>
-                </a:solidFill>
-                <a:latin typeface="Segoe UI"/>
-              </a:defRPr>
-            </a:pPr>
-            <a:r>
-              <a:t>The task with parameters</a:t>
-            </a:r>
-          </a:p>
-        </p:txBody>
-      </p:sp>
-      <p:sp>
-        <p:nvSpPr>
-          <p:cNvPr id="28" name="TextBox 27"/>
-          <p:cNvSpPr txBox="1"/>
-          <p:nvPr/>
-        </p:nvSpPr>
-        <p:spPr>
-          <a:xfrm>
-            <a:off x="4221327" y="5641848"/>
-            <a:ext cx="5852160" cy="365760"/>
-          </a:xfrm>
-          <a:prstGeom prst="rect">
-            <a:avLst/>
-          </a:prstGeom>
-          <a:noFill/>
-        </p:spPr>
-        <p:txBody>
-          <a:bodyPr wrap="square">
-            <a:spAutoFit/>
-          </a:bodyPr>
-          <a:lstStyle/>
-          <a:p>
-            <a:pPr algn="l">
-              <a:lnSpc>
-                <a:spcPts val="1439"/>
-              </a:lnSpc>
-              <a:spcAft>
-                <a:spcPts val="359"/>
-              </a:spcAft>
-              <a:defRPr sz="1200" b="0">
-                <a:solidFill>
-                  <a:srgbClr val="6C7086"/>
-                </a:solidFill>
-                <a:latin typeface="Segoe UI"/>
-              </a:defRPr>
-            </a:pPr>
-            <a:r>
-              <a:t>investigate-bug, review-code, author-design-doc …</a:t>
-            </a:r>
-          </a:p>
-        </p:txBody>
-      </p:sp>
-      <p:sp>
-        <p:nvSpPr>
-          <p:cNvPr id="29" name="TextBox 28"/>
-          <p:cNvSpPr txBox="1"/>
-          <p:nvPr/>
-        </p:nvSpPr>
-        <p:spPr>
-          <a:xfrm>
-            <a:off x="914400" y="6309360"/>
-            <a:ext cx="10058400" cy="365760"/>
-          </a:xfrm>
-          <a:prstGeom prst="rect">
-            <a:avLst/>
-          </a:prstGeom>
-          <a:noFill/>
-        </p:spPr>
-        <p:txBody>
-          <a:bodyPr wrap="square">
-            <a:spAutoFit/>
-          </a:bodyPr>
-          <a:lstStyle/>
-          <a:p>
-            <a:pPr algn="ctr">
-              <a:lnSpc>
-                <a:spcPts val="1560"/>
-              </a:lnSpc>
-              <a:spcAft>
-                <a:spcPts val="390"/>
-              </a:spcAft>
-              <a:defRPr sz="1300" b="0">
-                <a:solidFill>
-                  <a:srgbClr val="6C7086"/>
-                </a:solidFill>
-                <a:latin typeface="Segoe UI"/>
-              </a:defRPr>
-            </a:pPr>
-            <a:r>
-              <a:t>Templates declare which components to compose via YAML frontmatter → bootstrap engine snaps them together</a:t>
+              <a:t>Domain-agnostic — works for software, hardware, mechanical, RF, protocol engineering</a:t>
+            </a:r>
+            <a:br/>
+            <a:r>
+              <a:t>Each workflow is a PromptKit template with full composition: persona + protocols + format</a:t>
             </a:r>
           </a:p>
         </p:txBody>
@@ -7250,7 +7742,7 @@
               </a:defRPr>
             </a:pPr>
             <a:r>
-              <a:t>What's in the Box</a:t>
+              <a:t>Architecture: The 5-Layer Composition Stack</a:t>
             </a:r>
           </a:p>
         </p:txBody>
@@ -7263,8 +7755,8 @@
         </p:nvSpPr>
         <p:spPr>
           <a:xfrm>
-            <a:off x="792327" y="1463040"/>
-            <a:ext cx="3291840" cy="4114800"/>
+            <a:off x="838047" y="1417320"/>
+            <a:ext cx="10515600" cy="777240"/>
           </a:xfrm>
           <a:prstGeom prst="roundRect">
             <a:avLst/>
@@ -7301,14 +7793,57 @@
       </p:sp>
       <p:sp>
         <p:nvSpPr>
-          <p:cNvPr id="5" name="TextBox 4"/>
+          <p:cNvPr id="5" name="Rectangle 4"/>
+          <p:cNvSpPr/>
+          <p:nvPr/>
+        </p:nvSpPr>
+        <p:spPr>
+          <a:xfrm>
+            <a:off x="838047" y="1417320"/>
+            <a:ext cx="64008" cy="777240"/>
+          </a:xfrm>
+          <a:prstGeom prst="rect">
+            <a:avLst/>
+          </a:prstGeom>
+          <a:solidFill>
+            <a:srgbClr val="89B4FA"/>
+          </a:solidFill>
+          <a:ln>
+            <a:noFill/>
+          </a:ln>
+        </p:spPr>
+        <p:style>
+          <a:lnRef idx="1">
+            <a:schemeClr val="accent1"/>
+          </a:lnRef>
+          <a:fillRef idx="3">
+            <a:schemeClr val="accent1"/>
+          </a:fillRef>
+          <a:effectRef idx="2">
+            <a:schemeClr val="accent1"/>
+          </a:effectRef>
+          <a:fontRef idx="minor">
+            <a:schemeClr val="lt1"/>
+          </a:fontRef>
+        </p:style>
+        <p:txBody>
+          <a:bodyPr rtlCol="0" anchor="ctr"/>
+          <a:lstStyle/>
+          <a:p>
+            <a:pPr algn="ctr"/>
+          </a:p>
+        </p:txBody>
+      </p:sp>
+      <p:sp>
+        <p:nvSpPr>
+          <p:cNvPr id="6" name="TextBox 5"/>
           <p:cNvSpPr txBox="1"/>
           <p:nvPr/>
         </p:nvSpPr>
         <p:spPr>
           <a:xfrm>
-            <a:off x="975207" y="1600200"/>
-            <a:ext cx="2926080" cy="365760"/>
+            <a:off x="1066647" y="1463040"/>
+            <a:ext cx="2011680" cy="365760"/>
           </a:xfrm>
           <a:prstGeom prst="rect">
             <a:avLst/>
@@ -7321,14 +7856,14 @@
           </a:bodyPr>
           <a:lstStyle/>
           <a:p>
-            <a:pPr algn="ctr">
+            <a:pPr algn="l">
               <a:lnSpc>
-                <a:spcPts val="2640"/>
+                <a:spcPts val="2160"/>
               </a:lnSpc>
               <a:spcAft>
-                <a:spcPts val="660"/>
+                <a:spcPts val="540"/>
               </a:spcAft>
-              <a:defRPr sz="2200" b="1">
+              <a:defRPr sz="1800" b="1">
                 <a:solidFill>
                   <a:srgbClr val="89B4FA"/>
                 </a:solidFill>
@@ -7336,21 +7871,63 @@
               </a:defRPr>
             </a:pPr>
             <a:r>
-              <a:t>10 Personas</a:t>
-            </a:r>
-          </a:p>
-        </p:txBody>
-      </p:sp>
-      <p:sp>
-        <p:nvSpPr>
-          <p:cNvPr id="6" name="TextBox 5"/>
+              <a:t>① Persona</a:t>
+            </a:r>
+          </a:p>
+        </p:txBody>
+      </p:sp>
+      <p:sp>
+        <p:nvSpPr>
+          <p:cNvPr id="7" name="TextBox 6"/>
           <p:cNvSpPr txBox="1"/>
           <p:nvPr/>
         </p:nvSpPr>
         <p:spPr>
           <a:xfrm>
-            <a:off x="1066647" y="2103120"/>
+            <a:off x="3124047" y="1463040"/>
             <a:ext cx="2743200" cy="365760"/>
+          </a:xfrm>
+          <a:prstGeom prst="rect">
+            <a:avLst/>
+          </a:prstGeom>
+          <a:noFill/>
+        </p:spPr>
+        <p:txBody>
+          <a:bodyPr wrap="square">
+            <a:spAutoFit/>
+          </a:bodyPr>
+          <a:lstStyle/>
+          <a:p>
+            <a:pPr algn="l">
+              <a:lnSpc>
+                <a:spcPts val="1800"/>
+              </a:lnSpc>
+              <a:spcAft>
+                <a:spcPts val="450"/>
+              </a:spcAft>
+              <a:defRPr sz="1500" b="0">
+                <a:solidFill>
+                  <a:srgbClr val="CDD6F4"/>
+                </a:solidFill>
+                <a:latin typeface="Segoe UI"/>
+              </a:defRPr>
+            </a:pPr>
+            <a:r>
+              <a:t>Who the LLM becomes</a:t>
+            </a:r>
+          </a:p>
+        </p:txBody>
+      </p:sp>
+      <p:sp>
+        <p:nvSpPr>
+          <p:cNvPr id="8" name="TextBox 7"/>
+          <p:cNvSpPr txBox="1"/>
+          <p:nvPr/>
+        </p:nvSpPr>
+        <p:spPr>
+          <a:xfrm>
+            <a:off x="3124047" y="1801368"/>
+            <a:ext cx="8046720" cy="365760"/>
           </a:xfrm>
           <a:prstGeom prst="rect">
             <a:avLst/>
@@ -7372,27 +7949,198 @@
               </a:spcAft>
               <a:defRPr sz="1200" b="0">
                 <a:solidFill>
+                  <a:srgbClr val="6C7086"/>
+                </a:solidFill>
+                <a:latin typeface="Segoe UI"/>
+              </a:defRPr>
+            </a:pPr>
+            <a:r>
+              <a:t>systems-engineer, security-auditor, devops-engineer …</a:t>
+            </a:r>
+          </a:p>
+        </p:txBody>
+      </p:sp>
+      <p:sp>
+        <p:nvSpPr>
+          <p:cNvPr id="9" name="Rounded Rectangle 8"/>
+          <p:cNvSpPr/>
+          <p:nvPr/>
+        </p:nvSpPr>
+        <p:spPr>
+          <a:xfrm>
+            <a:off x="1112367" y="2377440"/>
+            <a:ext cx="9966960" cy="777240"/>
+          </a:xfrm>
+          <a:prstGeom prst="roundRect">
+            <a:avLst/>
+          </a:prstGeom>
+          <a:solidFill>
+            <a:srgbClr val="313244"/>
+          </a:solidFill>
+          <a:ln>
+            <a:noFill/>
+          </a:ln>
+          <a:effectLst/>
+        </p:spPr>
+        <p:style>
+          <a:lnRef idx="1">
+            <a:schemeClr val="accent1"/>
+          </a:lnRef>
+          <a:fillRef idx="3">
+            <a:schemeClr val="accent1"/>
+          </a:fillRef>
+          <a:effectRef idx="2">
+            <a:schemeClr val="accent1"/>
+          </a:effectRef>
+          <a:fontRef idx="minor">
+            <a:schemeClr val="lt1"/>
+          </a:fontRef>
+        </p:style>
+        <p:txBody>
+          <a:bodyPr rtlCol="0" anchor="ctr"/>
+          <a:lstStyle/>
+          <a:p>
+            <a:pPr algn="ctr"/>
+          </a:p>
+        </p:txBody>
+      </p:sp>
+      <p:sp>
+        <p:nvSpPr>
+          <p:cNvPr id="10" name="Rectangle 9"/>
+          <p:cNvSpPr/>
+          <p:nvPr/>
+        </p:nvSpPr>
+        <p:spPr>
+          <a:xfrm>
+            <a:off x="1112367" y="2377440"/>
+            <a:ext cx="64008" cy="777240"/>
+          </a:xfrm>
+          <a:prstGeom prst="rect">
+            <a:avLst/>
+          </a:prstGeom>
+          <a:solidFill>
+            <a:srgbClr val="A6E3A1"/>
+          </a:solidFill>
+          <a:ln>
+            <a:noFill/>
+          </a:ln>
+        </p:spPr>
+        <p:style>
+          <a:lnRef idx="1">
+            <a:schemeClr val="accent1"/>
+          </a:lnRef>
+          <a:fillRef idx="3">
+            <a:schemeClr val="accent1"/>
+          </a:fillRef>
+          <a:effectRef idx="2">
+            <a:schemeClr val="accent1"/>
+          </a:effectRef>
+          <a:fontRef idx="minor">
+            <a:schemeClr val="lt1"/>
+          </a:fontRef>
+        </p:style>
+        <p:txBody>
+          <a:bodyPr rtlCol="0" anchor="ctr"/>
+          <a:lstStyle/>
+          <a:p>
+            <a:pPr algn="ctr"/>
+          </a:p>
+        </p:txBody>
+      </p:sp>
+      <p:sp>
+        <p:nvSpPr>
+          <p:cNvPr id="11" name="TextBox 10"/>
+          <p:cNvSpPr txBox="1"/>
+          <p:nvPr/>
+        </p:nvSpPr>
+        <p:spPr>
+          <a:xfrm>
+            <a:off x="1340967" y="2423160"/>
+            <a:ext cx="2011680" cy="365760"/>
+          </a:xfrm>
+          <a:prstGeom prst="rect">
+            <a:avLst/>
+          </a:prstGeom>
+          <a:noFill/>
+        </p:spPr>
+        <p:txBody>
+          <a:bodyPr wrap="square">
+            <a:spAutoFit/>
+          </a:bodyPr>
+          <a:lstStyle/>
+          <a:p>
+            <a:pPr algn="l">
+              <a:lnSpc>
+                <a:spcPts val="2160"/>
+              </a:lnSpc>
+              <a:spcAft>
+                <a:spcPts val="540"/>
+              </a:spcAft>
+              <a:defRPr sz="1800" b="1">
+                <a:solidFill>
+                  <a:srgbClr val="A6E3A1"/>
+                </a:solidFill>
+                <a:latin typeface="Segoe UI"/>
+              </a:defRPr>
+            </a:pPr>
+            <a:r>
+              <a:t>② Protocols</a:t>
+            </a:r>
+          </a:p>
+        </p:txBody>
+      </p:sp>
+      <p:sp>
+        <p:nvSpPr>
+          <p:cNvPr id="12" name="TextBox 11"/>
+          <p:cNvSpPr txBox="1"/>
+          <p:nvPr/>
+        </p:nvSpPr>
+        <p:spPr>
+          <a:xfrm>
+            <a:off x="3398367" y="2423160"/>
+            <a:ext cx="2743200" cy="365760"/>
+          </a:xfrm>
+          <a:prstGeom prst="rect">
+            <a:avLst/>
+          </a:prstGeom>
+          <a:noFill/>
+        </p:spPr>
+        <p:txBody>
+          <a:bodyPr wrap="square">
+            <a:spAutoFit/>
+          </a:bodyPr>
+          <a:lstStyle/>
+          <a:p>
+            <a:pPr algn="l">
+              <a:lnSpc>
+                <a:spcPts val="1800"/>
+              </a:lnSpc>
+              <a:spcAft>
+                <a:spcPts val="450"/>
+              </a:spcAft>
+              <a:defRPr sz="1500" b="0">
+                <a:solidFill>
                   <a:srgbClr val="CDD6F4"/>
                 </a:solidFill>
-                <a:latin typeface="Cascadia Code"/>
+                <a:latin typeface="Segoe UI"/>
               </a:defRPr>
             </a:pPr>
             <a:r>
-              <a:t>systems-engineer, security-auditor</a:t>
-            </a:r>
-          </a:p>
-        </p:txBody>
-      </p:sp>
-      <p:sp>
-        <p:nvSpPr>
-          <p:cNvPr id="7" name="TextBox 6"/>
+              <a:t>How it reasons + guardrails</a:t>
+            </a:r>
+          </a:p>
+        </p:txBody>
+      </p:sp>
+      <p:sp>
+        <p:nvSpPr>
+          <p:cNvPr id="13" name="TextBox 12"/>
           <p:cNvSpPr txBox="1"/>
           <p:nvPr/>
         </p:nvSpPr>
         <p:spPr>
           <a:xfrm>
-            <a:off x="1066647" y="2651760"/>
-            <a:ext cx="2743200" cy="365760"/>
+            <a:off x="3398367" y="2761488"/>
+            <a:ext cx="7498080" cy="365760"/>
           </a:xfrm>
           <a:prstGeom prst="rect">
             <a:avLst/>
@@ -7414,27 +8162,198 @@
               </a:spcAft>
               <a:defRPr sz="1200" b="0">
                 <a:solidFill>
+                  <a:srgbClr val="6C7086"/>
+                </a:solidFill>
+                <a:latin typeface="Segoe UI"/>
+              </a:defRPr>
+            </a:pPr>
+            <a:r>
+              <a:t>anti-hallucination, root-cause-analysis, thread-safety …</a:t>
+            </a:r>
+          </a:p>
+        </p:txBody>
+      </p:sp>
+      <p:sp>
+        <p:nvSpPr>
+          <p:cNvPr id="14" name="Rounded Rectangle 13"/>
+          <p:cNvSpPr/>
+          <p:nvPr/>
+        </p:nvSpPr>
+        <p:spPr>
+          <a:xfrm>
+            <a:off x="1386687" y="3337560"/>
+            <a:ext cx="9418320" cy="777240"/>
+          </a:xfrm>
+          <a:prstGeom prst="roundRect">
+            <a:avLst/>
+          </a:prstGeom>
+          <a:solidFill>
+            <a:srgbClr val="313244"/>
+          </a:solidFill>
+          <a:ln>
+            <a:noFill/>
+          </a:ln>
+          <a:effectLst/>
+        </p:spPr>
+        <p:style>
+          <a:lnRef idx="1">
+            <a:schemeClr val="accent1"/>
+          </a:lnRef>
+          <a:fillRef idx="3">
+            <a:schemeClr val="accent1"/>
+          </a:fillRef>
+          <a:effectRef idx="2">
+            <a:schemeClr val="accent1"/>
+          </a:effectRef>
+          <a:fontRef idx="minor">
+            <a:schemeClr val="lt1"/>
+          </a:fontRef>
+        </p:style>
+        <p:txBody>
+          <a:bodyPr rtlCol="0" anchor="ctr"/>
+          <a:lstStyle/>
+          <a:p>
+            <a:pPr algn="ctr"/>
+          </a:p>
+        </p:txBody>
+      </p:sp>
+      <p:sp>
+        <p:nvSpPr>
+          <p:cNvPr id="15" name="Rectangle 14"/>
+          <p:cNvSpPr/>
+          <p:nvPr/>
+        </p:nvSpPr>
+        <p:spPr>
+          <a:xfrm>
+            <a:off x="1386687" y="3337560"/>
+            <a:ext cx="64008" cy="777240"/>
+          </a:xfrm>
+          <a:prstGeom prst="rect">
+            <a:avLst/>
+          </a:prstGeom>
+          <a:solidFill>
+            <a:srgbClr val="F9E2AF"/>
+          </a:solidFill>
+          <a:ln>
+            <a:noFill/>
+          </a:ln>
+        </p:spPr>
+        <p:style>
+          <a:lnRef idx="1">
+            <a:schemeClr val="accent1"/>
+          </a:lnRef>
+          <a:fillRef idx="3">
+            <a:schemeClr val="accent1"/>
+          </a:fillRef>
+          <a:effectRef idx="2">
+            <a:schemeClr val="accent1"/>
+          </a:effectRef>
+          <a:fontRef idx="minor">
+            <a:schemeClr val="lt1"/>
+          </a:fontRef>
+        </p:style>
+        <p:txBody>
+          <a:bodyPr rtlCol="0" anchor="ctr"/>
+          <a:lstStyle/>
+          <a:p>
+            <a:pPr algn="ctr"/>
+          </a:p>
+        </p:txBody>
+      </p:sp>
+      <p:sp>
+        <p:nvSpPr>
+          <p:cNvPr id="16" name="TextBox 15"/>
+          <p:cNvSpPr txBox="1"/>
+          <p:nvPr/>
+        </p:nvSpPr>
+        <p:spPr>
+          <a:xfrm>
+            <a:off x="1615287" y="3383280"/>
+            <a:ext cx="2011680" cy="365760"/>
+          </a:xfrm>
+          <a:prstGeom prst="rect">
+            <a:avLst/>
+          </a:prstGeom>
+          <a:noFill/>
+        </p:spPr>
+        <p:txBody>
+          <a:bodyPr wrap="square">
+            <a:spAutoFit/>
+          </a:bodyPr>
+          <a:lstStyle/>
+          <a:p>
+            <a:pPr algn="l">
+              <a:lnSpc>
+                <a:spcPts val="2160"/>
+              </a:lnSpc>
+              <a:spcAft>
+                <a:spcPts val="540"/>
+              </a:spcAft>
+              <a:defRPr sz="1800" b="1">
+                <a:solidFill>
+                  <a:srgbClr val="F9E2AF"/>
+                </a:solidFill>
+                <a:latin typeface="Segoe UI"/>
+              </a:defRPr>
+            </a:pPr>
+            <a:r>
+              <a:t>③ Format</a:t>
+            </a:r>
+          </a:p>
+        </p:txBody>
+      </p:sp>
+      <p:sp>
+        <p:nvSpPr>
+          <p:cNvPr id="17" name="TextBox 16"/>
+          <p:cNvSpPr txBox="1"/>
+          <p:nvPr/>
+        </p:nvSpPr>
+        <p:spPr>
+          <a:xfrm>
+            <a:off x="3672687" y="3383280"/>
+            <a:ext cx="2743200" cy="365760"/>
+          </a:xfrm>
+          <a:prstGeom prst="rect">
+            <a:avLst/>
+          </a:prstGeom>
+          <a:noFill/>
+        </p:spPr>
+        <p:txBody>
+          <a:bodyPr wrap="square">
+            <a:spAutoFit/>
+          </a:bodyPr>
+          <a:lstStyle/>
+          <a:p>
+            <a:pPr algn="l">
+              <a:lnSpc>
+                <a:spcPts val="1800"/>
+              </a:lnSpc>
+              <a:spcAft>
+                <a:spcPts val="450"/>
+              </a:spcAft>
+              <a:defRPr sz="1500" b="0">
+                <a:solidFill>
                   <a:srgbClr val="CDD6F4"/>
                 </a:solidFill>
-                <a:latin typeface="Cascadia Code"/>
+                <a:latin typeface="Segoe UI"/>
               </a:defRPr>
             </a:pPr>
             <a:r>
-              <a:t>software-architect, devops-engineer</a:t>
-            </a:r>
-          </a:p>
-        </p:txBody>
-      </p:sp>
-      <p:sp>
-        <p:nvSpPr>
-          <p:cNvPr id="8" name="TextBox 7"/>
+              <a:t>Output structure &amp; rules</a:t>
+            </a:r>
+          </a:p>
+        </p:txBody>
+      </p:sp>
+      <p:sp>
+        <p:nvSpPr>
+          <p:cNvPr id="18" name="TextBox 17"/>
           <p:cNvSpPr txBox="1"/>
           <p:nvPr/>
         </p:nvSpPr>
         <p:spPr>
           <a:xfrm>
-            <a:off x="1066647" y="3200400"/>
-            <a:ext cx="2743200" cy="365760"/>
+            <a:off x="3672687" y="3721608"/>
+            <a:ext cx="6949440" cy="365760"/>
           </a:xfrm>
           <a:prstGeom prst="rect">
             <a:avLst/>
@@ -7456,27 +8375,198 @@
               </a:spcAft>
               <a:defRPr sz="1200" b="0">
                 <a:solidFill>
+                  <a:srgbClr val="6C7086"/>
+                </a:solidFill>
+                <a:latin typeface="Segoe UI"/>
+              </a:defRPr>
+            </a:pPr>
+            <a:r>
+              <a:t>requirements-doc, investigation-report, pipeline-spec …</a:t>
+            </a:r>
+          </a:p>
+        </p:txBody>
+      </p:sp>
+      <p:sp>
+        <p:nvSpPr>
+          <p:cNvPr id="19" name="Rounded Rectangle 18"/>
+          <p:cNvSpPr/>
+          <p:nvPr/>
+        </p:nvSpPr>
+        <p:spPr>
+          <a:xfrm>
+            <a:off x="1661007" y="4297680"/>
+            <a:ext cx="8869680" cy="777240"/>
+          </a:xfrm>
+          <a:prstGeom prst="roundRect">
+            <a:avLst/>
+          </a:prstGeom>
+          <a:solidFill>
+            <a:srgbClr val="313244"/>
+          </a:solidFill>
+          <a:ln>
+            <a:noFill/>
+          </a:ln>
+          <a:effectLst/>
+        </p:spPr>
+        <p:style>
+          <a:lnRef idx="1">
+            <a:schemeClr val="accent1"/>
+          </a:lnRef>
+          <a:fillRef idx="3">
+            <a:schemeClr val="accent1"/>
+          </a:fillRef>
+          <a:effectRef idx="2">
+            <a:schemeClr val="accent1"/>
+          </a:effectRef>
+          <a:fontRef idx="minor">
+            <a:schemeClr val="lt1"/>
+          </a:fontRef>
+        </p:style>
+        <p:txBody>
+          <a:bodyPr rtlCol="0" anchor="ctr"/>
+          <a:lstStyle/>
+          <a:p>
+            <a:pPr algn="ctr"/>
+          </a:p>
+        </p:txBody>
+      </p:sp>
+      <p:sp>
+        <p:nvSpPr>
+          <p:cNvPr id="20" name="Rectangle 19"/>
+          <p:cNvSpPr/>
+          <p:nvPr/>
+        </p:nvSpPr>
+        <p:spPr>
+          <a:xfrm>
+            <a:off x="1661007" y="4297680"/>
+            <a:ext cx="64008" cy="777240"/>
+          </a:xfrm>
+          <a:prstGeom prst="rect">
+            <a:avLst/>
+          </a:prstGeom>
+          <a:solidFill>
+            <a:srgbClr val="FAB387"/>
+          </a:solidFill>
+          <a:ln>
+            <a:noFill/>
+          </a:ln>
+        </p:spPr>
+        <p:style>
+          <a:lnRef idx="1">
+            <a:schemeClr val="accent1"/>
+          </a:lnRef>
+          <a:fillRef idx="3">
+            <a:schemeClr val="accent1"/>
+          </a:fillRef>
+          <a:effectRef idx="2">
+            <a:schemeClr val="accent1"/>
+          </a:effectRef>
+          <a:fontRef idx="minor">
+            <a:schemeClr val="lt1"/>
+          </a:fontRef>
+        </p:style>
+        <p:txBody>
+          <a:bodyPr rtlCol="0" anchor="ctr"/>
+          <a:lstStyle/>
+          <a:p>
+            <a:pPr algn="ctr"/>
+          </a:p>
+        </p:txBody>
+      </p:sp>
+      <p:sp>
+        <p:nvSpPr>
+          <p:cNvPr id="21" name="TextBox 20"/>
+          <p:cNvSpPr txBox="1"/>
+          <p:nvPr/>
+        </p:nvSpPr>
+        <p:spPr>
+          <a:xfrm>
+            <a:off x="1889607" y="4343400"/>
+            <a:ext cx="2011680" cy="365760"/>
+          </a:xfrm>
+          <a:prstGeom prst="rect">
+            <a:avLst/>
+          </a:prstGeom>
+          <a:noFill/>
+        </p:spPr>
+        <p:txBody>
+          <a:bodyPr wrap="square">
+            <a:spAutoFit/>
+          </a:bodyPr>
+          <a:lstStyle/>
+          <a:p>
+            <a:pPr algn="l">
+              <a:lnSpc>
+                <a:spcPts val="2160"/>
+              </a:lnSpc>
+              <a:spcAft>
+                <a:spcPts val="540"/>
+              </a:spcAft>
+              <a:defRPr sz="1800" b="1">
+                <a:solidFill>
+                  <a:srgbClr val="FAB387"/>
+                </a:solidFill>
+                <a:latin typeface="Segoe UI"/>
+              </a:defRPr>
+            </a:pPr>
+            <a:r>
+              <a:t>④ Taxonomy</a:t>
+            </a:r>
+          </a:p>
+        </p:txBody>
+      </p:sp>
+      <p:sp>
+        <p:nvSpPr>
+          <p:cNvPr id="22" name="TextBox 21"/>
+          <p:cNvSpPr txBox="1"/>
+          <p:nvPr/>
+        </p:nvSpPr>
+        <p:spPr>
+          <a:xfrm>
+            <a:off x="3947007" y="4343400"/>
+            <a:ext cx="2743200" cy="365760"/>
+          </a:xfrm>
+          <a:prstGeom prst="rect">
+            <a:avLst/>
+          </a:prstGeom>
+          <a:noFill/>
+        </p:spPr>
+        <p:txBody>
+          <a:bodyPr wrap="square">
+            <a:spAutoFit/>
+          </a:bodyPr>
+          <a:lstStyle/>
+          <a:p>
+            <a:pPr algn="l">
+              <a:lnSpc>
+                <a:spcPts val="1800"/>
+              </a:lnSpc>
+              <a:spcAft>
+                <a:spcPts val="450"/>
+              </a:spcAft>
+              <a:defRPr sz="1500" b="0">
+                <a:solidFill>
                   <a:srgbClr val="CDD6F4"/>
                 </a:solidFill>
-                <a:latin typeface="Cascadia Code"/>
+                <a:latin typeface="Segoe UI"/>
               </a:defRPr>
             </a:pPr>
             <a:r>
-              <a:t>reverse-engineer, specification-analyst</a:t>
-            </a:r>
-          </a:p>
-        </p:txBody>
-      </p:sp>
-      <p:sp>
-        <p:nvSpPr>
-          <p:cNvPr id="9" name="TextBox 8"/>
+              <a:t>Domain classification (optional)</a:t>
+            </a:r>
+          </a:p>
+        </p:txBody>
+      </p:sp>
+      <p:sp>
+        <p:nvSpPr>
+          <p:cNvPr id="23" name="TextBox 22"/>
           <p:cNvSpPr txBox="1"/>
           <p:nvPr/>
         </p:nvSpPr>
         <p:spPr>
           <a:xfrm>
-            <a:off x="1066647" y="3749040"/>
-            <a:ext cx="2743200" cy="365760"/>
+            <a:off x="3947007" y="4681728"/>
+            <a:ext cx="6400800" cy="365760"/>
           </a:xfrm>
           <a:prstGeom prst="rect">
             <a:avLst/>
@@ -7498,27 +8588,198 @@
               </a:spcAft>
               <a:defRPr sz="1200" b="0">
                 <a:solidFill>
+                  <a:srgbClr val="6C7086"/>
+                </a:solidFill>
+                <a:latin typeface="Segoe UI"/>
+              </a:defRPr>
+            </a:pPr>
+            <a:r>
+              <a:t>Severity levels, priority tiers, risk categories</a:t>
+            </a:r>
+          </a:p>
+        </p:txBody>
+      </p:sp>
+      <p:sp>
+        <p:nvSpPr>
+          <p:cNvPr id="24" name="Rounded Rectangle 23"/>
+          <p:cNvSpPr/>
+          <p:nvPr/>
+        </p:nvSpPr>
+        <p:spPr>
+          <a:xfrm>
+            <a:off x="1935327" y="5257800"/>
+            <a:ext cx="8321040" cy="777240"/>
+          </a:xfrm>
+          <a:prstGeom prst="roundRect">
+            <a:avLst/>
+          </a:prstGeom>
+          <a:solidFill>
+            <a:srgbClr val="313244"/>
+          </a:solidFill>
+          <a:ln>
+            <a:noFill/>
+          </a:ln>
+          <a:effectLst/>
+        </p:spPr>
+        <p:style>
+          <a:lnRef idx="1">
+            <a:schemeClr val="accent1"/>
+          </a:lnRef>
+          <a:fillRef idx="3">
+            <a:schemeClr val="accent1"/>
+          </a:fillRef>
+          <a:effectRef idx="2">
+            <a:schemeClr val="accent1"/>
+          </a:effectRef>
+          <a:fontRef idx="minor">
+            <a:schemeClr val="lt1"/>
+          </a:fontRef>
+        </p:style>
+        <p:txBody>
+          <a:bodyPr rtlCol="0" anchor="ctr"/>
+          <a:lstStyle/>
+          <a:p>
+            <a:pPr algn="ctr"/>
+          </a:p>
+        </p:txBody>
+      </p:sp>
+      <p:sp>
+        <p:nvSpPr>
+          <p:cNvPr id="25" name="Rectangle 24"/>
+          <p:cNvSpPr/>
+          <p:nvPr/>
+        </p:nvSpPr>
+        <p:spPr>
+          <a:xfrm>
+            <a:off x="1935327" y="5257800"/>
+            <a:ext cx="64008" cy="777240"/>
+          </a:xfrm>
+          <a:prstGeom prst="rect">
+            <a:avLst/>
+          </a:prstGeom>
+          <a:solidFill>
+            <a:srgbClr val="F38BA8"/>
+          </a:solidFill>
+          <a:ln>
+            <a:noFill/>
+          </a:ln>
+        </p:spPr>
+        <p:style>
+          <a:lnRef idx="1">
+            <a:schemeClr val="accent1"/>
+          </a:lnRef>
+          <a:fillRef idx="3">
+            <a:schemeClr val="accent1"/>
+          </a:fillRef>
+          <a:effectRef idx="2">
+            <a:schemeClr val="accent1"/>
+          </a:effectRef>
+          <a:fontRef idx="minor">
+            <a:schemeClr val="lt1"/>
+          </a:fontRef>
+        </p:style>
+        <p:txBody>
+          <a:bodyPr rtlCol="0" anchor="ctr"/>
+          <a:lstStyle/>
+          <a:p>
+            <a:pPr algn="ctr"/>
+          </a:p>
+        </p:txBody>
+      </p:sp>
+      <p:sp>
+        <p:nvSpPr>
+          <p:cNvPr id="26" name="TextBox 25"/>
+          <p:cNvSpPr txBox="1"/>
+          <p:nvPr/>
+        </p:nvSpPr>
+        <p:spPr>
+          <a:xfrm>
+            <a:off x="2163927" y="5303520"/>
+            <a:ext cx="2011680" cy="365760"/>
+          </a:xfrm>
+          <a:prstGeom prst="rect">
+            <a:avLst/>
+          </a:prstGeom>
+          <a:noFill/>
+        </p:spPr>
+        <p:txBody>
+          <a:bodyPr wrap="square">
+            <a:spAutoFit/>
+          </a:bodyPr>
+          <a:lstStyle/>
+          <a:p>
+            <a:pPr algn="l">
+              <a:lnSpc>
+                <a:spcPts val="2160"/>
+              </a:lnSpc>
+              <a:spcAft>
+                <a:spcPts val="540"/>
+              </a:spcAft>
+              <a:defRPr sz="1800" b="1">
+                <a:solidFill>
+                  <a:srgbClr val="F38BA8"/>
+                </a:solidFill>
+                <a:latin typeface="Segoe UI"/>
+              </a:defRPr>
+            </a:pPr>
+            <a:r>
+              <a:t>⑤ Template</a:t>
+            </a:r>
+          </a:p>
+        </p:txBody>
+      </p:sp>
+      <p:sp>
+        <p:nvSpPr>
+          <p:cNvPr id="27" name="TextBox 26"/>
+          <p:cNvSpPr txBox="1"/>
+          <p:nvPr/>
+        </p:nvSpPr>
+        <p:spPr>
+          <a:xfrm>
+            <a:off x="4221327" y="5303520"/>
+            <a:ext cx="2743200" cy="365760"/>
+          </a:xfrm>
+          <a:prstGeom prst="rect">
+            <a:avLst/>
+          </a:prstGeom>
+          <a:noFill/>
+        </p:spPr>
+        <p:txBody>
+          <a:bodyPr wrap="square">
+            <a:spAutoFit/>
+          </a:bodyPr>
+          <a:lstStyle/>
+          <a:p>
+            <a:pPr algn="l">
+              <a:lnSpc>
+                <a:spcPts val="1800"/>
+              </a:lnSpc>
+              <a:spcAft>
+                <a:spcPts val="450"/>
+              </a:spcAft>
+              <a:defRPr sz="1500" b="0">
+                <a:solidFill>
                   <a:srgbClr val="CDD6F4"/>
                 </a:solidFill>
-                <a:latin typeface="Cascadia Code"/>
+                <a:latin typeface="Segoe UI"/>
               </a:defRPr>
             </a:pPr>
             <a:r>
-              <a:t>workflow-arbiter, implementation-engineer</a:t>
-            </a:r>
-          </a:p>
-        </p:txBody>
-      </p:sp>
-      <p:sp>
-        <p:nvSpPr>
-          <p:cNvPr id="10" name="TextBox 9"/>
+              <a:t>The task with parameters</a:t>
+            </a:r>
+          </a:p>
+        </p:txBody>
+      </p:sp>
+      <p:sp>
+        <p:nvSpPr>
+          <p:cNvPr id="28" name="TextBox 27"/>
           <p:cNvSpPr txBox="1"/>
           <p:nvPr/>
         </p:nvSpPr>
         <p:spPr>
           <a:xfrm>
-            <a:off x="1066647" y="4297680"/>
-            <a:ext cx="2743200" cy="365760"/>
+            <a:off x="4221327" y="5641848"/>
+            <a:ext cx="5852160" cy="365760"/>
           </a:xfrm>
           <a:prstGeom prst="rect">
             <a:avLst/>
@@ -7540,523 +8801,27 @@
               </a:spcAft>
               <a:defRPr sz="1200" b="0">
                 <a:solidFill>
-                  <a:srgbClr val="CDD6F4"/>
-                </a:solidFill>
-                <a:latin typeface="Cascadia Code"/>
+                  <a:srgbClr val="6C7086"/>
+                </a:solidFill>
+                <a:latin typeface="Segoe UI"/>
               </a:defRPr>
             </a:pPr>
             <a:r>
-              <a:t>test-engineer, promptkit-contributor</a:t>
-            </a:r>
-          </a:p>
-        </p:txBody>
-      </p:sp>
-      <p:sp>
-        <p:nvSpPr>
-          <p:cNvPr id="11" name="Rounded Rectangle 10"/>
-          <p:cNvSpPr/>
-          <p:nvPr/>
-        </p:nvSpPr>
-        <p:spPr>
-          <a:xfrm>
-            <a:off x="4449927" y="1463040"/>
-            <a:ext cx="3291840" cy="4114800"/>
-          </a:xfrm>
-          <a:prstGeom prst="roundRect">
-            <a:avLst/>
-          </a:prstGeom>
-          <a:solidFill>
-            <a:srgbClr val="313244"/>
-          </a:solidFill>
-          <a:ln>
-            <a:noFill/>
-          </a:ln>
-          <a:effectLst/>
-        </p:spPr>
-        <p:style>
-          <a:lnRef idx="1">
-            <a:schemeClr val="accent1"/>
-          </a:lnRef>
-          <a:fillRef idx="3">
-            <a:schemeClr val="accent1"/>
-          </a:fillRef>
-          <a:effectRef idx="2">
-            <a:schemeClr val="accent1"/>
-          </a:effectRef>
-          <a:fontRef idx="minor">
-            <a:schemeClr val="lt1"/>
-          </a:fontRef>
-        </p:style>
-        <p:txBody>
-          <a:bodyPr rtlCol="0" anchor="ctr"/>
-          <a:lstStyle/>
-          <a:p>
-            <a:pPr algn="ctr"/>
-          </a:p>
-        </p:txBody>
-      </p:sp>
-      <p:sp>
-        <p:nvSpPr>
-          <p:cNvPr id="12" name="TextBox 11"/>
+              <a:t>investigate-bug, review-code, author-design-doc …</a:t>
+            </a:r>
+          </a:p>
+        </p:txBody>
+      </p:sp>
+      <p:sp>
+        <p:nvSpPr>
+          <p:cNvPr id="29" name="TextBox 28"/>
           <p:cNvSpPr txBox="1"/>
           <p:nvPr/>
         </p:nvSpPr>
         <p:spPr>
           <a:xfrm>
-            <a:off x="4632807" y="1600200"/>
-            <a:ext cx="2926080" cy="365760"/>
-          </a:xfrm>
-          <a:prstGeom prst="rect">
-            <a:avLst/>
-          </a:prstGeom>
-          <a:noFill/>
-        </p:spPr>
-        <p:txBody>
-          <a:bodyPr wrap="square">
-            <a:spAutoFit/>
-          </a:bodyPr>
-          <a:lstStyle/>
-          <a:p>
-            <a:pPr algn="ctr">
-              <a:lnSpc>
-                <a:spcPts val="2640"/>
-              </a:lnSpc>
-              <a:spcAft>
-                <a:spcPts val="660"/>
-              </a:spcAft>
-              <a:defRPr sz="2200" b="1">
-                <a:solidFill>
-                  <a:srgbClr val="A6E3A1"/>
-                </a:solidFill>
-                <a:latin typeface="Segoe UI"/>
-              </a:defRPr>
-            </a:pPr>
-            <a:r>
-              <a:t>20 Protocols</a:t>
-            </a:r>
-          </a:p>
-        </p:txBody>
-      </p:sp>
-      <p:sp>
-        <p:nvSpPr>
-          <p:cNvPr id="13" name="TextBox 12"/>
-          <p:cNvSpPr txBox="1"/>
-          <p:nvPr/>
-        </p:nvSpPr>
-        <p:spPr>
-          <a:xfrm>
-            <a:off x="4724247" y="2103120"/>
-            <a:ext cx="2743200" cy="594360"/>
-          </a:xfrm>
-          <a:prstGeom prst="rect">
-            <a:avLst/>
-          </a:prstGeom>
-          <a:noFill/>
-        </p:spPr>
-        <p:txBody>
-          <a:bodyPr wrap="square">
-            <a:spAutoFit/>
-          </a:bodyPr>
-          <a:lstStyle/>
-          <a:p>
-            <a:pPr algn="l">
-              <a:lnSpc>
-                <a:spcPts val="1439"/>
-              </a:lnSpc>
-              <a:spcAft>
-                <a:spcPts val="359"/>
-              </a:spcAft>
-              <a:defRPr sz="1200" b="0">
-                <a:solidFill>
-                  <a:srgbClr val="CDD6F4"/>
-                </a:solidFill>
-                <a:latin typeface="Cascadia Code"/>
-              </a:defRPr>
-            </a:pPr>
-            <a:r>
-              <a:t>Guardrails (3): anti-hallucination,</a:t>
-            </a:r>
-            <a:br/>
-            <a:r>
-              <a:t>  self-verification, operational-constraints</a:t>
-            </a:r>
-          </a:p>
-        </p:txBody>
-      </p:sp>
-      <p:sp>
-        <p:nvSpPr>
-          <p:cNvPr id="14" name="TextBox 13"/>
-          <p:cNvSpPr txBox="1"/>
-          <p:nvPr/>
-        </p:nvSpPr>
-        <p:spPr>
-          <a:xfrm>
-            <a:off x="4724247" y="2880360"/>
-            <a:ext cx="2743200" cy="594360"/>
-          </a:xfrm>
-          <a:prstGeom prst="rect">
-            <a:avLst/>
-          </a:prstGeom>
-          <a:noFill/>
-        </p:spPr>
-        <p:txBody>
-          <a:bodyPr wrap="square">
-            <a:spAutoFit/>
-          </a:bodyPr>
-          <a:lstStyle/>
-          <a:p>
-            <a:pPr algn="l">
-              <a:lnSpc>
-                <a:spcPts val="1439"/>
-              </a:lnSpc>
-              <a:spcAft>
-                <a:spcPts val="359"/>
-              </a:spcAft>
-              <a:defRPr sz="1200" b="0">
-                <a:solidFill>
-                  <a:srgbClr val="CDD6F4"/>
-                </a:solidFill>
-                <a:latin typeface="Cascadia Code"/>
-              </a:defRPr>
-            </a:pPr>
-            <a:r>
-              <a:t>Analysis (4): memory-safety-c, memory-safety-rust,</a:t>
-            </a:r>
-            <a:br/>
-            <a:r>
-              <a:t>  thread-safety, security-vulnerability</a:t>
-            </a:r>
-          </a:p>
-        </p:txBody>
-      </p:sp>
-      <p:sp>
-        <p:nvSpPr>
-          <p:cNvPr id="15" name="TextBox 14"/>
-          <p:cNvSpPr txBox="1"/>
-          <p:nvPr/>
-        </p:nvSpPr>
-        <p:spPr>
-          <a:xfrm>
-            <a:off x="4724247" y="3657600"/>
-            <a:ext cx="2743200" cy="822960"/>
-          </a:xfrm>
-          <a:prstGeom prst="rect">
-            <a:avLst/>
-          </a:prstGeom>
-          <a:noFill/>
-        </p:spPr>
-        <p:txBody>
-          <a:bodyPr wrap="square">
-            <a:spAutoFit/>
-          </a:bodyPr>
-          <a:lstStyle/>
-          <a:p>
-            <a:pPr algn="l">
-              <a:lnSpc>
-                <a:spcPts val="1439"/>
-              </a:lnSpc>
-              <a:spcAft>
-                <a:spcPts val="359"/>
-              </a:spcAft>
-              <a:defRPr sz="1200" b="0">
-                <a:solidFill>
-                  <a:srgbClr val="CDD6F4"/>
-                </a:solidFill>
-                <a:latin typeface="Cascadia Code"/>
-              </a:defRPr>
-            </a:pPr>
-            <a:r>
-              <a:t>Reasoning (13): root-cause-analysis,</a:t>
-            </a:r>
-            <a:br/>
-            <a:r>
-              <a:t>  traceability-audit, code-compliance-audit,</a:t>
-            </a:r>
-            <a:br/>
-            <a:r>
-              <a:t>  requirements-elicitation … and 9 more</a:t>
-            </a:r>
-          </a:p>
-        </p:txBody>
-      </p:sp>
-      <p:sp>
-        <p:nvSpPr>
-          <p:cNvPr id="16" name="Rounded Rectangle 15"/>
-          <p:cNvSpPr/>
-          <p:nvPr/>
-        </p:nvSpPr>
-        <p:spPr>
-          <a:xfrm>
-            <a:off x="8107527" y="1463040"/>
-            <a:ext cx="3291840" cy="4114800"/>
-          </a:xfrm>
-          <a:prstGeom prst="roundRect">
-            <a:avLst/>
-          </a:prstGeom>
-          <a:solidFill>
-            <a:srgbClr val="313244"/>
-          </a:solidFill>
-          <a:ln>
-            <a:noFill/>
-          </a:ln>
-          <a:effectLst/>
-        </p:spPr>
-        <p:style>
-          <a:lnRef idx="1">
-            <a:schemeClr val="accent1"/>
-          </a:lnRef>
-          <a:fillRef idx="3">
-            <a:schemeClr val="accent1"/>
-          </a:fillRef>
-          <a:effectRef idx="2">
-            <a:schemeClr val="accent1"/>
-          </a:effectRef>
-          <a:fontRef idx="minor">
-            <a:schemeClr val="lt1"/>
-          </a:fontRef>
-        </p:style>
-        <p:txBody>
-          <a:bodyPr rtlCol="0" anchor="ctr"/>
-          <a:lstStyle/>
-          <a:p>
-            <a:pPr algn="ctr"/>
-          </a:p>
-        </p:txBody>
-      </p:sp>
-      <p:sp>
-        <p:nvSpPr>
-          <p:cNvPr id="17" name="TextBox 16"/>
-          <p:cNvSpPr txBox="1"/>
-          <p:nvPr/>
-        </p:nvSpPr>
-        <p:spPr>
-          <a:xfrm>
-            <a:off x="8290407" y="1600200"/>
-            <a:ext cx="2926080" cy="365760"/>
-          </a:xfrm>
-          <a:prstGeom prst="rect">
-            <a:avLst/>
-          </a:prstGeom>
-          <a:noFill/>
-        </p:spPr>
-        <p:txBody>
-          <a:bodyPr wrap="square">
-            <a:spAutoFit/>
-          </a:bodyPr>
-          <a:lstStyle/>
-          <a:p>
-            <a:pPr algn="ctr">
-              <a:lnSpc>
-                <a:spcPts val="2640"/>
-              </a:lnSpc>
-              <a:spcAft>
-                <a:spcPts val="660"/>
-              </a:spcAft>
-              <a:defRPr sz="2200" b="1">
-                <a:solidFill>
-                  <a:srgbClr val="F9E2AF"/>
-                </a:solidFill>
-                <a:latin typeface="Segoe UI"/>
-              </a:defRPr>
-            </a:pPr>
-            <a:r>
-              <a:t>11 Formats</a:t>
-            </a:r>
-          </a:p>
-        </p:txBody>
-      </p:sp>
-      <p:sp>
-        <p:nvSpPr>
-          <p:cNvPr id="18" name="TextBox 17"/>
-          <p:cNvSpPr txBox="1"/>
-          <p:nvPr/>
-        </p:nvSpPr>
-        <p:spPr>
-          <a:xfrm>
-            <a:off x="8381847" y="2103120"/>
-            <a:ext cx="2743200" cy="594360"/>
-          </a:xfrm>
-          <a:prstGeom prst="rect">
-            <a:avLst/>
-          </a:prstGeom>
-          <a:noFill/>
-        </p:spPr>
-        <p:txBody>
-          <a:bodyPr wrap="square">
-            <a:spAutoFit/>
-          </a:bodyPr>
-          <a:lstStyle/>
-          <a:p>
-            <a:pPr algn="l">
-              <a:lnSpc>
-                <a:spcPts val="1439"/>
-              </a:lnSpc>
-              <a:spcAft>
-                <a:spcPts val="359"/>
-              </a:spcAft>
-              <a:defRPr sz="1200" b="0">
-                <a:solidFill>
-                  <a:srgbClr val="CDD6F4"/>
-                </a:solidFill>
-                <a:latin typeface="Cascadia Code"/>
-              </a:defRPr>
-            </a:pPr>
-            <a:r>
-              <a:t>requirements-doc, design-doc,</a:t>
-            </a:r>
-            <a:br/>
-            <a:r>
-              <a:t>validation-plan, investigation-report</a:t>
-            </a:r>
-          </a:p>
-        </p:txBody>
-      </p:sp>
-      <p:sp>
-        <p:nvSpPr>
-          <p:cNvPr id="19" name="TextBox 18"/>
-          <p:cNvSpPr txBox="1"/>
-          <p:nvPr/>
-        </p:nvSpPr>
-        <p:spPr>
-          <a:xfrm>
-            <a:off x="8381847" y="2880360"/>
-            <a:ext cx="2743200" cy="594360"/>
-          </a:xfrm>
-          <a:prstGeom prst="rect">
-            <a:avLst/>
-          </a:prstGeom>
-          <a:noFill/>
-        </p:spPr>
-        <p:txBody>
-          <a:bodyPr wrap="square">
-            <a:spAutoFit/>
-          </a:bodyPr>
-          <a:lstStyle/>
-          <a:p>
-            <a:pPr algn="l">
-              <a:lnSpc>
-                <a:spcPts val="1439"/>
-              </a:lnSpc>
-              <a:spcAft>
-                <a:spcPts val="359"/>
-              </a:spcAft>
-              <a:defRPr sz="1200" b="0">
-                <a:solidFill>
-                  <a:srgbClr val="CDD6F4"/>
-                </a:solidFill>
-                <a:latin typeface="Cascadia Code"/>
-              </a:defRPr>
-            </a:pPr>
-            <a:r>
-              <a:t>implementation-plan, agent-instructions,</a:t>
-            </a:r>
-            <a:br/>
-            <a:r>
-              <a:t>pipeline-spec, release-notes</a:t>
-            </a:r>
-          </a:p>
-        </p:txBody>
-      </p:sp>
-      <p:sp>
-        <p:nvSpPr>
-          <p:cNvPr id="20" name="TextBox 19"/>
-          <p:cNvSpPr txBox="1"/>
-          <p:nvPr/>
-        </p:nvSpPr>
-        <p:spPr>
-          <a:xfrm>
-            <a:off x="8381847" y="3657600"/>
-            <a:ext cx="2743200" cy="594360"/>
-          </a:xfrm>
-          <a:prstGeom prst="rect">
-            <a:avLst/>
-          </a:prstGeom>
-          <a:noFill/>
-        </p:spPr>
-        <p:txBody>
-          <a:bodyPr wrap="square">
-            <a:spAutoFit/>
-          </a:bodyPr>
-          <a:lstStyle/>
-          <a:p>
-            <a:pPr algn="l">
-              <a:lnSpc>
-                <a:spcPts val="1439"/>
-              </a:lnSpc>
-              <a:spcAft>
-                <a:spcPts val="359"/>
-              </a:spcAft>
-              <a:defRPr sz="1200" b="0">
-                <a:solidFill>
-                  <a:srgbClr val="CDD6F4"/>
-                </a:solidFill>
-                <a:latin typeface="Cascadia Code"/>
-              </a:defRPr>
-            </a:pPr>
-            <a:r>
-              <a:t>multi-artifact, triage-report,</a:t>
-            </a:r>
-            <a:br/>
-            <a:r>
-              <a:t>promptkit-pull-request</a:t>
-            </a:r>
-          </a:p>
-        </p:txBody>
-      </p:sp>
-      <p:sp>
-        <p:nvSpPr>
-          <p:cNvPr id="21" name="Rounded Rectangle 20"/>
-          <p:cNvSpPr/>
-          <p:nvPr/>
-        </p:nvSpPr>
-        <p:spPr>
-          <a:xfrm>
-            <a:off x="914400" y="5760720"/>
-            <a:ext cx="10332720" cy="640080"/>
-          </a:xfrm>
-          <a:prstGeom prst="roundRect">
-            <a:avLst/>
-          </a:prstGeom>
-          <a:solidFill>
-            <a:srgbClr val="313244"/>
-          </a:solidFill>
-          <a:ln>
-            <a:noFill/>
-          </a:ln>
-          <a:effectLst/>
-        </p:spPr>
-        <p:style>
-          <a:lnRef idx="1">
-            <a:schemeClr val="accent1"/>
-          </a:lnRef>
-          <a:fillRef idx="3">
-            <a:schemeClr val="accent1"/>
-          </a:fillRef>
-          <a:effectRef idx="2">
-            <a:schemeClr val="accent1"/>
-          </a:effectRef>
-          <a:fontRef idx="minor">
-            <a:schemeClr val="lt1"/>
-          </a:fontRef>
-        </p:style>
-        <p:txBody>
-          <a:bodyPr rtlCol="0" anchor="ctr"/>
-          <a:lstStyle/>
-          <a:p>
-            <a:pPr algn="ctr"/>
-          </a:p>
-        </p:txBody>
-      </p:sp>
-      <p:sp>
-        <p:nvSpPr>
-          <p:cNvPr id="22" name="TextBox 21"/>
-          <p:cNvSpPr txBox="1"/>
-          <p:nvPr/>
-        </p:nvSpPr>
-        <p:spPr>
-          <a:xfrm>
-            <a:off x="1188720" y="5806440"/>
-            <a:ext cx="9784080" cy="548640"/>
+            <a:off x="914400" y="6309360"/>
+            <a:ext cx="10058400" cy="365760"/>
           </a:xfrm>
           <a:prstGeom prst="rect">
             <a:avLst/>
@@ -8078,13 +8843,13 @@
               </a:spcAft>
               <a:defRPr sz="1300" b="0">
                 <a:solidFill>
-                  <a:srgbClr val="CDD6F4"/>
+                  <a:srgbClr val="6C7086"/>
                 </a:solidFill>
                 <a:latin typeface="Segoe UI"/>
               </a:defRPr>
             </a:pPr>
             <a:r>
-              <a:t>27 Task Templates:  investigate-bug · review-code · author-requirements-doc · author-design-doc · audit-traceability · audit-code-compliance · plan-implementation · author-pipeline · triage-issues · extend-library  … and more</a:t>
+              <a:t>Templates declare which components to compose via YAML frontmatter → bootstrap engine snaps them together</a:t>
             </a:r>
           </a:p>
         </p:txBody>
@@ -8195,69 +8960,27 @@
               </a:defRPr>
             </a:pPr>
             <a:r>
-              <a:t>Quick Start  —  3 Commands</a:t>
-            </a:r>
-          </a:p>
-        </p:txBody>
-      </p:sp>
-      <p:sp>
-        <p:nvSpPr>
-          <p:cNvPr id="4" name="TextBox 3"/>
-          <p:cNvSpPr txBox="1"/>
-          <p:nvPr/>
-        </p:nvSpPr>
-        <p:spPr>
-          <a:xfrm>
-            <a:off x="822960" y="1463040"/>
-            <a:ext cx="2743200" cy="320040"/>
-          </a:xfrm>
-          <a:prstGeom prst="rect">
-            <a:avLst/>
-          </a:prstGeom>
-          <a:noFill/>
-        </p:spPr>
-        <p:txBody>
-          <a:bodyPr wrap="square">
-            <a:spAutoFit/>
-          </a:bodyPr>
-          <a:lstStyle/>
-          <a:p>
-            <a:pPr algn="l">
-              <a:lnSpc>
-                <a:spcPts val="2160"/>
-              </a:lnSpc>
-              <a:spcAft>
-                <a:spcPts val="540"/>
-              </a:spcAft>
-              <a:defRPr sz="1800" b="1">
-                <a:solidFill>
-                  <a:srgbClr val="89B4FA"/>
-                </a:solidFill>
-                <a:latin typeface="Segoe UI"/>
-              </a:defRPr>
-            </a:pPr>
-            <a:r>
-              <a:t>Interactive mode</a:t>
-            </a:r>
-          </a:p>
-        </p:txBody>
-      </p:sp>
-      <p:sp>
-        <p:nvSpPr>
-          <p:cNvPr id="5" name="Rounded Rectangle 4"/>
+              <a:t>What's in the Box</a:t>
+            </a:r>
+          </a:p>
+        </p:txBody>
+      </p:sp>
+      <p:sp>
+        <p:nvSpPr>
+          <p:cNvPr id="4" name="Rounded Rectangle 3"/>
           <p:cNvSpPr/>
           <p:nvPr/>
         </p:nvSpPr>
         <p:spPr>
           <a:xfrm>
-            <a:off x="822960" y="1828800"/>
-            <a:ext cx="6858000" cy="822960"/>
+            <a:off x="792327" y="1463040"/>
+            <a:ext cx="3291840" cy="4114800"/>
           </a:xfrm>
           <a:prstGeom prst="roundRect">
             <a:avLst/>
           </a:prstGeom>
           <a:solidFill>
-            <a:srgbClr val="181825"/>
+            <a:srgbClr val="313244"/>
           </a:solidFill>
           <a:ln>
             <a:noFill/>
@@ -8288,14 +9011,14 @@
       </p:sp>
       <p:sp>
         <p:nvSpPr>
-          <p:cNvPr id="6" name="TextBox 5"/>
+          <p:cNvPr id="5" name="TextBox 4"/>
           <p:cNvSpPr txBox="1"/>
           <p:nvPr/>
         </p:nvSpPr>
         <p:spPr>
           <a:xfrm>
-            <a:off x="1005840" y="1874520"/>
-            <a:ext cx="6492240" cy="731520"/>
+            <a:off x="975207" y="1600200"/>
+            <a:ext cx="2926080" cy="365760"/>
           </a:xfrm>
           <a:prstGeom prst="rect">
             <a:avLst/>
@@ -8308,438 +9031,36 @@
           </a:bodyPr>
           <a:lstStyle/>
           <a:p>
-            <a:pPr algn="l">
+            <a:pPr algn="ctr">
               <a:lnSpc>
-                <a:spcPts val="1959"/>
+                <a:spcPts val="2640"/>
               </a:lnSpc>
               <a:spcAft>
-                <a:spcPts val="420"/>
+                <a:spcPts val="660"/>
               </a:spcAft>
-              <a:defRPr sz="1400" b="0">
-                <a:solidFill>
-                  <a:srgbClr val="A6E3A1"/>
-                </a:solidFill>
-                <a:latin typeface="Cascadia Code"/>
+              <a:defRPr sz="2200" b="1">
+                <a:solidFill>
+                  <a:srgbClr val="89B4FA"/>
+                </a:solidFill>
+                <a:latin typeface="Segoe UI"/>
               </a:defRPr>
             </a:pPr>
             <a:r>
-              <a:t>npx @alan-jowett/promptkit</a:t>
-            </a:r>
-          </a:p>
-        </p:txBody>
-      </p:sp>
-      <p:sp>
-        <p:nvSpPr>
-          <p:cNvPr id="7" name="TextBox 6"/>
+              <a:t>15 Personas</a:t>
+            </a:r>
+          </a:p>
+        </p:txBody>
+      </p:sp>
+      <p:sp>
+        <p:nvSpPr>
+          <p:cNvPr id="6" name="TextBox 5"/>
           <p:cNvSpPr txBox="1"/>
           <p:nvPr/>
         </p:nvSpPr>
         <p:spPr>
           <a:xfrm>
-            <a:off x="8046720" y="1783080"/>
-            <a:ext cx="3657600" cy="914400"/>
-          </a:xfrm>
-          <a:prstGeom prst="rect">
-            <a:avLst/>
-          </a:prstGeom>
-          <a:noFill/>
-        </p:spPr>
-        <p:txBody>
-          <a:bodyPr wrap="square">
-            <a:spAutoFit/>
-          </a:bodyPr>
-          <a:lstStyle/>
-          <a:p>
-            <a:pPr algn="l">
-              <a:lnSpc>
-                <a:spcPts val="1560"/>
-              </a:lnSpc>
-              <a:spcAft>
-                <a:spcPts val="390"/>
-              </a:spcAft>
-              <a:defRPr sz="1300" b="0">
-                <a:solidFill>
-                  <a:srgbClr val="6C7086"/>
-                </a:solidFill>
-                <a:latin typeface="Segoe UI"/>
-              </a:defRPr>
-            </a:pPr>
-            <a:r>
-              <a:t>Detects your LLM CLI (Copilot / Claude) and</a:t>
-            </a:r>
-            <a:br/>
-            <a:r>
-              <a:t>launches an interactive prompt-building session</a:t>
-            </a:r>
-          </a:p>
-        </p:txBody>
-      </p:sp>
-      <p:sp>
-        <p:nvSpPr>
-          <p:cNvPr id="8" name="TextBox 7"/>
-          <p:cNvSpPr txBox="1"/>
-          <p:nvPr/>
-        </p:nvSpPr>
-        <p:spPr>
-          <a:xfrm>
-            <a:off x="822960" y="3108960"/>
-            <a:ext cx="2743200" cy="320040"/>
-          </a:xfrm>
-          <a:prstGeom prst="rect">
-            <a:avLst/>
-          </a:prstGeom>
-          <a:noFill/>
-        </p:spPr>
-        <p:txBody>
-          <a:bodyPr wrap="square">
-            <a:spAutoFit/>
-          </a:bodyPr>
-          <a:lstStyle/>
-          <a:p>
-            <a:pPr algn="l">
-              <a:lnSpc>
-                <a:spcPts val="2160"/>
-              </a:lnSpc>
-              <a:spcAft>
-                <a:spcPts val="540"/>
-              </a:spcAft>
-              <a:defRPr sz="1800" b="1">
-                <a:solidFill>
-                  <a:srgbClr val="A6E3A1"/>
-                </a:solidFill>
-                <a:latin typeface="Segoe UI"/>
-              </a:defRPr>
-            </a:pPr>
-            <a:r>
-              <a:t>Browse templates</a:t>
-            </a:r>
-          </a:p>
-        </p:txBody>
-      </p:sp>
-      <p:sp>
-        <p:nvSpPr>
-          <p:cNvPr id="9" name="Rounded Rectangle 8"/>
-          <p:cNvSpPr/>
-          <p:nvPr/>
-        </p:nvSpPr>
-        <p:spPr>
-          <a:xfrm>
-            <a:off x="822960" y="3474720"/>
-            <a:ext cx="6858000" cy="822960"/>
-          </a:xfrm>
-          <a:prstGeom prst="roundRect">
-            <a:avLst/>
-          </a:prstGeom>
-          <a:solidFill>
-            <a:srgbClr val="181825"/>
-          </a:solidFill>
-          <a:ln>
-            <a:noFill/>
-          </a:ln>
-          <a:effectLst/>
-        </p:spPr>
-        <p:style>
-          <a:lnRef idx="1">
-            <a:schemeClr val="accent1"/>
-          </a:lnRef>
-          <a:fillRef idx="3">
-            <a:schemeClr val="accent1"/>
-          </a:fillRef>
-          <a:effectRef idx="2">
-            <a:schemeClr val="accent1"/>
-          </a:effectRef>
-          <a:fontRef idx="minor">
-            <a:schemeClr val="lt1"/>
-          </a:fontRef>
-        </p:style>
-        <p:txBody>
-          <a:bodyPr rtlCol="0" anchor="ctr"/>
-          <a:lstStyle/>
-          <a:p>
-            <a:pPr algn="ctr"/>
-          </a:p>
-        </p:txBody>
-      </p:sp>
-      <p:sp>
-        <p:nvSpPr>
-          <p:cNvPr id="10" name="TextBox 9"/>
-          <p:cNvSpPr txBox="1"/>
-          <p:nvPr/>
-        </p:nvSpPr>
-        <p:spPr>
-          <a:xfrm>
-            <a:off x="1005840" y="3520440"/>
-            <a:ext cx="6492240" cy="731520"/>
-          </a:xfrm>
-          <a:prstGeom prst="rect">
-            <a:avLst/>
-          </a:prstGeom>
-          <a:noFill/>
-        </p:spPr>
-        <p:txBody>
-          <a:bodyPr wrap="square">
-            <a:spAutoFit/>
-          </a:bodyPr>
-          <a:lstStyle/>
-          <a:p>
-            <a:pPr algn="l">
-              <a:lnSpc>
-                <a:spcPts val="1959"/>
-              </a:lnSpc>
-              <a:spcAft>
-                <a:spcPts val="420"/>
-              </a:spcAft>
-              <a:defRPr sz="1400" b="0">
-                <a:solidFill>
-                  <a:srgbClr val="A6E3A1"/>
-                </a:solidFill>
-                <a:latin typeface="Cascadia Code"/>
-              </a:defRPr>
-            </a:pPr>
-            <a:r>
-              <a:t>npx @alan-jowett/promptkit list</a:t>
-            </a:r>
-          </a:p>
-        </p:txBody>
-      </p:sp>
-      <p:sp>
-        <p:nvSpPr>
-          <p:cNvPr id="11" name="TextBox 10"/>
-          <p:cNvSpPr txBox="1"/>
-          <p:nvPr/>
-        </p:nvSpPr>
-        <p:spPr>
-          <a:xfrm>
-            <a:off x="8046720" y="3429000"/>
-            <a:ext cx="3657600" cy="914400"/>
-          </a:xfrm>
-          <a:prstGeom prst="rect">
-            <a:avLst/>
-          </a:prstGeom>
-          <a:noFill/>
-        </p:spPr>
-        <p:txBody>
-          <a:bodyPr wrap="square">
-            <a:spAutoFit/>
-          </a:bodyPr>
-          <a:lstStyle/>
-          <a:p>
-            <a:pPr algn="l">
-              <a:lnSpc>
-                <a:spcPts val="1560"/>
-              </a:lnSpc>
-              <a:spcAft>
-                <a:spcPts val="390"/>
-              </a:spcAft>
-              <a:defRPr sz="1300" b="0">
-                <a:solidFill>
-                  <a:srgbClr val="6C7086"/>
-                </a:solidFill>
-                <a:latin typeface="Segoe UI"/>
-              </a:defRPr>
-            </a:pPr>
-            <a:r>
-              <a:t>Lists all available templates with descriptions</a:t>
-            </a:r>
-            <a:br/>
-            <a:r>
-              <a:t>Add --json for machine-readable output</a:t>
-            </a:r>
-          </a:p>
-        </p:txBody>
-      </p:sp>
-      <p:sp>
-        <p:nvSpPr>
-          <p:cNvPr id="12" name="TextBox 11"/>
-          <p:cNvSpPr txBox="1"/>
-          <p:nvPr/>
-        </p:nvSpPr>
-        <p:spPr>
-          <a:xfrm>
-            <a:off x="822960" y="4754880"/>
-            <a:ext cx="2743200" cy="320040"/>
-          </a:xfrm>
-          <a:prstGeom prst="rect">
-            <a:avLst/>
-          </a:prstGeom>
-          <a:noFill/>
-        </p:spPr>
-        <p:txBody>
-          <a:bodyPr wrap="square">
-            <a:spAutoFit/>
-          </a:bodyPr>
-          <a:lstStyle/>
-          <a:p>
-            <a:pPr algn="l">
-              <a:lnSpc>
-                <a:spcPts val="2160"/>
-              </a:lnSpc>
-              <a:spcAft>
-                <a:spcPts val="540"/>
-              </a:spcAft>
-              <a:defRPr sz="1800" b="1">
-                <a:solidFill>
-                  <a:srgbClr val="F9E2AF"/>
-                </a:solidFill>
-                <a:latin typeface="Segoe UI"/>
-              </a:defRPr>
-            </a:pPr>
-            <a:r>
-              <a:t>Assemble a prompt</a:t>
-            </a:r>
-          </a:p>
-        </p:txBody>
-      </p:sp>
-      <p:sp>
-        <p:nvSpPr>
-          <p:cNvPr id="13" name="Rounded Rectangle 12"/>
-          <p:cNvSpPr/>
-          <p:nvPr/>
-        </p:nvSpPr>
-        <p:spPr>
-          <a:xfrm>
-            <a:off x="822960" y="5120640"/>
-            <a:ext cx="6858000" cy="822960"/>
-          </a:xfrm>
-          <a:prstGeom prst="roundRect">
-            <a:avLst/>
-          </a:prstGeom>
-          <a:solidFill>
-            <a:srgbClr val="181825"/>
-          </a:solidFill>
-          <a:ln>
-            <a:noFill/>
-          </a:ln>
-          <a:effectLst/>
-        </p:spPr>
-        <p:style>
-          <a:lnRef idx="1">
-            <a:schemeClr val="accent1"/>
-          </a:lnRef>
-          <a:fillRef idx="3">
-            <a:schemeClr val="accent1"/>
-          </a:fillRef>
-          <a:effectRef idx="2">
-            <a:schemeClr val="accent1"/>
-          </a:effectRef>
-          <a:fontRef idx="minor">
-            <a:schemeClr val="lt1"/>
-          </a:fontRef>
-        </p:style>
-        <p:txBody>
-          <a:bodyPr rtlCol="0" anchor="ctr"/>
-          <a:lstStyle/>
-          <a:p>
-            <a:pPr algn="ctr"/>
-          </a:p>
-        </p:txBody>
-      </p:sp>
-      <p:sp>
-        <p:nvSpPr>
-          <p:cNvPr id="14" name="TextBox 13"/>
-          <p:cNvSpPr txBox="1"/>
-          <p:nvPr/>
-        </p:nvSpPr>
-        <p:spPr>
-          <a:xfrm>
-            <a:off x="1005840" y="5166360"/>
-            <a:ext cx="6492240" cy="731520"/>
-          </a:xfrm>
-          <a:prstGeom prst="rect">
-            <a:avLst/>
-          </a:prstGeom>
-          <a:noFill/>
-        </p:spPr>
-        <p:txBody>
-          <a:bodyPr wrap="square">
-            <a:spAutoFit/>
-          </a:bodyPr>
-          <a:lstStyle/>
-          <a:p>
-            <a:pPr algn="l">
-              <a:lnSpc>
-                <a:spcPts val="1959"/>
-              </a:lnSpc>
-              <a:spcAft>
-                <a:spcPts val="420"/>
-              </a:spcAft>
-              <a:defRPr sz="1400" b="0">
-                <a:solidFill>
-                  <a:srgbClr val="A6E3A1"/>
-                </a:solidFill>
-                <a:latin typeface="Cascadia Code"/>
-              </a:defRPr>
-            </a:pPr>
-            <a:r>
-              <a:t>npx @alan-jowett/promptkit assemble investigate-bug \</a:t>
-            </a:r>
-            <a:br/>
-            <a:r>
-              <a:t>  -p problem_description="Segfault on startup" \</a:t>
-            </a:r>
-            <a:br/>
-            <a:r>
-              <a:t>  -o investigation.md</a:t>
-            </a:r>
-          </a:p>
-        </p:txBody>
-      </p:sp>
-      <p:sp>
-        <p:nvSpPr>
-          <p:cNvPr id="15" name="TextBox 14"/>
-          <p:cNvSpPr txBox="1"/>
-          <p:nvPr/>
-        </p:nvSpPr>
-        <p:spPr>
-          <a:xfrm>
-            <a:off x="8046720" y="5074920"/>
-            <a:ext cx="3657600" cy="914400"/>
-          </a:xfrm>
-          <a:prstGeom prst="rect">
-            <a:avLst/>
-          </a:prstGeom>
-          <a:noFill/>
-        </p:spPr>
-        <p:txBody>
-          <a:bodyPr wrap="square">
-            <a:spAutoFit/>
-          </a:bodyPr>
-          <a:lstStyle/>
-          <a:p>
-            <a:pPr algn="l">
-              <a:lnSpc>
-                <a:spcPts val="1560"/>
-              </a:lnSpc>
-              <a:spcAft>
-                <a:spcPts val="390"/>
-              </a:spcAft>
-              <a:defRPr sz="1300" b="0">
-                <a:solidFill>
-                  <a:srgbClr val="6C7086"/>
-                </a:solidFill>
-                <a:latin typeface="Segoe UI"/>
-              </a:defRPr>
-            </a:pPr>
-            <a:r>
-              <a:t>Composes persona + protocols + format + template</a:t>
-            </a:r>
-            <a:br/>
-            <a:r>
-              <a:t>into a single ready-to-use prompt file</a:t>
-            </a:r>
-          </a:p>
-        </p:txBody>
-      </p:sp>
-      <p:sp>
-        <p:nvSpPr>
-          <p:cNvPr id="16" name="TextBox 15"/>
-          <p:cNvSpPr txBox="1"/>
-          <p:nvPr/>
-        </p:nvSpPr>
-        <p:spPr>
-          <a:xfrm>
-            <a:off x="822960" y="6400800"/>
-            <a:ext cx="10058400" cy="274320"/>
+            <a:off x="1066647" y="2103120"/>
+            <a:ext cx="2743200" cy="365760"/>
           </a:xfrm>
           <a:prstGeom prst="rect">
             <a:avLst/>
@@ -8761,13 +9082,721 @@
               </a:spcAft>
               <a:defRPr sz="1200" b="0">
                 <a:solidFill>
-                  <a:srgbClr val="6C7086"/>
+                  <a:srgbClr val="CDD6F4"/>
+                </a:solidFill>
+                <a:latin typeface="Cascadia Code"/>
+              </a:defRPr>
+            </a:pPr>
+            <a:r>
+              <a:t>systems-engineer, security-auditor</a:t>
+            </a:r>
+          </a:p>
+        </p:txBody>
+      </p:sp>
+      <p:sp>
+        <p:nvSpPr>
+          <p:cNvPr id="7" name="TextBox 6"/>
+          <p:cNvSpPr txBox="1"/>
+          <p:nvPr/>
+        </p:nvSpPr>
+        <p:spPr>
+          <a:xfrm>
+            <a:off x="1066647" y="2651760"/>
+            <a:ext cx="2743200" cy="365760"/>
+          </a:xfrm>
+          <a:prstGeom prst="rect">
+            <a:avLst/>
+          </a:prstGeom>
+          <a:noFill/>
+        </p:spPr>
+        <p:txBody>
+          <a:bodyPr wrap="square">
+            <a:spAutoFit/>
+          </a:bodyPr>
+          <a:lstStyle/>
+          <a:p>
+            <a:pPr algn="l">
+              <a:lnSpc>
+                <a:spcPts val="1439"/>
+              </a:lnSpc>
+              <a:spcAft>
+                <a:spcPts val="359"/>
+              </a:spcAft>
+              <a:defRPr sz="1200" b="0">
+                <a:solidFill>
+                  <a:srgbClr val="CDD6F4"/>
+                </a:solidFill>
+                <a:latin typeface="Cascadia Code"/>
+              </a:defRPr>
+            </a:pPr>
+            <a:r>
+              <a:t>software-architect, devops-engineer</a:t>
+            </a:r>
+          </a:p>
+        </p:txBody>
+      </p:sp>
+      <p:sp>
+        <p:nvSpPr>
+          <p:cNvPr id="8" name="TextBox 7"/>
+          <p:cNvSpPr txBox="1"/>
+          <p:nvPr/>
+        </p:nvSpPr>
+        <p:spPr>
+          <a:xfrm>
+            <a:off x="1066647" y="3200400"/>
+            <a:ext cx="2743200" cy="365760"/>
+          </a:xfrm>
+          <a:prstGeom prst="rect">
+            <a:avLst/>
+          </a:prstGeom>
+          <a:noFill/>
+        </p:spPr>
+        <p:txBody>
+          <a:bodyPr wrap="square">
+            <a:spAutoFit/>
+          </a:bodyPr>
+          <a:lstStyle/>
+          <a:p>
+            <a:pPr algn="l">
+              <a:lnSpc>
+                <a:spcPts val="1439"/>
+              </a:lnSpc>
+              <a:spcAft>
+                <a:spcPts val="359"/>
+              </a:spcAft>
+              <a:defRPr sz="1200" b="0">
+                <a:solidFill>
+                  <a:srgbClr val="CDD6F4"/>
+                </a:solidFill>
+                <a:latin typeface="Cascadia Code"/>
+              </a:defRPr>
+            </a:pPr>
+            <a:r>
+              <a:t>reverse-engineer, specification-analyst</a:t>
+            </a:r>
+          </a:p>
+        </p:txBody>
+      </p:sp>
+      <p:sp>
+        <p:nvSpPr>
+          <p:cNvPr id="9" name="TextBox 8"/>
+          <p:cNvSpPr txBox="1"/>
+          <p:nvPr/>
+        </p:nvSpPr>
+        <p:spPr>
+          <a:xfrm>
+            <a:off x="1066647" y="3749040"/>
+            <a:ext cx="2743200" cy="365760"/>
+          </a:xfrm>
+          <a:prstGeom prst="rect">
+            <a:avLst/>
+          </a:prstGeom>
+          <a:noFill/>
+        </p:spPr>
+        <p:txBody>
+          <a:bodyPr wrap="square">
+            <a:spAutoFit/>
+          </a:bodyPr>
+          <a:lstStyle/>
+          <a:p>
+            <a:pPr algn="l">
+              <a:lnSpc>
+                <a:spcPts val="1439"/>
+              </a:lnSpc>
+              <a:spcAft>
+                <a:spcPts val="359"/>
+              </a:spcAft>
+              <a:defRPr sz="1200" b="0">
+                <a:solidFill>
+                  <a:srgbClr val="CDD6F4"/>
+                </a:solidFill>
+                <a:latin typeface="Cascadia Code"/>
+              </a:defRPr>
+            </a:pPr>
+            <a:r>
+              <a:t>workflow-arbiter, implementation-engineer</a:t>
+            </a:r>
+          </a:p>
+        </p:txBody>
+      </p:sp>
+      <p:sp>
+        <p:nvSpPr>
+          <p:cNvPr id="10" name="TextBox 9"/>
+          <p:cNvSpPr txBox="1"/>
+          <p:nvPr/>
+        </p:nvSpPr>
+        <p:spPr>
+          <a:xfrm>
+            <a:off x="1066647" y="4297680"/>
+            <a:ext cx="2743200" cy="365760"/>
+          </a:xfrm>
+          <a:prstGeom prst="rect">
+            <a:avLst/>
+          </a:prstGeom>
+          <a:noFill/>
+        </p:spPr>
+        <p:txBody>
+          <a:bodyPr wrap="square">
+            <a:spAutoFit/>
+          </a:bodyPr>
+          <a:lstStyle/>
+          <a:p>
+            <a:pPr algn="l">
+              <a:lnSpc>
+                <a:spcPts val="1439"/>
+              </a:lnSpc>
+              <a:spcAft>
+                <a:spcPts val="359"/>
+              </a:spcAft>
+              <a:defRPr sz="1200" b="0">
+                <a:solidFill>
+                  <a:srgbClr val="CDD6F4"/>
+                </a:solidFill>
+                <a:latin typeface="Cascadia Code"/>
+              </a:defRPr>
+            </a:pPr>
+            <a:r>
+              <a:t>test-engineer, promptkit-contributor
+embedded-firmware-engineer, electrical-engineer
+rf-engineer, mechanical-engineer, protocol-architect</a:t>
+            </a:r>
+          </a:p>
+        </p:txBody>
+      </p:sp>
+      <p:sp>
+        <p:nvSpPr>
+          <p:cNvPr id="11" name="Rounded Rectangle 10"/>
+          <p:cNvSpPr/>
+          <p:nvPr/>
+        </p:nvSpPr>
+        <p:spPr>
+          <a:xfrm>
+            <a:off x="4449927" y="1463040"/>
+            <a:ext cx="3291840" cy="4114800"/>
+          </a:xfrm>
+          <a:prstGeom prst="roundRect">
+            <a:avLst/>
+          </a:prstGeom>
+          <a:solidFill>
+            <a:srgbClr val="313244"/>
+          </a:solidFill>
+          <a:ln>
+            <a:noFill/>
+          </a:ln>
+          <a:effectLst/>
+        </p:spPr>
+        <p:style>
+          <a:lnRef idx="1">
+            <a:schemeClr val="accent1"/>
+          </a:lnRef>
+          <a:fillRef idx="3">
+            <a:schemeClr val="accent1"/>
+          </a:fillRef>
+          <a:effectRef idx="2">
+            <a:schemeClr val="accent1"/>
+          </a:effectRef>
+          <a:fontRef idx="minor">
+            <a:schemeClr val="lt1"/>
+          </a:fontRef>
+        </p:style>
+        <p:txBody>
+          <a:bodyPr rtlCol="0" anchor="ctr"/>
+          <a:lstStyle/>
+          <a:p>
+            <a:pPr algn="ctr"/>
+          </a:p>
+        </p:txBody>
+      </p:sp>
+      <p:sp>
+        <p:nvSpPr>
+          <p:cNvPr id="12" name="TextBox 11"/>
+          <p:cNvSpPr txBox="1"/>
+          <p:nvPr/>
+        </p:nvSpPr>
+        <p:spPr>
+          <a:xfrm>
+            <a:off x="4632807" y="1600200"/>
+            <a:ext cx="2926080" cy="365760"/>
+          </a:xfrm>
+          <a:prstGeom prst="rect">
+            <a:avLst/>
+          </a:prstGeom>
+          <a:noFill/>
+        </p:spPr>
+        <p:txBody>
+          <a:bodyPr wrap="square">
+            <a:spAutoFit/>
+          </a:bodyPr>
+          <a:lstStyle/>
+          <a:p>
+            <a:pPr algn="ctr">
+              <a:lnSpc>
+                <a:spcPts val="2640"/>
+              </a:lnSpc>
+              <a:spcAft>
+                <a:spcPts val="660"/>
+              </a:spcAft>
+              <a:defRPr sz="2200" b="1">
+                <a:solidFill>
+                  <a:srgbClr val="A6E3A1"/>
                 </a:solidFill>
                 <a:latin typeface="Segoe UI"/>
               </a:defRPr>
             </a:pPr>
             <a:r>
-              <a:t>Prerequisites: Node.js 18+  ·  Optional: GitHub Copilot CLI or Claude Code for interactive mode</a:t>
+              <a:t>48 Protocols</a:t>
+            </a:r>
+          </a:p>
+        </p:txBody>
+      </p:sp>
+      <p:sp>
+        <p:nvSpPr>
+          <p:cNvPr id="13" name="TextBox 12"/>
+          <p:cNvSpPr txBox="1"/>
+          <p:nvPr/>
+        </p:nvSpPr>
+        <p:spPr>
+          <a:xfrm>
+            <a:off x="4724247" y="2103120"/>
+            <a:ext cx="2743200" cy="594360"/>
+          </a:xfrm>
+          <a:prstGeom prst="rect">
+            <a:avLst/>
+          </a:prstGeom>
+          <a:noFill/>
+        </p:spPr>
+        <p:txBody>
+          <a:bodyPr wrap="square">
+            <a:spAutoFit/>
+          </a:bodyPr>
+          <a:lstStyle/>
+          <a:p>
+            <a:pPr algn="l">
+              <a:lnSpc>
+                <a:spcPts val="1439"/>
+              </a:lnSpc>
+              <a:spcAft>
+                <a:spcPts val="359"/>
+              </a:spcAft>
+              <a:defRPr sz="1200" b="0">
+                <a:solidFill>
+                  <a:srgbClr val="CDD6F4"/>
+                </a:solidFill>
+                <a:latin typeface="Cascadia Code"/>
+              </a:defRPr>
+            </a:pPr>
+            <a:r>
+              <a:t>Guardrails (5): anti-hallucination,</a:t>
+            </a:r>
+            <a:br/>
+            <a:r>
+              <a:t>  self-verification, operational-constraints</a:t>
+            </a:r>
+          </a:p>
+        </p:txBody>
+      </p:sp>
+      <p:sp>
+        <p:nvSpPr>
+          <p:cNvPr id="14" name="TextBox 13"/>
+          <p:cNvSpPr txBox="1"/>
+          <p:nvPr/>
+        </p:nvSpPr>
+        <p:spPr>
+          <a:xfrm>
+            <a:off x="4724247" y="2880360"/>
+            <a:ext cx="2743200" cy="594360"/>
+          </a:xfrm>
+          <a:prstGeom prst="rect">
+            <a:avLst/>
+          </a:prstGeom>
+          <a:noFill/>
+        </p:spPr>
+        <p:txBody>
+          <a:bodyPr wrap="square">
+            <a:spAutoFit/>
+          </a:bodyPr>
+          <a:lstStyle/>
+          <a:p>
+            <a:pPr algn="l">
+              <a:lnSpc>
+                <a:spcPts val="1439"/>
+              </a:lnSpc>
+              <a:spcAft>
+                <a:spcPts val="359"/>
+              </a:spcAft>
+              <a:defRPr sz="1200" b="0">
+                <a:solidFill>
+                  <a:srgbClr val="CDD6F4"/>
+                </a:solidFill>
+                <a:latin typeface="Cascadia Code"/>
+              </a:defRPr>
+            </a:pPr>
+            <a:r>
+              <a:t>Analysis (17): memory-safety-c, memory-safety-rust,</a:t>
+            </a:r>
+            <a:br/>
+            <a:r>
+              <a:t>  thread-safety, security-vulnerability</a:t>
+            </a:r>
+          </a:p>
+        </p:txBody>
+      </p:sp>
+      <p:sp>
+        <p:nvSpPr>
+          <p:cNvPr id="15" name="TextBox 14"/>
+          <p:cNvSpPr txBox="1"/>
+          <p:nvPr/>
+        </p:nvSpPr>
+        <p:spPr>
+          <a:xfrm>
+            <a:off x="4724247" y="3657600"/>
+            <a:ext cx="2743200" cy="822960"/>
+          </a:xfrm>
+          <a:prstGeom prst="rect">
+            <a:avLst/>
+          </a:prstGeom>
+          <a:noFill/>
+        </p:spPr>
+        <p:txBody>
+          <a:bodyPr wrap="square">
+            <a:spAutoFit/>
+          </a:bodyPr>
+          <a:lstStyle/>
+          <a:p>
+            <a:pPr algn="l">
+              <a:lnSpc>
+                <a:spcPts val="1439"/>
+              </a:lnSpc>
+              <a:spcAft>
+                <a:spcPts val="359"/>
+              </a:spcAft>
+              <a:defRPr sz="1200" b="0">
+                <a:solidFill>
+                  <a:srgbClr val="CDD6F4"/>
+                </a:solidFill>
+                <a:latin typeface="Cascadia Code"/>
+              </a:defRPr>
+            </a:pPr>
+            <a:r>
+              <a:t>Reasoning (26): root-cause-analysis,</a:t>
+            </a:r>
+            <a:br/>
+            <a:r>
+              <a:t>  traceability-audit, code-compliance-audit,</a:t>
+            </a:r>
+            <a:br/>
+            <a:r>
+              <a:t>  requirements-elicitation … and 9 more</a:t>
+            </a:r>
+          </a:p>
+        </p:txBody>
+      </p:sp>
+      <p:sp>
+        <p:nvSpPr>
+          <p:cNvPr id="16" name="Rounded Rectangle 15"/>
+          <p:cNvSpPr/>
+          <p:nvPr/>
+        </p:nvSpPr>
+        <p:spPr>
+          <a:xfrm>
+            <a:off x="8107527" y="1463040"/>
+            <a:ext cx="3291840" cy="4114800"/>
+          </a:xfrm>
+          <a:prstGeom prst="roundRect">
+            <a:avLst/>
+          </a:prstGeom>
+          <a:solidFill>
+            <a:srgbClr val="313244"/>
+          </a:solidFill>
+          <a:ln>
+            <a:noFill/>
+          </a:ln>
+          <a:effectLst/>
+        </p:spPr>
+        <p:style>
+          <a:lnRef idx="1">
+            <a:schemeClr val="accent1"/>
+          </a:lnRef>
+          <a:fillRef idx="3">
+            <a:schemeClr val="accent1"/>
+          </a:fillRef>
+          <a:effectRef idx="2">
+            <a:schemeClr val="accent1"/>
+          </a:effectRef>
+          <a:fontRef idx="minor">
+            <a:schemeClr val="lt1"/>
+          </a:fontRef>
+        </p:style>
+        <p:txBody>
+          <a:bodyPr rtlCol="0" anchor="ctr"/>
+          <a:lstStyle/>
+          <a:p>
+            <a:pPr algn="ctr"/>
+          </a:p>
+        </p:txBody>
+      </p:sp>
+      <p:sp>
+        <p:nvSpPr>
+          <p:cNvPr id="17" name="TextBox 16"/>
+          <p:cNvSpPr txBox="1"/>
+          <p:nvPr/>
+        </p:nvSpPr>
+        <p:spPr>
+          <a:xfrm>
+            <a:off x="8290407" y="1600200"/>
+            <a:ext cx="2926080" cy="365760"/>
+          </a:xfrm>
+          <a:prstGeom prst="rect">
+            <a:avLst/>
+          </a:prstGeom>
+          <a:noFill/>
+        </p:spPr>
+        <p:txBody>
+          <a:bodyPr wrap="square">
+            <a:spAutoFit/>
+          </a:bodyPr>
+          <a:lstStyle/>
+          <a:p>
+            <a:pPr algn="ctr">
+              <a:lnSpc>
+                <a:spcPts val="2640"/>
+              </a:lnSpc>
+              <a:spcAft>
+                <a:spcPts val="660"/>
+              </a:spcAft>
+              <a:defRPr sz="2200" b="1">
+                <a:solidFill>
+                  <a:srgbClr val="F9E2AF"/>
+                </a:solidFill>
+                <a:latin typeface="Segoe UI"/>
+              </a:defRPr>
+            </a:pPr>
+            <a:r>
+              <a:t>21 Formats</a:t>
+            </a:r>
+          </a:p>
+        </p:txBody>
+      </p:sp>
+      <p:sp>
+        <p:nvSpPr>
+          <p:cNvPr id="18" name="TextBox 17"/>
+          <p:cNvSpPr txBox="1"/>
+          <p:nvPr/>
+        </p:nvSpPr>
+        <p:spPr>
+          <a:xfrm>
+            <a:off x="8381847" y="2103120"/>
+            <a:ext cx="2743200" cy="594360"/>
+          </a:xfrm>
+          <a:prstGeom prst="rect">
+            <a:avLst/>
+          </a:prstGeom>
+          <a:noFill/>
+        </p:spPr>
+        <p:txBody>
+          <a:bodyPr wrap="square">
+            <a:spAutoFit/>
+          </a:bodyPr>
+          <a:lstStyle/>
+          <a:p>
+            <a:pPr algn="l">
+              <a:lnSpc>
+                <a:spcPts val="1439"/>
+              </a:lnSpc>
+              <a:spcAft>
+                <a:spcPts val="359"/>
+              </a:spcAft>
+              <a:defRPr sz="1200" b="0">
+                <a:solidFill>
+                  <a:srgbClr val="CDD6F4"/>
+                </a:solidFill>
+                <a:latin typeface="Cascadia Code"/>
+              </a:defRPr>
+            </a:pPr>
+            <a:r>
+              <a:t>requirements-doc, design-doc,</a:t>
+            </a:r>
+            <a:br/>
+            <a:r>
+              <a:t>validation-plan, investigation-report</a:t>
+            </a:r>
+          </a:p>
+        </p:txBody>
+      </p:sp>
+      <p:sp>
+        <p:nvSpPr>
+          <p:cNvPr id="19" name="TextBox 18"/>
+          <p:cNvSpPr txBox="1"/>
+          <p:nvPr/>
+        </p:nvSpPr>
+        <p:spPr>
+          <a:xfrm>
+            <a:off x="8381847" y="2880360"/>
+            <a:ext cx="2743200" cy="594360"/>
+          </a:xfrm>
+          <a:prstGeom prst="rect">
+            <a:avLst/>
+          </a:prstGeom>
+          <a:noFill/>
+        </p:spPr>
+        <p:txBody>
+          <a:bodyPr wrap="square">
+            <a:spAutoFit/>
+          </a:bodyPr>
+          <a:lstStyle/>
+          <a:p>
+            <a:pPr algn="l">
+              <a:lnSpc>
+                <a:spcPts val="1439"/>
+              </a:lnSpc>
+              <a:spcAft>
+                <a:spcPts val="359"/>
+              </a:spcAft>
+              <a:defRPr sz="1200" b="0">
+                <a:solidFill>
+                  <a:srgbClr val="CDD6F4"/>
+                </a:solidFill>
+                <a:latin typeface="Cascadia Code"/>
+              </a:defRPr>
+            </a:pPr>
+            <a:r>
+              <a:t>implementation-plan, agent-instructions,</a:t>
+            </a:r>
+            <a:br/>
+            <a:r>
+              <a:t>pipeline-spec, release-notes</a:t>
+            </a:r>
+          </a:p>
+        </p:txBody>
+      </p:sp>
+      <p:sp>
+        <p:nvSpPr>
+          <p:cNvPr id="20" name="TextBox 19"/>
+          <p:cNvSpPr txBox="1"/>
+          <p:nvPr/>
+        </p:nvSpPr>
+        <p:spPr>
+          <a:xfrm>
+            <a:off x="8381847" y="3657600"/>
+            <a:ext cx="2743200" cy="594360"/>
+          </a:xfrm>
+          <a:prstGeom prst="rect">
+            <a:avLst/>
+          </a:prstGeom>
+          <a:noFill/>
+        </p:spPr>
+        <p:txBody>
+          <a:bodyPr wrap="square">
+            <a:spAutoFit/>
+          </a:bodyPr>
+          <a:lstStyle/>
+          <a:p>
+            <a:pPr algn="l">
+              <a:lnSpc>
+                <a:spcPts val="1439"/>
+              </a:lnSpc>
+              <a:spcAft>
+                <a:spcPts val="359"/>
+              </a:spcAft>
+              <a:defRPr sz="1200" b="0">
+                <a:solidFill>
+                  <a:srgbClr val="CDD6F4"/>
+                </a:solidFill>
+                <a:latin typeface="Cascadia Code"/>
+              </a:defRPr>
+            </a:pPr>
+            <a:r>
+              <a:t>multi-artifact, triage-report,</a:t>
+            </a:r>
+            <a:br/>
+            <a:r>
+              <a:t>promptkit-pull-request</a:t>
+            </a:r>
+          </a:p>
+        </p:txBody>
+      </p:sp>
+      <p:sp>
+        <p:nvSpPr>
+          <p:cNvPr id="21" name="Rounded Rectangle 20"/>
+          <p:cNvSpPr/>
+          <p:nvPr/>
+        </p:nvSpPr>
+        <p:spPr>
+          <a:xfrm>
+            <a:off x="914400" y="5760720"/>
+            <a:ext cx="10332720" cy="640080"/>
+          </a:xfrm>
+          <a:prstGeom prst="roundRect">
+            <a:avLst/>
+          </a:prstGeom>
+          <a:solidFill>
+            <a:srgbClr val="313244"/>
+          </a:solidFill>
+          <a:ln>
+            <a:noFill/>
+          </a:ln>
+          <a:effectLst/>
+        </p:spPr>
+        <p:style>
+          <a:lnRef idx="1">
+            <a:schemeClr val="accent1"/>
+          </a:lnRef>
+          <a:fillRef idx="3">
+            <a:schemeClr val="accent1"/>
+          </a:fillRef>
+          <a:effectRef idx="2">
+            <a:schemeClr val="accent1"/>
+          </a:effectRef>
+          <a:fontRef idx="minor">
+            <a:schemeClr val="lt1"/>
+          </a:fontRef>
+        </p:style>
+        <p:txBody>
+          <a:bodyPr rtlCol="0" anchor="ctr"/>
+          <a:lstStyle/>
+          <a:p>
+            <a:pPr algn="ctr"/>
+          </a:p>
+        </p:txBody>
+      </p:sp>
+      <p:sp>
+        <p:nvSpPr>
+          <p:cNvPr id="22" name="TextBox 21"/>
+          <p:cNvSpPr txBox="1"/>
+          <p:nvPr/>
+        </p:nvSpPr>
+        <p:spPr>
+          <a:xfrm>
+            <a:off x="1188720" y="5806440"/>
+            <a:ext cx="9784080" cy="548640"/>
+          </a:xfrm>
+          <a:prstGeom prst="rect">
+            <a:avLst/>
+          </a:prstGeom>
+          <a:noFill/>
+        </p:spPr>
+        <p:txBody>
+          <a:bodyPr wrap="square">
+            <a:spAutoFit/>
+          </a:bodyPr>
+          <a:lstStyle/>
+          <a:p>
+            <a:pPr algn="ctr">
+              <a:lnSpc>
+                <a:spcPts val="1560"/>
+              </a:lnSpc>
+              <a:spcAft>
+                <a:spcPts val="390"/>
+              </a:spcAft>
+              <a:defRPr sz="1300" b="0">
+                <a:solidFill>
+                  <a:srgbClr val="CDD6F4"/>
+                </a:solidFill>
+                <a:latin typeface="Segoe UI"/>
+              </a:defRPr>
+            </a:pPr>
+            <a:r>
+              <a:t>64 Task Templates:  investigate-bug · review-code · author-requirements-doc · author-design-doc · audit-traceability · audit-code-compliance · plan-implementation · author-pipeline · triage-issues · extend-library  … and more</a:t>
             </a:r>
           </a:p>
         </p:txBody>
@@ -8878,108 +9907,21 @@
               </a:defRPr>
             </a:pPr>
             <a:r>
-              <a:t>How Assembly Works</a:t>
-            </a:r>
-          </a:p>
-        </p:txBody>
-      </p:sp>
-      <p:sp>
-        <p:nvSpPr>
-          <p:cNvPr id="4" name="Rounded Rectangle 3"/>
-          <p:cNvSpPr/>
-          <p:nvPr/>
-        </p:nvSpPr>
-        <p:spPr>
-          <a:xfrm>
-            <a:off x="700887" y="1645920"/>
-            <a:ext cx="2286000" cy="2926080"/>
-          </a:xfrm>
-          <a:prstGeom prst="roundRect">
-            <a:avLst/>
-          </a:prstGeom>
-          <a:solidFill>
-            <a:srgbClr val="313244"/>
-          </a:solidFill>
-          <a:ln>
-            <a:noFill/>
-          </a:ln>
-          <a:effectLst/>
-        </p:spPr>
-        <p:style>
-          <a:lnRef idx="1">
-            <a:schemeClr val="accent1"/>
-          </a:lnRef>
-          <a:fillRef idx="3">
-            <a:schemeClr val="accent1"/>
-          </a:fillRef>
-          <a:effectRef idx="2">
-            <a:schemeClr val="accent1"/>
-          </a:effectRef>
-          <a:fontRef idx="minor">
-            <a:schemeClr val="lt1"/>
-          </a:fontRef>
-        </p:style>
-        <p:txBody>
-          <a:bodyPr rtlCol="0" anchor="ctr"/>
-          <a:lstStyle/>
-          <a:p>
-            <a:pPr algn="ctr"/>
-          </a:p>
-        </p:txBody>
-      </p:sp>
-      <p:sp>
-        <p:nvSpPr>
-          <p:cNvPr id="5" name="Rectangle 4"/>
-          <p:cNvSpPr/>
-          <p:nvPr/>
-        </p:nvSpPr>
-        <p:spPr>
-          <a:xfrm>
-            <a:off x="700887" y="1645920"/>
-            <a:ext cx="2286000" cy="54864"/>
-          </a:xfrm>
-          <a:prstGeom prst="rect">
-            <a:avLst/>
-          </a:prstGeom>
-          <a:solidFill>
-            <a:srgbClr val="89B4FA"/>
-          </a:solidFill>
-          <a:ln>
-            <a:noFill/>
-          </a:ln>
-        </p:spPr>
-        <p:style>
-          <a:lnRef idx="1">
-            <a:schemeClr val="accent1"/>
-          </a:lnRef>
-          <a:fillRef idx="3">
-            <a:schemeClr val="accent1"/>
-          </a:fillRef>
-          <a:effectRef idx="2">
-            <a:schemeClr val="accent1"/>
-          </a:effectRef>
-          <a:fontRef idx="minor">
-            <a:schemeClr val="lt1"/>
-          </a:fontRef>
-        </p:style>
-        <p:txBody>
-          <a:bodyPr rtlCol="0" anchor="ctr"/>
-          <a:lstStyle/>
-          <a:p>
-            <a:pPr algn="ctr"/>
-          </a:p>
-        </p:txBody>
-      </p:sp>
-      <p:sp>
-        <p:nvSpPr>
-          <p:cNvPr id="6" name="TextBox 5"/>
+              <a:t>Quick Start  —  3 Commands</a:t>
+            </a:r>
+          </a:p>
+        </p:txBody>
+      </p:sp>
+      <p:sp>
+        <p:nvSpPr>
+          <p:cNvPr id="4" name="TextBox 3"/>
           <p:cNvSpPr txBox="1"/>
           <p:nvPr/>
         </p:nvSpPr>
         <p:spPr>
           <a:xfrm>
-            <a:off x="838047" y="1828800"/>
-            <a:ext cx="2011680" cy="320040"/>
+            <a:off x="822960" y="1463040"/>
+            <a:ext cx="2743200" cy="320040"/>
           </a:xfrm>
           <a:prstGeom prst="rect">
             <a:avLst/>
@@ -8992,7 +9934,7 @@
           </a:bodyPr>
           <a:lstStyle/>
           <a:p>
-            <a:pPr algn="ctr">
+            <a:pPr algn="l">
               <a:lnSpc>
                 <a:spcPts val="2160"/>
               </a:lnSpc>
@@ -9007,119 +9949,27 @@
               </a:defRPr>
             </a:pPr>
             <a:r>
-              <a:t>Persona</a:t>
-            </a:r>
-          </a:p>
-        </p:txBody>
-      </p:sp>
-      <p:sp>
-        <p:nvSpPr>
-          <p:cNvPr id="7" name="TextBox 6"/>
-          <p:cNvSpPr txBox="1"/>
-          <p:nvPr/>
-        </p:nvSpPr>
-        <p:spPr>
-          <a:xfrm>
-            <a:off x="838047" y="2286000"/>
-            <a:ext cx="2011680" cy="2011680"/>
-          </a:xfrm>
-          <a:prstGeom prst="rect">
-            <a:avLst/>
-          </a:prstGeom>
-          <a:noFill/>
-        </p:spPr>
-        <p:txBody>
-          <a:bodyPr wrap="square">
-            <a:spAutoFit/>
-          </a:bodyPr>
-          <a:lstStyle/>
-          <a:p>
-            <a:pPr algn="l">
-              <a:lnSpc>
-                <a:spcPts val="1800"/>
-              </a:lnSpc>
-              <a:spcAft>
-                <a:spcPts val="359"/>
-              </a:spcAft>
-              <a:defRPr sz="1200" b="0">
-                <a:solidFill>
-                  <a:srgbClr val="6C7086"/>
-                </a:solidFill>
-                <a:latin typeface="Cascadia Code"/>
-              </a:defRPr>
-            </a:pPr>
-            <a:r>
-              <a:t># Identity</a:t>
-            </a:r>
-            <a:br/>
-            <a:r>
-              <a:t>You are a senior</a:t>
-            </a:r>
-            <a:br/>
-            <a:r>
-              <a:t>systems engineer …</a:t>
-            </a:r>
-          </a:p>
-        </p:txBody>
-      </p:sp>
-      <p:sp>
-        <p:nvSpPr>
-          <p:cNvPr id="8" name="TextBox 7"/>
-          <p:cNvSpPr txBox="1"/>
-          <p:nvPr/>
-        </p:nvSpPr>
-        <p:spPr>
-          <a:xfrm>
-            <a:off x="3078327" y="2743200"/>
-            <a:ext cx="548640" cy="457200"/>
-          </a:xfrm>
-          <a:prstGeom prst="rect">
-            <a:avLst/>
-          </a:prstGeom>
-          <a:noFill/>
-        </p:spPr>
-        <p:txBody>
-          <a:bodyPr wrap="square">
-            <a:spAutoFit/>
-          </a:bodyPr>
-          <a:lstStyle/>
-          <a:p>
-            <a:pPr algn="ctr">
-              <a:lnSpc>
-                <a:spcPts val="3360"/>
-              </a:lnSpc>
-              <a:spcAft>
-                <a:spcPts val="840"/>
-              </a:spcAft>
-              <a:defRPr sz="2800" b="0">
-                <a:solidFill>
-                  <a:srgbClr val="6C7086"/>
-                </a:solidFill>
-                <a:latin typeface="Segoe UI"/>
-              </a:defRPr>
-            </a:pPr>
-            <a:r>
-              <a:t>→</a:t>
-            </a:r>
-          </a:p>
-        </p:txBody>
-      </p:sp>
-      <p:sp>
-        <p:nvSpPr>
-          <p:cNvPr id="9" name="Rounded Rectangle 8"/>
+              <a:t>Interactive mode</a:t>
+            </a:r>
+          </a:p>
+        </p:txBody>
+      </p:sp>
+      <p:sp>
+        <p:nvSpPr>
+          <p:cNvPr id="5" name="Rounded Rectangle 4"/>
           <p:cNvSpPr/>
           <p:nvPr/>
         </p:nvSpPr>
         <p:spPr>
           <a:xfrm>
-            <a:off x="3535527" y="1645920"/>
-            <a:ext cx="2286000" cy="2926080"/>
+            <a:off x="822960" y="1828800"/>
+            <a:ext cx="6858000" cy="822960"/>
           </a:xfrm>
           <a:prstGeom prst="roundRect">
             <a:avLst/>
           </a:prstGeom>
           <a:solidFill>
-            <a:srgbClr val="313244"/>
+            <a:srgbClr val="181825"/>
           </a:solidFill>
           <a:ln>
             <a:noFill/>
@@ -9150,57 +10000,14 @@
       </p:sp>
       <p:sp>
         <p:nvSpPr>
-          <p:cNvPr id="10" name="Rectangle 9"/>
-          <p:cNvSpPr/>
-          <p:nvPr/>
-        </p:nvSpPr>
-        <p:spPr>
-          <a:xfrm>
-            <a:off x="3535527" y="1645920"/>
-            <a:ext cx="2286000" cy="54864"/>
-          </a:xfrm>
-          <a:prstGeom prst="rect">
-            <a:avLst/>
-          </a:prstGeom>
-          <a:solidFill>
-            <a:srgbClr val="A6E3A1"/>
-          </a:solidFill>
-          <a:ln>
-            <a:noFill/>
-          </a:ln>
-        </p:spPr>
-        <p:style>
-          <a:lnRef idx="1">
-            <a:schemeClr val="accent1"/>
-          </a:lnRef>
-          <a:fillRef idx="3">
-            <a:schemeClr val="accent1"/>
-          </a:fillRef>
-          <a:effectRef idx="2">
-            <a:schemeClr val="accent1"/>
-          </a:effectRef>
-          <a:fontRef idx="minor">
-            <a:schemeClr val="lt1"/>
-          </a:fontRef>
-        </p:style>
-        <p:txBody>
-          <a:bodyPr rtlCol="0" anchor="ctr"/>
-          <a:lstStyle/>
-          <a:p>
-            <a:pPr algn="ctr"/>
-          </a:p>
-        </p:txBody>
-      </p:sp>
-      <p:sp>
-        <p:nvSpPr>
-          <p:cNvPr id="11" name="TextBox 10"/>
+          <p:cNvPr id="6" name="TextBox 5"/>
           <p:cNvSpPr txBox="1"/>
           <p:nvPr/>
         </p:nvSpPr>
         <p:spPr>
           <a:xfrm>
-            <a:off x="3672687" y="1828800"/>
-            <a:ext cx="2011680" cy="320040"/>
+            <a:off x="1005840" y="1874520"/>
+            <a:ext cx="6492240" cy="731520"/>
           </a:xfrm>
           <a:prstGeom prst="rect">
             <a:avLst/>
@@ -9213,7 +10020,95 @@
           </a:bodyPr>
           <a:lstStyle/>
           <a:p>
-            <a:pPr algn="ctr">
+            <a:pPr algn="l">
+              <a:lnSpc>
+                <a:spcPts val="1959"/>
+              </a:lnSpc>
+              <a:spcAft>
+                <a:spcPts val="420"/>
+              </a:spcAft>
+              <a:defRPr sz="1400" b="0">
+                <a:solidFill>
+                  <a:srgbClr val="A6E3A1"/>
+                </a:solidFill>
+                <a:latin typeface="Cascadia Code"/>
+              </a:defRPr>
+            </a:pPr>
+            <a:r>
+              <a:t>npx @alan-jowett/promptkit</a:t>
+            </a:r>
+          </a:p>
+        </p:txBody>
+      </p:sp>
+      <p:sp>
+        <p:nvSpPr>
+          <p:cNvPr id="7" name="TextBox 6"/>
+          <p:cNvSpPr txBox="1"/>
+          <p:nvPr/>
+        </p:nvSpPr>
+        <p:spPr>
+          <a:xfrm>
+            <a:off x="8046720" y="1783080"/>
+            <a:ext cx="3657600" cy="914400"/>
+          </a:xfrm>
+          <a:prstGeom prst="rect">
+            <a:avLst/>
+          </a:prstGeom>
+          <a:noFill/>
+        </p:spPr>
+        <p:txBody>
+          <a:bodyPr wrap="square">
+            <a:spAutoFit/>
+          </a:bodyPr>
+          <a:lstStyle/>
+          <a:p>
+            <a:pPr algn="l">
+              <a:lnSpc>
+                <a:spcPts val="1560"/>
+              </a:lnSpc>
+              <a:spcAft>
+                <a:spcPts val="390"/>
+              </a:spcAft>
+              <a:defRPr sz="1300" b="0">
+                <a:solidFill>
+                  <a:srgbClr val="6C7086"/>
+                </a:solidFill>
+                <a:latin typeface="Segoe UI"/>
+              </a:defRPr>
+            </a:pPr>
+            <a:r>
+              <a:t>Detects your LLM CLI (Copilot / Claude) and</a:t>
+            </a:r>
+            <a:br/>
+            <a:r>
+              <a:t>launches an interactive prompt-building session</a:t>
+            </a:r>
+          </a:p>
+        </p:txBody>
+      </p:sp>
+      <p:sp>
+        <p:nvSpPr>
+          <p:cNvPr id="8" name="TextBox 7"/>
+          <p:cNvSpPr txBox="1"/>
+          <p:nvPr/>
+        </p:nvSpPr>
+        <p:spPr>
+          <a:xfrm>
+            <a:off x="822960" y="3108960"/>
+            <a:ext cx="2743200" cy="320040"/>
+          </a:xfrm>
+          <a:prstGeom prst="rect">
+            <a:avLst/>
+          </a:prstGeom>
+          <a:noFill/>
+        </p:spPr>
+        <p:txBody>
+          <a:bodyPr wrap="square">
+            <a:spAutoFit/>
+          </a:bodyPr>
+          <a:lstStyle/>
+          <a:p>
+            <a:pPr algn="l">
               <a:lnSpc>
                 <a:spcPts val="2160"/>
               </a:lnSpc>
@@ -9228,119 +10123,27 @@
               </a:defRPr>
             </a:pPr>
             <a:r>
-              <a:t>Protocols</a:t>
-            </a:r>
-          </a:p>
-        </p:txBody>
-      </p:sp>
-      <p:sp>
-        <p:nvSpPr>
-          <p:cNvPr id="12" name="TextBox 11"/>
-          <p:cNvSpPr txBox="1"/>
-          <p:nvPr/>
-        </p:nvSpPr>
-        <p:spPr>
-          <a:xfrm>
-            <a:off x="3672687" y="2286000"/>
-            <a:ext cx="2011680" cy="2011680"/>
-          </a:xfrm>
-          <a:prstGeom prst="rect">
-            <a:avLst/>
-          </a:prstGeom>
-          <a:noFill/>
-        </p:spPr>
-        <p:txBody>
-          <a:bodyPr wrap="square">
-            <a:spAutoFit/>
-          </a:bodyPr>
-          <a:lstStyle/>
-          <a:p>
-            <a:pPr algn="l">
-              <a:lnSpc>
-                <a:spcPts val="1800"/>
-              </a:lnSpc>
-              <a:spcAft>
-                <a:spcPts val="359"/>
-              </a:spcAft>
-              <a:defRPr sz="1200" b="0">
-                <a:solidFill>
-                  <a:srgbClr val="6C7086"/>
-                </a:solidFill>
-                <a:latin typeface="Cascadia Code"/>
-              </a:defRPr>
-            </a:pPr>
-            <a:r>
-              <a:t># Reasoning</a:t>
-            </a:r>
-            <a:br/>
-            <a:r>
-              <a:t>## Anti-Hallucination</a:t>
-            </a:r>
-            <a:br/>
-            <a:r>
-              <a:t>## Root-Cause …</a:t>
-            </a:r>
-          </a:p>
-        </p:txBody>
-      </p:sp>
-      <p:sp>
-        <p:nvSpPr>
-          <p:cNvPr id="13" name="TextBox 12"/>
-          <p:cNvSpPr txBox="1"/>
-          <p:nvPr/>
-        </p:nvSpPr>
-        <p:spPr>
-          <a:xfrm>
-            <a:off x="5912967" y="2743200"/>
-            <a:ext cx="548640" cy="457200"/>
-          </a:xfrm>
-          <a:prstGeom prst="rect">
-            <a:avLst/>
-          </a:prstGeom>
-          <a:noFill/>
-        </p:spPr>
-        <p:txBody>
-          <a:bodyPr wrap="square">
-            <a:spAutoFit/>
-          </a:bodyPr>
-          <a:lstStyle/>
-          <a:p>
-            <a:pPr algn="ctr">
-              <a:lnSpc>
-                <a:spcPts val="3360"/>
-              </a:lnSpc>
-              <a:spcAft>
-                <a:spcPts val="840"/>
-              </a:spcAft>
-              <a:defRPr sz="2800" b="0">
-                <a:solidFill>
-                  <a:srgbClr val="6C7086"/>
-                </a:solidFill>
-                <a:latin typeface="Segoe UI"/>
-              </a:defRPr>
-            </a:pPr>
-            <a:r>
-              <a:t>→</a:t>
-            </a:r>
-          </a:p>
-        </p:txBody>
-      </p:sp>
-      <p:sp>
-        <p:nvSpPr>
-          <p:cNvPr id="14" name="Rounded Rectangle 13"/>
+              <a:t>Browse templates</a:t>
+            </a:r>
+          </a:p>
+        </p:txBody>
+      </p:sp>
+      <p:sp>
+        <p:nvSpPr>
+          <p:cNvPr id="9" name="Rounded Rectangle 8"/>
           <p:cNvSpPr/>
           <p:nvPr/>
         </p:nvSpPr>
         <p:spPr>
           <a:xfrm>
-            <a:off x="6370167" y="1645920"/>
-            <a:ext cx="2286000" cy="2926080"/>
+            <a:off x="822960" y="3474720"/>
+            <a:ext cx="6858000" cy="822960"/>
           </a:xfrm>
           <a:prstGeom prst="roundRect">
             <a:avLst/>
           </a:prstGeom>
           <a:solidFill>
-            <a:srgbClr val="313244"/>
+            <a:srgbClr val="181825"/>
           </a:solidFill>
           <a:ln>
             <a:noFill/>
@@ -9371,57 +10174,14 @@
       </p:sp>
       <p:sp>
         <p:nvSpPr>
-          <p:cNvPr id="15" name="Rectangle 14"/>
-          <p:cNvSpPr/>
-          <p:nvPr/>
-        </p:nvSpPr>
-        <p:spPr>
-          <a:xfrm>
-            <a:off x="6370167" y="1645920"/>
-            <a:ext cx="2286000" cy="54864"/>
-          </a:xfrm>
-          <a:prstGeom prst="rect">
-            <a:avLst/>
-          </a:prstGeom>
-          <a:solidFill>
-            <a:srgbClr val="F9E2AF"/>
-          </a:solidFill>
-          <a:ln>
-            <a:noFill/>
-          </a:ln>
-        </p:spPr>
-        <p:style>
-          <a:lnRef idx="1">
-            <a:schemeClr val="accent1"/>
-          </a:lnRef>
-          <a:fillRef idx="3">
-            <a:schemeClr val="accent1"/>
-          </a:fillRef>
-          <a:effectRef idx="2">
-            <a:schemeClr val="accent1"/>
-          </a:effectRef>
-          <a:fontRef idx="minor">
-            <a:schemeClr val="lt1"/>
-          </a:fontRef>
-        </p:style>
-        <p:txBody>
-          <a:bodyPr rtlCol="0" anchor="ctr"/>
-          <a:lstStyle/>
-          <a:p>
-            <a:pPr algn="ctr"/>
-          </a:p>
-        </p:txBody>
-      </p:sp>
-      <p:sp>
-        <p:nvSpPr>
-          <p:cNvPr id="16" name="TextBox 15"/>
+          <p:cNvPr id="10" name="TextBox 9"/>
           <p:cNvSpPr txBox="1"/>
           <p:nvPr/>
         </p:nvSpPr>
         <p:spPr>
           <a:xfrm>
-            <a:off x="6507327" y="1828800"/>
-            <a:ext cx="2011680" cy="320040"/>
+            <a:off x="1005840" y="3520440"/>
+            <a:ext cx="6492240" cy="731520"/>
           </a:xfrm>
           <a:prstGeom prst="rect">
             <a:avLst/>
@@ -9434,7 +10194,95 @@
           </a:bodyPr>
           <a:lstStyle/>
           <a:p>
-            <a:pPr algn="ctr">
+            <a:pPr algn="l">
+              <a:lnSpc>
+                <a:spcPts val="1959"/>
+              </a:lnSpc>
+              <a:spcAft>
+                <a:spcPts val="420"/>
+              </a:spcAft>
+              <a:defRPr sz="1400" b="0">
+                <a:solidFill>
+                  <a:srgbClr val="A6E3A1"/>
+                </a:solidFill>
+                <a:latin typeface="Cascadia Code"/>
+              </a:defRPr>
+            </a:pPr>
+            <a:r>
+              <a:t>npx @alan-jowett/promptkit list</a:t>
+            </a:r>
+          </a:p>
+        </p:txBody>
+      </p:sp>
+      <p:sp>
+        <p:nvSpPr>
+          <p:cNvPr id="11" name="TextBox 10"/>
+          <p:cNvSpPr txBox="1"/>
+          <p:nvPr/>
+        </p:nvSpPr>
+        <p:spPr>
+          <a:xfrm>
+            <a:off x="8046720" y="3429000"/>
+            <a:ext cx="3657600" cy="914400"/>
+          </a:xfrm>
+          <a:prstGeom prst="rect">
+            <a:avLst/>
+          </a:prstGeom>
+          <a:noFill/>
+        </p:spPr>
+        <p:txBody>
+          <a:bodyPr wrap="square">
+            <a:spAutoFit/>
+          </a:bodyPr>
+          <a:lstStyle/>
+          <a:p>
+            <a:pPr algn="l">
+              <a:lnSpc>
+                <a:spcPts val="1560"/>
+              </a:lnSpc>
+              <a:spcAft>
+                <a:spcPts val="390"/>
+              </a:spcAft>
+              <a:defRPr sz="1300" b="0">
+                <a:solidFill>
+                  <a:srgbClr val="6C7086"/>
+                </a:solidFill>
+                <a:latin typeface="Segoe UI"/>
+              </a:defRPr>
+            </a:pPr>
+            <a:r>
+              <a:t>Lists all available templates with descriptions</a:t>
+            </a:r>
+            <a:br/>
+            <a:r>
+              <a:t>Add --json for machine-readable output</a:t>
+            </a:r>
+          </a:p>
+        </p:txBody>
+      </p:sp>
+      <p:sp>
+        <p:nvSpPr>
+          <p:cNvPr id="12" name="TextBox 11"/>
+          <p:cNvSpPr txBox="1"/>
+          <p:nvPr/>
+        </p:nvSpPr>
+        <p:spPr>
+          <a:xfrm>
+            <a:off x="822960" y="4754880"/>
+            <a:ext cx="2743200" cy="320040"/>
+          </a:xfrm>
+          <a:prstGeom prst="rect">
+            <a:avLst/>
+          </a:prstGeom>
+          <a:noFill/>
+        </p:spPr>
+        <p:txBody>
+          <a:bodyPr wrap="square">
+            <a:spAutoFit/>
+          </a:bodyPr>
+          <a:lstStyle/>
+          <a:p>
+            <a:pPr algn="l">
               <a:lnSpc>
                 <a:spcPts val="2160"/>
               </a:lnSpc>
@@ -9449,292 +10297,21 @@
               </a:defRPr>
             </a:pPr>
             <a:r>
-              <a:t>Format</a:t>
-            </a:r>
-          </a:p>
-        </p:txBody>
-      </p:sp>
-      <p:sp>
-        <p:nvSpPr>
-          <p:cNvPr id="17" name="TextBox 16"/>
-          <p:cNvSpPr txBox="1"/>
-          <p:nvPr/>
-        </p:nvSpPr>
-        <p:spPr>
-          <a:xfrm>
-            <a:off x="6507327" y="2286000"/>
-            <a:ext cx="2011680" cy="2011680"/>
-          </a:xfrm>
-          <a:prstGeom prst="rect">
-            <a:avLst/>
-          </a:prstGeom>
-          <a:noFill/>
-        </p:spPr>
-        <p:txBody>
-          <a:bodyPr wrap="square">
-            <a:spAutoFit/>
-          </a:bodyPr>
-          <a:lstStyle/>
-          <a:p>
-            <a:pPr algn="l">
-              <a:lnSpc>
-                <a:spcPts val="1800"/>
-              </a:lnSpc>
-              <a:spcAft>
-                <a:spcPts val="359"/>
-              </a:spcAft>
-              <a:defRPr sz="1200" b="0">
-                <a:solidFill>
-                  <a:srgbClr val="6C7086"/>
-                </a:solidFill>
-                <a:latin typeface="Cascadia Code"/>
-              </a:defRPr>
-            </a:pPr>
-            <a:r>
-              <a:t># Output Format</a:t>
-            </a:r>
-            <a:br/>
-            <a:r>
-              <a:t>Investigation Report</a:t>
-            </a:r>
-            <a:br/>
-            <a:r>
-              <a:t>with sections …</a:t>
-            </a:r>
-          </a:p>
-        </p:txBody>
-      </p:sp>
-      <p:sp>
-        <p:nvSpPr>
-          <p:cNvPr id="18" name="TextBox 17"/>
-          <p:cNvSpPr txBox="1"/>
-          <p:nvPr/>
-        </p:nvSpPr>
-        <p:spPr>
-          <a:xfrm>
-            <a:off x="8747607" y="2743200"/>
-            <a:ext cx="548640" cy="457200"/>
-          </a:xfrm>
-          <a:prstGeom prst="rect">
-            <a:avLst/>
-          </a:prstGeom>
-          <a:noFill/>
-        </p:spPr>
-        <p:txBody>
-          <a:bodyPr wrap="square">
-            <a:spAutoFit/>
-          </a:bodyPr>
-          <a:lstStyle/>
-          <a:p>
-            <a:pPr algn="ctr">
-              <a:lnSpc>
-                <a:spcPts val="3360"/>
-              </a:lnSpc>
-              <a:spcAft>
-                <a:spcPts val="840"/>
-              </a:spcAft>
-              <a:defRPr sz="2800" b="0">
-                <a:solidFill>
-                  <a:srgbClr val="6C7086"/>
-                </a:solidFill>
-                <a:latin typeface="Segoe UI"/>
-              </a:defRPr>
-            </a:pPr>
-            <a:r>
-              <a:t>→</a:t>
-            </a:r>
-          </a:p>
-        </p:txBody>
-      </p:sp>
-      <p:sp>
-        <p:nvSpPr>
-          <p:cNvPr id="19" name="Rounded Rectangle 18"/>
+              <a:t>Assemble a prompt</a:t>
+            </a:r>
+          </a:p>
+        </p:txBody>
+      </p:sp>
+      <p:sp>
+        <p:nvSpPr>
+          <p:cNvPr id="13" name="Rounded Rectangle 12"/>
           <p:cNvSpPr/>
           <p:nvPr/>
         </p:nvSpPr>
         <p:spPr>
           <a:xfrm>
-            <a:off x="9204807" y="1645920"/>
-            <a:ext cx="2286000" cy="2926080"/>
-          </a:xfrm>
-          <a:prstGeom prst="roundRect">
-            <a:avLst/>
-          </a:prstGeom>
-          <a:solidFill>
-            <a:srgbClr val="313244"/>
-          </a:solidFill>
-          <a:ln>
-            <a:noFill/>
-          </a:ln>
-          <a:effectLst/>
-        </p:spPr>
-        <p:style>
-          <a:lnRef idx="1">
-            <a:schemeClr val="accent1"/>
-          </a:lnRef>
-          <a:fillRef idx="3">
-            <a:schemeClr val="accent1"/>
-          </a:fillRef>
-          <a:effectRef idx="2">
-            <a:schemeClr val="accent1"/>
-          </a:effectRef>
-          <a:fontRef idx="minor">
-            <a:schemeClr val="lt1"/>
-          </a:fontRef>
-        </p:style>
-        <p:txBody>
-          <a:bodyPr rtlCol="0" anchor="ctr"/>
-          <a:lstStyle/>
-          <a:p>
-            <a:pPr algn="ctr"/>
-          </a:p>
-        </p:txBody>
-      </p:sp>
-      <p:sp>
-        <p:nvSpPr>
-          <p:cNvPr id="20" name="Rectangle 19"/>
-          <p:cNvSpPr/>
-          <p:nvPr/>
-        </p:nvSpPr>
-        <p:spPr>
-          <a:xfrm>
-            <a:off x="9204807" y="1645920"/>
-            <a:ext cx="2286000" cy="54864"/>
-          </a:xfrm>
-          <a:prstGeom prst="rect">
-            <a:avLst/>
-          </a:prstGeom>
-          <a:solidFill>
-            <a:srgbClr val="FAB387"/>
-          </a:solidFill>
-          <a:ln>
-            <a:noFill/>
-          </a:ln>
-        </p:spPr>
-        <p:style>
-          <a:lnRef idx="1">
-            <a:schemeClr val="accent1"/>
-          </a:lnRef>
-          <a:fillRef idx="3">
-            <a:schemeClr val="accent1"/>
-          </a:fillRef>
-          <a:effectRef idx="2">
-            <a:schemeClr val="accent1"/>
-          </a:effectRef>
-          <a:fontRef idx="minor">
-            <a:schemeClr val="lt1"/>
-          </a:fontRef>
-        </p:style>
-        <p:txBody>
-          <a:bodyPr rtlCol="0" anchor="ctr"/>
-          <a:lstStyle/>
-          <a:p>
-            <a:pPr algn="ctr"/>
-          </a:p>
-        </p:txBody>
-      </p:sp>
-      <p:sp>
-        <p:nvSpPr>
-          <p:cNvPr id="21" name="TextBox 20"/>
-          <p:cNvSpPr txBox="1"/>
-          <p:nvPr/>
-        </p:nvSpPr>
-        <p:spPr>
-          <a:xfrm>
-            <a:off x="9341967" y="1828800"/>
-            <a:ext cx="2011680" cy="320040"/>
-          </a:xfrm>
-          <a:prstGeom prst="rect">
-            <a:avLst/>
-          </a:prstGeom>
-          <a:noFill/>
-        </p:spPr>
-        <p:txBody>
-          <a:bodyPr wrap="square">
-            <a:spAutoFit/>
-          </a:bodyPr>
-          <a:lstStyle/>
-          <a:p>
-            <a:pPr algn="ctr">
-              <a:lnSpc>
-                <a:spcPts val="2160"/>
-              </a:lnSpc>
-              <a:spcAft>
-                <a:spcPts val="540"/>
-              </a:spcAft>
-              <a:defRPr sz="1800" b="1">
-                <a:solidFill>
-                  <a:srgbClr val="FAB387"/>
-                </a:solidFill>
-                <a:latin typeface="Segoe UI"/>
-              </a:defRPr>
-            </a:pPr>
-            <a:r>
-              <a:t>Template</a:t>
-            </a:r>
-          </a:p>
-        </p:txBody>
-      </p:sp>
-      <p:sp>
-        <p:nvSpPr>
-          <p:cNvPr id="22" name="TextBox 21"/>
-          <p:cNvSpPr txBox="1"/>
-          <p:nvPr/>
-        </p:nvSpPr>
-        <p:spPr>
-          <a:xfrm>
-            <a:off x="9341967" y="2286000"/>
-            <a:ext cx="2011680" cy="2011680"/>
-          </a:xfrm>
-          <a:prstGeom prst="rect">
-            <a:avLst/>
-          </a:prstGeom>
-          <a:noFill/>
-        </p:spPr>
-        <p:txBody>
-          <a:bodyPr wrap="square">
-            <a:spAutoFit/>
-          </a:bodyPr>
-          <a:lstStyle/>
-          <a:p>
-            <a:pPr algn="l">
-              <a:lnSpc>
-                <a:spcPts val="1800"/>
-              </a:lnSpc>
-              <a:spcAft>
-                <a:spcPts val="359"/>
-              </a:spcAft>
-              <a:defRPr sz="1200" b="0">
-                <a:solidFill>
-                  <a:srgbClr val="6C7086"/>
-                </a:solidFill>
-                <a:latin typeface="Cascadia Code"/>
-              </a:defRPr>
-            </a:pPr>
-            <a:r>
-              <a:t># Task</a:t>
-            </a:r>
-            <a:br/>
-            <a:r>
-              <a:t>Investigate the bug:</a:t>
-            </a:r>
-            <a:br/>
-            <a:r>
-              <a:t>{{problem_description}}</a:t>
-            </a:r>
-          </a:p>
-        </p:txBody>
-      </p:sp>
-      <p:sp>
-        <p:nvSpPr>
-          <p:cNvPr id="23" name="Rounded Rectangle 22"/>
-          <p:cNvSpPr/>
-          <p:nvPr/>
-        </p:nvSpPr>
-        <p:spPr>
-          <a:xfrm>
-            <a:off x="1828800" y="4937760"/>
-            <a:ext cx="8503920" cy="1097280"/>
+            <a:off x="822960" y="5120640"/>
+            <a:ext cx="6858000" cy="822960"/>
           </a:xfrm>
           <a:prstGeom prst="roundRect">
             <a:avLst/>
@@ -9771,14 +10348,14 @@
       </p:sp>
       <p:sp>
         <p:nvSpPr>
-          <p:cNvPr id="24" name="TextBox 23"/>
+          <p:cNvPr id="14" name="TextBox 13"/>
           <p:cNvSpPr txBox="1"/>
           <p:nvPr/>
         </p:nvSpPr>
         <p:spPr>
           <a:xfrm>
-            <a:off x="2103120" y="5029200"/>
-            <a:ext cx="7955279" cy="914400"/>
+            <a:off x="1005840" y="5166360"/>
+            <a:ext cx="6492240" cy="731520"/>
           </a:xfrm>
           <a:prstGeom prst="rect">
             <a:avLst/>
@@ -9791,26 +10368,118 @@
           </a:bodyPr>
           <a:lstStyle/>
           <a:p>
-            <a:pPr algn="ctr">
+            <a:pPr algn="l">
               <a:lnSpc>
-                <a:spcPts val="2100"/>
+                <a:spcPts val="1959"/>
               </a:lnSpc>
               <a:spcAft>
                 <a:spcPts val="420"/>
               </a:spcAft>
               <a:defRPr sz="1400" b="0">
                 <a:solidFill>
-                  <a:srgbClr val="89B4FA"/>
+                  <a:srgbClr val="A6E3A1"/>
+                </a:solidFill>
+                <a:latin typeface="Cascadia Code"/>
+              </a:defRPr>
+            </a:pPr>
+            <a:r>
+              <a:t>npx @alan-jowett/promptkit assemble investigate-bug \</a:t>
+            </a:r>
+            <a:br/>
+            <a:r>
+              <a:t>  -p problem_description="Segfault on startup" \</a:t>
+            </a:r>
+            <a:br/>
+            <a:r>
+              <a:t>  -o investigation.md</a:t>
+            </a:r>
+          </a:p>
+        </p:txBody>
+      </p:sp>
+      <p:sp>
+        <p:nvSpPr>
+          <p:cNvPr id="15" name="TextBox 14"/>
+          <p:cNvSpPr txBox="1"/>
+          <p:nvPr/>
+        </p:nvSpPr>
+        <p:spPr>
+          <a:xfrm>
+            <a:off x="8046720" y="5074920"/>
+            <a:ext cx="3657600" cy="914400"/>
+          </a:xfrm>
+          <a:prstGeom prst="rect">
+            <a:avLst/>
+          </a:prstGeom>
+          <a:noFill/>
+        </p:spPr>
+        <p:txBody>
+          <a:bodyPr wrap="square">
+            <a:spAutoFit/>
+          </a:bodyPr>
+          <a:lstStyle/>
+          <a:p>
+            <a:pPr algn="l">
+              <a:lnSpc>
+                <a:spcPts val="1560"/>
+              </a:lnSpc>
+              <a:spcAft>
+                <a:spcPts val="390"/>
+              </a:spcAft>
+              <a:defRPr sz="1300" b="0">
+                <a:solidFill>
+                  <a:srgbClr val="6C7086"/>
                 </a:solidFill>
                 <a:latin typeface="Segoe UI"/>
               </a:defRPr>
             </a:pPr>
             <a:r>
-              <a:t>Output: Single composed prompt file  ─  ready to paste into any LLM</a:t>
+              <a:t>Composes persona + protocols + format + template</a:t>
             </a:r>
             <a:br/>
             <a:r>
-              <a:t>or use as agent instructions (.github/instructions/*.md, CLAUDE.md, .cursorrules)</a:t>
+              <a:t>into a single ready-to-use prompt file</a:t>
+            </a:r>
+          </a:p>
+        </p:txBody>
+      </p:sp>
+      <p:sp>
+        <p:nvSpPr>
+          <p:cNvPr id="16" name="TextBox 15"/>
+          <p:cNvSpPr txBox="1"/>
+          <p:nvPr/>
+        </p:nvSpPr>
+        <p:spPr>
+          <a:xfrm>
+            <a:off x="822960" y="6400800"/>
+            <a:ext cx="10058400" cy="274320"/>
+          </a:xfrm>
+          <a:prstGeom prst="rect">
+            <a:avLst/>
+          </a:prstGeom>
+          <a:noFill/>
+        </p:spPr>
+        <p:txBody>
+          <a:bodyPr wrap="square">
+            <a:spAutoFit/>
+          </a:bodyPr>
+          <a:lstStyle/>
+          <a:p>
+            <a:pPr algn="l">
+              <a:lnSpc>
+                <a:spcPts val="1439"/>
+              </a:lnSpc>
+              <a:spcAft>
+                <a:spcPts val="359"/>
+              </a:spcAft>
+              <a:defRPr sz="1200" b="0">
+                <a:solidFill>
+                  <a:srgbClr val="6C7086"/>
+                </a:solidFill>
+                <a:latin typeface="Segoe UI"/>
+              </a:defRPr>
+            </a:pPr>
+            <a:r>
+              <a:t>Prerequisites: Node.js 18+  ·  Optional: GitHub Copilot CLI or Claude Code for interactive mode</a:t>
             </a:r>
           </a:p>
         </p:txBody>
@@ -9921,7 +10590,7 @@
               </a:defRPr>
             </a:pPr>
             <a:r>
-              <a:t>Pipeline Chaining: Multi-Stage Workflows</a:t>
+              <a:t>How Assembly Works</a:t>
             </a:r>
           </a:p>
         </p:txBody>
@@ -9934,8 +10603,8 @@
         </p:nvSpPr>
         <p:spPr>
           <a:xfrm>
-            <a:off x="1523847" y="1828800"/>
-            <a:ext cx="2560320" cy="2286000"/>
+            <a:off x="700887" y="1645920"/>
+            <a:ext cx="2286000" cy="2926080"/>
           </a:xfrm>
           <a:prstGeom prst="roundRect">
             <a:avLst/>
@@ -9978,8 +10647,8 @@
         </p:nvSpPr>
         <p:spPr>
           <a:xfrm>
-            <a:off x="1523847" y="1828800"/>
-            <a:ext cx="2560320" cy="54864"/>
+            <a:off x="700887" y="1645920"/>
+            <a:ext cx="2286000" cy="54864"/>
           </a:xfrm>
           <a:prstGeom prst="rect">
             <a:avLst/>
@@ -10021,8 +10690,8 @@
         </p:nvSpPr>
         <p:spPr>
           <a:xfrm>
-            <a:off x="1615287" y="2057400"/>
-            <a:ext cx="2377440" cy="822960"/>
+            <a:off x="838047" y="1828800"/>
+            <a:ext cx="2011680" cy="320040"/>
           </a:xfrm>
           <a:prstGeom prst="rect">
             <a:avLst/>
@@ -10037,24 +10706,20 @@
           <a:p>
             <a:pPr algn="ctr">
               <a:lnSpc>
-                <a:spcPts val="1920"/>
+                <a:spcPts val="2160"/>
               </a:lnSpc>
               <a:spcAft>
-                <a:spcPts val="480"/>
+                <a:spcPts val="540"/>
               </a:spcAft>
-              <a:defRPr sz="1600" b="1">
-                <a:solidFill>
-                  <a:srgbClr val="CDD6F4"/>
-                </a:solidFill>
-                <a:latin typeface="Cascadia Code"/>
+              <a:defRPr sz="1800" b="1">
+                <a:solidFill>
+                  <a:srgbClr val="89B4FA"/>
+                </a:solidFill>
+                <a:latin typeface="Segoe UI"/>
               </a:defRPr>
             </a:pPr>
             <a:r>
-              <a:t>author-</a:t>
-            </a:r>
-            <a:br/>
-            <a:r>
-              <a:t>requirements-doc</a:t>
+              <a:t>Persona</a:t>
             </a:r>
           </a:p>
         </p:txBody>
@@ -10067,8 +10732,8 @@
         </p:nvSpPr>
         <p:spPr>
           <a:xfrm>
-            <a:off x="1615287" y="3063240"/>
-            <a:ext cx="2377440" cy="274320"/>
+            <a:off x="838047" y="2286000"/>
+            <a:ext cx="2011680" cy="2011680"/>
           </a:xfrm>
           <a:prstGeom prst="rect">
             <a:avLst/>
@@ -10081,9 +10746,9 @@
           </a:bodyPr>
           <a:lstStyle/>
           <a:p>
-            <a:pPr algn="ctr">
+            <a:pPr algn="l">
               <a:lnSpc>
-                <a:spcPts val="1439"/>
+                <a:spcPts val="1800"/>
               </a:lnSpc>
               <a:spcAft>
                 <a:spcPts val="359"/>
@@ -10092,11 +10757,19 @@
                 <a:solidFill>
                   <a:srgbClr val="6C7086"/>
                 </a:solidFill>
-                <a:latin typeface="Segoe UI"/>
+                <a:latin typeface="Cascadia Code"/>
               </a:defRPr>
             </a:pPr>
             <a:r>
-              <a:t>produces ↓</a:t>
+              <a:t># Identity</a:t>
+            </a:r>
+            <a:br/>
+            <a:r>
+              <a:t>You are a senior</a:t>
+            </a:r>
+            <a:br/>
+            <a:r>
+              <a:t>systems engineer …</a:t>
             </a:r>
           </a:p>
         </p:txBody>
@@ -10109,8 +10782,8 @@
         </p:nvSpPr>
         <p:spPr>
           <a:xfrm>
-            <a:off x="1615287" y="3383280"/>
-            <a:ext cx="2377440" cy="640080"/>
+            <a:off x="3078327" y="2743200"/>
+            <a:ext cx="548640" cy="457200"/>
           </a:xfrm>
           <a:prstGeom prst="rect">
             <a:avLst/>
@@ -10125,65 +10798,19 @@
           <a:p>
             <a:pPr algn="ctr">
               <a:lnSpc>
-                <a:spcPts val="1680"/>
+                <a:spcPts val="3360"/>
               </a:lnSpc>
               <a:spcAft>
-                <a:spcPts val="420"/>
+                <a:spcPts val="840"/>
               </a:spcAft>
-              <a:defRPr sz="1400" b="0">
-                <a:solidFill>
-                  <a:srgbClr val="89B4FA"/>
-                </a:solidFill>
-                <a:latin typeface="Cascadia Code"/>
+              <a:defRPr sz="2800" b="0">
+                <a:solidFill>
+                  <a:srgbClr val="6C7086"/>
+                </a:solidFill>
+                <a:latin typeface="Segoe UI"/>
               </a:defRPr>
             </a:pPr>
             <a:r>
-              <a:t>requirements-</a:t>
-            </a:r>
-            <a:br/>
-            <a:r>
-              <a:t>document</a:t>
-            </a:r>
-          </a:p>
-        </p:txBody>
-      </p:sp>
-      <p:sp>
-        <p:nvSpPr>
-          <p:cNvPr id="9" name="TextBox 8"/>
-          <p:cNvSpPr txBox="1"/>
-          <p:nvPr/>
-        </p:nvSpPr>
-        <p:spPr>
-          <a:xfrm>
-            <a:off x="4129887" y="2560320"/>
-            <a:ext cx="731520" cy="457200"/>
-          </a:xfrm>
-          <a:prstGeom prst="rect">
-            <a:avLst/>
-          </a:prstGeom>
-          <a:noFill/>
-        </p:spPr>
-        <p:txBody>
-          <a:bodyPr wrap="square">
-            <a:spAutoFit/>
-          </a:bodyPr>
-          <a:lstStyle/>
-          <a:p>
-            <a:pPr algn="ctr">
-              <a:lnSpc>
-                <a:spcPts val="4320"/>
-              </a:lnSpc>
-              <a:spcAft>
-                <a:spcPts val="1080"/>
-              </a:spcAft>
-              <a:defRPr sz="3600" b="0">
-                <a:solidFill>
-                  <a:srgbClr val="6C7086"/>
-                </a:solidFill>
-                <a:latin typeface="Segoe UI"/>
-              </a:defRPr>
-            </a:pPr>
-            <a:r>
               <a:t>→</a:t>
             </a:r>
           </a:p>
@@ -10191,14 +10818,14 @@
       </p:sp>
       <p:sp>
         <p:nvSpPr>
-          <p:cNvPr id="10" name="Rounded Rectangle 9"/>
+          <p:cNvPr id="9" name="Rounded Rectangle 8"/>
           <p:cNvSpPr/>
           <p:nvPr/>
         </p:nvSpPr>
         <p:spPr>
           <a:xfrm>
-            <a:off x="4815687" y="1828800"/>
-            <a:ext cx="2560320" cy="2286000"/>
+            <a:off x="3535527" y="1645920"/>
+            <a:ext cx="2286000" cy="2926080"/>
           </a:xfrm>
           <a:prstGeom prst="roundRect">
             <a:avLst/>
@@ -10235,14 +10862,14 @@
       </p:sp>
       <p:sp>
         <p:nvSpPr>
-          <p:cNvPr id="11" name="Rectangle 10"/>
+          <p:cNvPr id="10" name="Rectangle 9"/>
           <p:cNvSpPr/>
           <p:nvPr/>
         </p:nvSpPr>
         <p:spPr>
           <a:xfrm>
-            <a:off x="4815687" y="1828800"/>
-            <a:ext cx="2560320" cy="54864"/>
+            <a:off x="3535527" y="1645920"/>
+            <a:ext cx="2286000" cy="54864"/>
           </a:xfrm>
           <a:prstGeom prst="rect">
             <a:avLst/>
@@ -10278,14 +10905,14 @@
       </p:sp>
       <p:sp>
         <p:nvSpPr>
-          <p:cNvPr id="12" name="TextBox 11"/>
+          <p:cNvPr id="11" name="TextBox 10"/>
           <p:cNvSpPr txBox="1"/>
           <p:nvPr/>
         </p:nvSpPr>
         <p:spPr>
           <a:xfrm>
-            <a:off x="4907127" y="2057400"/>
-            <a:ext cx="2377440" cy="822960"/>
+            <a:off x="3672687" y="1828800"/>
+            <a:ext cx="2011680" cy="320040"/>
           </a:xfrm>
           <a:prstGeom prst="rect">
             <a:avLst/>
@@ -10300,38 +10927,34 @@
           <a:p>
             <a:pPr algn="ctr">
               <a:lnSpc>
-                <a:spcPts val="1920"/>
+                <a:spcPts val="2160"/>
               </a:lnSpc>
               <a:spcAft>
-                <a:spcPts val="480"/>
+                <a:spcPts val="540"/>
               </a:spcAft>
-              <a:defRPr sz="1600" b="1">
-                <a:solidFill>
-                  <a:srgbClr val="CDD6F4"/>
-                </a:solidFill>
-                <a:latin typeface="Cascadia Code"/>
+              <a:defRPr sz="1800" b="1">
+                <a:solidFill>
+                  <a:srgbClr val="A6E3A1"/>
+                </a:solidFill>
+                <a:latin typeface="Segoe UI"/>
               </a:defRPr>
             </a:pPr>
             <a:r>
-              <a:t>author-</a:t>
-            </a:r>
-            <a:br/>
-            <a:r>
-              <a:t>design-doc</a:t>
-            </a:r>
-          </a:p>
-        </p:txBody>
-      </p:sp>
-      <p:sp>
-        <p:nvSpPr>
-          <p:cNvPr id="13" name="TextBox 12"/>
+              <a:t>Protocols</a:t>
+            </a:r>
+          </a:p>
+        </p:txBody>
+      </p:sp>
+      <p:sp>
+        <p:nvSpPr>
+          <p:cNvPr id="12" name="TextBox 11"/>
           <p:cNvSpPr txBox="1"/>
           <p:nvPr/>
         </p:nvSpPr>
         <p:spPr>
           <a:xfrm>
-            <a:off x="4907127" y="3063240"/>
-            <a:ext cx="2377440" cy="274320"/>
+            <a:off x="3672687" y="2286000"/>
+            <a:ext cx="2011680" cy="2011680"/>
           </a:xfrm>
           <a:prstGeom prst="rect">
             <a:avLst/>
@@ -10344,9 +10967,9 @@
           </a:bodyPr>
           <a:lstStyle/>
           <a:p>
-            <a:pPr algn="ctr">
+            <a:pPr algn="l">
               <a:lnSpc>
-                <a:spcPts val="1439"/>
+                <a:spcPts val="1800"/>
               </a:lnSpc>
               <a:spcAft>
                 <a:spcPts val="359"/>
@@ -10355,25 +10978,33 @@
                 <a:solidFill>
                   <a:srgbClr val="6C7086"/>
                 </a:solidFill>
-                <a:latin typeface="Segoe UI"/>
+                <a:latin typeface="Cascadia Code"/>
               </a:defRPr>
             </a:pPr>
             <a:r>
-              <a:t>produces ↓</a:t>
-            </a:r>
-          </a:p>
-        </p:txBody>
-      </p:sp>
-      <p:sp>
-        <p:nvSpPr>
-          <p:cNvPr id="14" name="TextBox 13"/>
+              <a:t># Reasoning</a:t>
+            </a:r>
+            <a:br/>
+            <a:r>
+              <a:t>## Anti-Hallucination</a:t>
+            </a:r>
+            <a:br/>
+            <a:r>
+              <a:t>## Root-Cause …</a:t>
+            </a:r>
+          </a:p>
+        </p:txBody>
+      </p:sp>
+      <p:sp>
+        <p:nvSpPr>
+          <p:cNvPr id="13" name="TextBox 12"/>
           <p:cNvSpPr txBox="1"/>
           <p:nvPr/>
         </p:nvSpPr>
         <p:spPr>
           <a:xfrm>
-            <a:off x="4907127" y="3383280"/>
-            <a:ext cx="2377440" cy="640080"/>
+            <a:off x="5912967" y="2743200"/>
+            <a:ext cx="548640" cy="457200"/>
           </a:xfrm>
           <a:prstGeom prst="rect">
             <a:avLst/>
@@ -10388,65 +11019,19 @@
           <a:p>
             <a:pPr algn="ctr">
               <a:lnSpc>
-                <a:spcPts val="1680"/>
+                <a:spcPts val="3360"/>
               </a:lnSpc>
               <a:spcAft>
-                <a:spcPts val="420"/>
+                <a:spcPts val="840"/>
               </a:spcAft>
-              <a:defRPr sz="1400" b="0">
-                <a:solidFill>
-                  <a:srgbClr val="A6E3A1"/>
-                </a:solidFill>
-                <a:latin typeface="Cascadia Code"/>
+              <a:defRPr sz="2800" b="0">
+                <a:solidFill>
+                  <a:srgbClr val="6C7086"/>
+                </a:solidFill>
+                <a:latin typeface="Segoe UI"/>
               </a:defRPr>
             </a:pPr>
             <a:r>
-              <a:t>design-</a:t>
-            </a:r>
-            <a:br/>
-            <a:r>
-              <a:t>document</a:t>
-            </a:r>
-          </a:p>
-        </p:txBody>
-      </p:sp>
-      <p:sp>
-        <p:nvSpPr>
-          <p:cNvPr id="15" name="TextBox 14"/>
-          <p:cNvSpPr txBox="1"/>
-          <p:nvPr/>
-        </p:nvSpPr>
-        <p:spPr>
-          <a:xfrm>
-            <a:off x="7421727" y="2560320"/>
-            <a:ext cx="731520" cy="457200"/>
-          </a:xfrm>
-          <a:prstGeom prst="rect">
-            <a:avLst/>
-          </a:prstGeom>
-          <a:noFill/>
-        </p:spPr>
-        <p:txBody>
-          <a:bodyPr wrap="square">
-            <a:spAutoFit/>
-          </a:bodyPr>
-          <a:lstStyle/>
-          <a:p>
-            <a:pPr algn="ctr">
-              <a:lnSpc>
-                <a:spcPts val="4320"/>
-              </a:lnSpc>
-              <a:spcAft>
-                <a:spcPts val="1080"/>
-              </a:spcAft>
-              <a:defRPr sz="3600" b="0">
-                <a:solidFill>
-                  <a:srgbClr val="6C7086"/>
-                </a:solidFill>
-                <a:latin typeface="Segoe UI"/>
-              </a:defRPr>
-            </a:pPr>
-            <a:r>
               <a:t>→</a:t>
             </a:r>
           </a:p>
@@ -10454,14 +11039,14 @@
       </p:sp>
       <p:sp>
         <p:nvSpPr>
-          <p:cNvPr id="16" name="Rounded Rectangle 15"/>
+          <p:cNvPr id="14" name="Rounded Rectangle 13"/>
           <p:cNvSpPr/>
           <p:nvPr/>
         </p:nvSpPr>
         <p:spPr>
           <a:xfrm>
-            <a:off x="8107527" y="1828800"/>
-            <a:ext cx="2560320" cy="2286000"/>
+            <a:off x="6370167" y="1645920"/>
+            <a:ext cx="2286000" cy="2926080"/>
           </a:xfrm>
           <a:prstGeom prst="roundRect">
             <a:avLst/>
@@ -10498,14 +11083,14 @@
       </p:sp>
       <p:sp>
         <p:nvSpPr>
-          <p:cNvPr id="17" name="Rectangle 16"/>
+          <p:cNvPr id="15" name="Rectangle 14"/>
           <p:cNvSpPr/>
           <p:nvPr/>
         </p:nvSpPr>
         <p:spPr>
           <a:xfrm>
-            <a:off x="8107527" y="1828800"/>
-            <a:ext cx="2560320" cy="54864"/>
+            <a:off x="6370167" y="1645920"/>
+            <a:ext cx="2286000" cy="54864"/>
           </a:xfrm>
           <a:prstGeom prst="rect">
             <a:avLst/>
@@ -10541,14 +11126,14 @@
       </p:sp>
       <p:sp>
         <p:nvSpPr>
-          <p:cNvPr id="18" name="TextBox 17"/>
+          <p:cNvPr id="16" name="TextBox 15"/>
           <p:cNvSpPr txBox="1"/>
           <p:nvPr/>
         </p:nvSpPr>
         <p:spPr>
           <a:xfrm>
-            <a:off x="8198967" y="2057400"/>
-            <a:ext cx="2377440" cy="822960"/>
+            <a:off x="6507327" y="1828800"/>
+            <a:ext cx="2011680" cy="320040"/>
           </a:xfrm>
           <a:prstGeom prst="rect">
             <a:avLst/>
@@ -10563,38 +11148,34 @@
           <a:p>
             <a:pPr algn="ctr">
               <a:lnSpc>
-                <a:spcPts val="1920"/>
+                <a:spcPts val="2160"/>
               </a:lnSpc>
               <a:spcAft>
-                <a:spcPts val="480"/>
+                <a:spcPts val="540"/>
               </a:spcAft>
-              <a:defRPr sz="1600" b="1">
-                <a:solidFill>
-                  <a:srgbClr val="CDD6F4"/>
-                </a:solidFill>
-                <a:latin typeface="Cascadia Code"/>
+              <a:defRPr sz="1800" b="1">
+                <a:solidFill>
+                  <a:srgbClr val="F9E2AF"/>
+                </a:solidFill>
+                <a:latin typeface="Segoe UI"/>
               </a:defRPr>
             </a:pPr>
             <a:r>
-              <a:t>author-</a:t>
-            </a:r>
-            <a:br/>
-            <a:r>
-              <a:t>validation-plan</a:t>
-            </a:r>
-          </a:p>
-        </p:txBody>
-      </p:sp>
-      <p:sp>
-        <p:nvSpPr>
-          <p:cNvPr id="19" name="TextBox 18"/>
+              <a:t>Format</a:t>
+            </a:r>
+          </a:p>
+        </p:txBody>
+      </p:sp>
+      <p:sp>
+        <p:nvSpPr>
+          <p:cNvPr id="17" name="TextBox 16"/>
           <p:cNvSpPr txBox="1"/>
           <p:nvPr/>
         </p:nvSpPr>
         <p:spPr>
           <a:xfrm>
-            <a:off x="8198967" y="3063240"/>
-            <a:ext cx="2377440" cy="274320"/>
+            <a:off x="6507327" y="2286000"/>
+            <a:ext cx="2011680" cy="2011680"/>
           </a:xfrm>
           <a:prstGeom prst="rect">
             <a:avLst/>
@@ -10607,9 +11188,9 @@
           </a:bodyPr>
           <a:lstStyle/>
           <a:p>
-            <a:pPr algn="ctr">
+            <a:pPr algn="l">
               <a:lnSpc>
-                <a:spcPts val="1439"/>
+                <a:spcPts val="1800"/>
               </a:lnSpc>
               <a:spcAft>
                 <a:spcPts val="359"/>
@@ -10618,25 +11199,33 @@
                 <a:solidFill>
                   <a:srgbClr val="6C7086"/>
                 </a:solidFill>
-                <a:latin typeface="Segoe UI"/>
+                <a:latin typeface="Cascadia Code"/>
               </a:defRPr>
             </a:pPr>
             <a:r>
-              <a:t>produces ↓</a:t>
-            </a:r>
-          </a:p>
-        </p:txBody>
-      </p:sp>
-      <p:sp>
-        <p:nvSpPr>
-          <p:cNvPr id="20" name="TextBox 19"/>
+              <a:t># Output Format</a:t>
+            </a:r>
+            <a:br/>
+            <a:r>
+              <a:t>Investigation Report</a:t>
+            </a:r>
+            <a:br/>
+            <a:r>
+              <a:t>with sections …</a:t>
+            </a:r>
+          </a:p>
+        </p:txBody>
+      </p:sp>
+      <p:sp>
+        <p:nvSpPr>
+          <p:cNvPr id="18" name="TextBox 17"/>
           <p:cNvSpPr txBox="1"/>
           <p:nvPr/>
         </p:nvSpPr>
         <p:spPr>
           <a:xfrm>
-            <a:off x="8198967" y="3383280"/>
-            <a:ext cx="2377440" cy="640080"/>
+            <a:off x="8747607" y="2743200"/>
+            <a:ext cx="548640" cy="457200"/>
           </a:xfrm>
           <a:prstGeom prst="rect">
             <a:avLst/>
@@ -10651,74 +11240,289 @@
           <a:p>
             <a:pPr algn="ctr">
               <a:lnSpc>
-                <a:spcPts val="1680"/>
+                <a:spcPts val="3360"/>
+              </a:lnSpc>
+              <a:spcAft>
+                <a:spcPts val="840"/>
+              </a:spcAft>
+              <a:defRPr sz="2800" b="0">
+                <a:solidFill>
+                  <a:srgbClr val="6C7086"/>
+                </a:solidFill>
+                <a:latin typeface="Segoe UI"/>
+              </a:defRPr>
+            </a:pPr>
+            <a:r>
+              <a:t>→</a:t>
+            </a:r>
+          </a:p>
+        </p:txBody>
+      </p:sp>
+      <p:sp>
+        <p:nvSpPr>
+          <p:cNvPr id="19" name="Rounded Rectangle 18"/>
+          <p:cNvSpPr/>
+          <p:nvPr/>
+        </p:nvSpPr>
+        <p:spPr>
+          <a:xfrm>
+            <a:off x="9204807" y="1645920"/>
+            <a:ext cx="2286000" cy="2926080"/>
+          </a:xfrm>
+          <a:prstGeom prst="roundRect">
+            <a:avLst/>
+          </a:prstGeom>
+          <a:solidFill>
+            <a:srgbClr val="313244"/>
+          </a:solidFill>
+          <a:ln>
+            <a:noFill/>
+          </a:ln>
+          <a:effectLst/>
+        </p:spPr>
+        <p:style>
+          <a:lnRef idx="1">
+            <a:schemeClr val="accent1"/>
+          </a:lnRef>
+          <a:fillRef idx="3">
+            <a:schemeClr val="accent1"/>
+          </a:fillRef>
+          <a:effectRef idx="2">
+            <a:schemeClr val="accent1"/>
+          </a:effectRef>
+          <a:fontRef idx="minor">
+            <a:schemeClr val="lt1"/>
+          </a:fontRef>
+        </p:style>
+        <p:txBody>
+          <a:bodyPr rtlCol="0" anchor="ctr"/>
+          <a:lstStyle/>
+          <a:p>
+            <a:pPr algn="ctr"/>
+          </a:p>
+        </p:txBody>
+      </p:sp>
+      <p:sp>
+        <p:nvSpPr>
+          <p:cNvPr id="20" name="Rectangle 19"/>
+          <p:cNvSpPr/>
+          <p:nvPr/>
+        </p:nvSpPr>
+        <p:spPr>
+          <a:xfrm>
+            <a:off x="9204807" y="1645920"/>
+            <a:ext cx="2286000" cy="54864"/>
+          </a:xfrm>
+          <a:prstGeom prst="rect">
+            <a:avLst/>
+          </a:prstGeom>
+          <a:solidFill>
+            <a:srgbClr val="FAB387"/>
+          </a:solidFill>
+          <a:ln>
+            <a:noFill/>
+          </a:ln>
+        </p:spPr>
+        <p:style>
+          <a:lnRef idx="1">
+            <a:schemeClr val="accent1"/>
+          </a:lnRef>
+          <a:fillRef idx="3">
+            <a:schemeClr val="accent1"/>
+          </a:fillRef>
+          <a:effectRef idx="2">
+            <a:schemeClr val="accent1"/>
+          </a:effectRef>
+          <a:fontRef idx="minor">
+            <a:schemeClr val="lt1"/>
+          </a:fontRef>
+        </p:style>
+        <p:txBody>
+          <a:bodyPr rtlCol="0" anchor="ctr"/>
+          <a:lstStyle/>
+          <a:p>
+            <a:pPr algn="ctr"/>
+          </a:p>
+        </p:txBody>
+      </p:sp>
+      <p:sp>
+        <p:nvSpPr>
+          <p:cNvPr id="21" name="TextBox 20"/>
+          <p:cNvSpPr txBox="1"/>
+          <p:nvPr/>
+        </p:nvSpPr>
+        <p:spPr>
+          <a:xfrm>
+            <a:off x="9341967" y="1828800"/>
+            <a:ext cx="2011680" cy="320040"/>
+          </a:xfrm>
+          <a:prstGeom prst="rect">
+            <a:avLst/>
+          </a:prstGeom>
+          <a:noFill/>
+        </p:spPr>
+        <p:txBody>
+          <a:bodyPr wrap="square">
+            <a:spAutoFit/>
+          </a:bodyPr>
+          <a:lstStyle/>
+          <a:p>
+            <a:pPr algn="ctr">
+              <a:lnSpc>
+                <a:spcPts val="2160"/>
+              </a:lnSpc>
+              <a:spcAft>
+                <a:spcPts val="540"/>
+              </a:spcAft>
+              <a:defRPr sz="1800" b="1">
+                <a:solidFill>
+                  <a:srgbClr val="FAB387"/>
+                </a:solidFill>
+                <a:latin typeface="Segoe UI"/>
+              </a:defRPr>
+            </a:pPr>
+            <a:r>
+              <a:t>Template</a:t>
+            </a:r>
+          </a:p>
+        </p:txBody>
+      </p:sp>
+      <p:sp>
+        <p:nvSpPr>
+          <p:cNvPr id="22" name="TextBox 21"/>
+          <p:cNvSpPr txBox="1"/>
+          <p:nvPr/>
+        </p:nvSpPr>
+        <p:spPr>
+          <a:xfrm>
+            <a:off x="9341967" y="2286000"/>
+            <a:ext cx="2011680" cy="2011680"/>
+          </a:xfrm>
+          <a:prstGeom prst="rect">
+            <a:avLst/>
+          </a:prstGeom>
+          <a:noFill/>
+        </p:spPr>
+        <p:txBody>
+          <a:bodyPr wrap="square">
+            <a:spAutoFit/>
+          </a:bodyPr>
+          <a:lstStyle/>
+          <a:p>
+            <a:pPr algn="l">
+              <a:lnSpc>
+                <a:spcPts val="1800"/>
+              </a:lnSpc>
+              <a:spcAft>
+                <a:spcPts val="359"/>
+              </a:spcAft>
+              <a:defRPr sz="1200" b="0">
+                <a:solidFill>
+                  <a:srgbClr val="6C7086"/>
+                </a:solidFill>
+                <a:latin typeface="Cascadia Code"/>
+              </a:defRPr>
+            </a:pPr>
+            <a:r>
+              <a:t># Task</a:t>
+            </a:r>
+            <a:br/>
+            <a:r>
+              <a:t>Investigate the bug:</a:t>
+            </a:r>
+            <a:br/>
+            <a:r>
+              <a:t>{{problem_description}}</a:t>
+            </a:r>
+          </a:p>
+        </p:txBody>
+      </p:sp>
+      <p:sp>
+        <p:nvSpPr>
+          <p:cNvPr id="23" name="Rounded Rectangle 22"/>
+          <p:cNvSpPr/>
+          <p:nvPr/>
+        </p:nvSpPr>
+        <p:spPr>
+          <a:xfrm>
+            <a:off x="1828800" y="4937760"/>
+            <a:ext cx="8503920" cy="1097280"/>
+          </a:xfrm>
+          <a:prstGeom prst="roundRect">
+            <a:avLst/>
+          </a:prstGeom>
+          <a:solidFill>
+            <a:srgbClr val="181825"/>
+          </a:solidFill>
+          <a:ln>
+            <a:noFill/>
+          </a:ln>
+          <a:effectLst/>
+        </p:spPr>
+        <p:style>
+          <a:lnRef idx="1">
+            <a:schemeClr val="accent1"/>
+          </a:lnRef>
+          <a:fillRef idx="3">
+            <a:schemeClr val="accent1"/>
+          </a:fillRef>
+          <a:effectRef idx="2">
+            <a:schemeClr val="accent1"/>
+          </a:effectRef>
+          <a:fontRef idx="minor">
+            <a:schemeClr val="lt1"/>
+          </a:fontRef>
+        </p:style>
+        <p:txBody>
+          <a:bodyPr rtlCol="0" anchor="ctr"/>
+          <a:lstStyle/>
+          <a:p>
+            <a:pPr algn="ctr"/>
+          </a:p>
+        </p:txBody>
+      </p:sp>
+      <p:sp>
+        <p:nvSpPr>
+          <p:cNvPr id="24" name="TextBox 23"/>
+          <p:cNvSpPr txBox="1"/>
+          <p:nvPr/>
+        </p:nvSpPr>
+        <p:spPr>
+          <a:xfrm>
+            <a:off x="2103120" y="5029200"/>
+            <a:ext cx="7955279" cy="914400"/>
+          </a:xfrm>
+          <a:prstGeom prst="rect">
+            <a:avLst/>
+          </a:prstGeom>
+          <a:noFill/>
+        </p:spPr>
+        <p:txBody>
+          <a:bodyPr wrap="square">
+            <a:spAutoFit/>
+          </a:bodyPr>
+          <a:lstStyle/>
+          <a:p>
+            <a:pPr algn="ctr">
+              <a:lnSpc>
+                <a:spcPts val="2100"/>
               </a:lnSpc>
               <a:spcAft>
                 <a:spcPts val="420"/>
               </a:spcAft>
               <a:defRPr sz="1400" b="0">
                 <a:solidFill>
-                  <a:srgbClr val="F9E2AF"/>
-                </a:solidFill>
-                <a:latin typeface="Cascadia Code"/>
+                  <a:srgbClr val="89B4FA"/>
+                </a:solidFill>
+                <a:latin typeface="Segoe UI"/>
               </a:defRPr>
             </a:pPr>
             <a:r>
-              <a:t>validation-</a:t>
+              <a:t>Output: Single composed prompt file  ─  ready to paste into any LLM</a:t>
             </a:r>
             <a:br/>
             <a:r>
-              <a:t>plan</a:t>
-            </a:r>
-          </a:p>
-        </p:txBody>
-      </p:sp>
-      <p:sp>
-        <p:nvSpPr>
-          <p:cNvPr id="21" name="TextBox 20"/>
-          <p:cNvSpPr txBox="1"/>
-          <p:nvPr/>
-        </p:nvSpPr>
-        <p:spPr>
-          <a:xfrm>
-            <a:off x="1371600" y="4572000"/>
-            <a:ext cx="9144000" cy="1371600"/>
-          </a:xfrm>
-          <a:prstGeom prst="rect">
-            <a:avLst/>
-          </a:prstGeom>
-          <a:noFill/>
-        </p:spPr>
-        <p:txBody>
-          <a:bodyPr wrap="square">
-            <a:spAutoFit/>
-          </a:bodyPr>
-          <a:lstStyle/>
-          <a:p>
-            <a:pPr algn="ctr">
-              <a:lnSpc>
-                <a:spcPts val="2560"/>
-              </a:lnSpc>
-              <a:spcAft>
-                <a:spcPts val="480"/>
-              </a:spcAft>
-              <a:defRPr sz="1600" b="0">
-                <a:solidFill>
-                  <a:srgbClr val="CDD6F4"/>
-                </a:solidFill>
-                <a:latin typeface="Segoe UI"/>
-              </a:defRPr>
-            </a:pPr>
-            <a:r>
-              <a:t>Each template declares input/output contracts.</a:t>
-            </a:r>
-            <a:br/>
-            <a:r>
-              <a:t>One template's artifact becomes the next template's input.</a:t>
-            </a:r>
-            <a:br/>
-            <a:r>
-              <a:t>Build complete document lifecycles without copy-paste.</a:t>
+              <a:t>or use as agent instructions (.github/instructions/*.md, CLAUDE.md, .cursorrules)</a:t>
             </a:r>
           </a:p>
         </p:txBody>
@@ -10751,7 +11555,7 @@
       <p:grpSpPr/>
       <p:sp>
         <p:nvSpPr>
-          <p:cNvPr id="2" name="Rectangle 1"/>
+          <p:cNvPr id="2" name="TopBar"/>
           <p:cNvSpPr/>
           <p:nvPr/>
         </p:nvSpPr>
@@ -10770,20 +11574,6 @@
             <a:noFill/>
           </a:ln>
         </p:spPr>
-        <p:style>
-          <a:lnRef idx="1">
-            <a:schemeClr val="accent1"/>
-          </a:lnRef>
-          <a:fillRef idx="3">
-            <a:schemeClr val="accent1"/>
-          </a:fillRef>
-          <a:effectRef idx="2">
-            <a:schemeClr val="accent1"/>
-          </a:effectRef>
-          <a:fontRef idx="minor">
-            <a:schemeClr val="lt1"/>
-          </a:fontRef>
-        </p:style>
         <p:txBody>
           <a:bodyPr rtlCol="0" anchor="ctr"/>
           <a:lstStyle/>
@@ -10829,21 +11619,51 @@
               </a:defRPr>
             </a:pPr>
             <a:r>
-              <a:t>Get Started Today</a:t>
-            </a:r>
-          </a:p>
-        </p:txBody>
-      </p:sp>
-      <p:sp>
-        <p:nvSpPr>
-          <p:cNvPr id="4" name="Rectangle 3"/>
+              <a:t>Pipeline Chaining: Engineering Workflow</a:t>
+            </a:r>
+          </a:p>
+        </p:txBody>
+      </p:sp>
+      <p:sp>
+        <p:nvSpPr>
+          <p:cNvPr id="4" name="RoundRect4"/>
           <p:cNvSpPr/>
           <p:nvPr/>
         </p:nvSpPr>
         <p:spPr>
           <a:xfrm>
-            <a:off x="822960" y="1417320"/>
-            <a:ext cx="54864" cy="822960"/>
+            <a:off x="1020927" y="1828800"/>
+            <a:ext cx="1737360" cy="2286000"/>
+          </a:xfrm>
+          <a:prstGeom prst="roundRect">
+            <a:avLst/>
+          </a:prstGeom>
+          <a:solidFill>
+            <a:srgbClr val="313244"/>
+          </a:solidFill>
+          <a:ln>
+            <a:noFill/>
+          </a:ln>
+          <a:effectLst/>
+        </p:spPr>
+        <p:txBody>
+          <a:bodyPr rtlCol="0" anchor="ctr"/>
+          <a:lstStyle/>
+          <a:p>
+            <a:pPr algn="ctr"/>
+          </a:p>
+        </p:txBody>
+      </p:sp>
+      <p:sp>
+        <p:nvSpPr>
+          <p:cNvPr id="5" name="AccentBar5"/>
+          <p:cNvSpPr/>
+          <p:nvPr/>
+        </p:nvSpPr>
+        <p:spPr>
+          <a:xfrm>
+            <a:off x="1020927" y="1828800"/>
+            <a:ext cx="1737360" cy="54864"/>
           </a:xfrm>
           <a:prstGeom prst="rect">
             <a:avLst/>
@@ -10855,20 +11675,6 @@
             <a:noFill/>
           </a:ln>
         </p:spPr>
-        <p:style>
-          <a:lnRef idx="1">
-            <a:schemeClr val="accent1"/>
-          </a:lnRef>
-          <a:fillRef idx="3">
-            <a:schemeClr val="accent1"/>
-          </a:fillRef>
-          <a:effectRef idx="2">
-            <a:schemeClr val="accent1"/>
-          </a:effectRef>
-          <a:fontRef idx="minor">
-            <a:schemeClr val="lt1"/>
-          </a:fontRef>
-        </p:style>
         <p:txBody>
           <a:bodyPr rtlCol="0" anchor="ctr"/>
           <a:lstStyle/>
@@ -10879,14 +11685,14 @@
       </p:sp>
       <p:sp>
         <p:nvSpPr>
-          <p:cNvPr id="5" name="TextBox 4"/>
+          <p:cNvPr id="6" name="TextBox 5"/>
           <p:cNvSpPr txBox="1"/>
           <p:nvPr/>
         </p:nvSpPr>
         <p:spPr>
           <a:xfrm>
-            <a:off x="1097280" y="1399032"/>
-            <a:ext cx="3657600" cy="320040"/>
+            <a:off x="1066647" y="1965960"/>
+            <a:ext cx="1645920" cy="822960"/>
           </a:xfrm>
           <a:prstGeom prst="rect">
             <a:avLst/>
@@ -10899,36 +11705,44 @@
           </a:bodyPr>
           <a:lstStyle/>
           <a:p>
-            <a:pPr algn="l">
+            <a:pPr algn="ctr">
               <a:lnSpc>
-                <a:spcPts val="2400"/>
+                <a:spcPts val="1560"/>
               </a:lnSpc>
               <a:spcAft>
-                <a:spcPts val="600"/>
+                <a:spcPts val="390"/>
               </a:spcAft>
-              <a:defRPr sz="2000" b="1">
-                <a:solidFill>
-                  <a:srgbClr val="89B4FA"/>
-                </a:solidFill>
-                <a:latin typeface="Segoe UI"/>
+              <a:defRPr sz="1300" b="1">
+                <a:solidFill>
+                  <a:srgbClr val="CDD6F4"/>
+                </a:solidFill>
+                <a:latin typeface="Cascadia Code"/>
               </a:defRPr>
             </a:pPr>
             <a:r>
-              <a:t>Try it now</a:t>
-            </a:r>
-          </a:p>
-        </p:txBody>
-      </p:sp>
-      <p:sp>
-        <p:nvSpPr>
-          <p:cNvPr id="6" name="TextBox 5"/>
+              <a:t>collaborate-</a:t>
+            </a:r>
+            <a:br/>
+            <a:r>
+              <a:t>requirements-</a:t>
+            </a:r>
+            <a:br/>
+            <a:r>
+              <a:t>change</a:t>
+            </a:r>
+          </a:p>
+        </p:txBody>
+      </p:sp>
+      <p:sp>
+        <p:nvSpPr>
+          <p:cNvPr id="7" name="TextBox 6"/>
           <p:cNvSpPr txBox="1"/>
           <p:nvPr/>
         </p:nvSpPr>
         <p:spPr>
           <a:xfrm>
-            <a:off x="1097280" y="1737360"/>
-            <a:ext cx="4572000" cy="320040"/>
+            <a:off x="1066647" y="2926080"/>
+            <a:ext cx="1645920" cy="274320"/>
           </a:xfrm>
           <a:prstGeom prst="rect">
             <a:avLst/>
@@ -10941,7 +11755,1039 @@
           </a:bodyPr>
           <a:lstStyle/>
           <a:p>
-            <a:pPr algn="l">
+            <a:pPr algn="ctr">
+              <a:lnSpc>
+                <a:spcPts val="1200"/>
+              </a:lnSpc>
+              <a:spcAft>
+                <a:spcPts val="300"/>
+              </a:spcAft>
+              <a:defRPr sz="1000" b="0">
+                <a:solidFill>
+                  <a:srgbClr val="6C7086"/>
+                </a:solidFill>
+                <a:latin typeface="Segoe UI"/>
+              </a:defRPr>
+            </a:pPr>
+            <a:r>
+              <a:t>produces ↓</a:t>
+            </a:r>
+          </a:p>
+        </p:txBody>
+      </p:sp>
+      <p:sp>
+        <p:nvSpPr>
+          <p:cNvPr id="8" name="TextBox 7"/>
+          <p:cNvSpPr txBox="1"/>
+          <p:nvPr/>
+        </p:nvSpPr>
+        <p:spPr>
+          <a:xfrm>
+            <a:off x="1066647" y="3200400"/>
+            <a:ext cx="1645920" cy="640080"/>
+          </a:xfrm>
+          <a:prstGeom prst="rect">
+            <a:avLst/>
+          </a:prstGeom>
+          <a:noFill/>
+        </p:spPr>
+        <p:txBody>
+          <a:bodyPr wrap="square">
+            <a:spAutoFit/>
+          </a:bodyPr>
+          <a:lstStyle/>
+          <a:p>
+            <a:pPr algn="ctr">
+              <a:lnSpc>
+                <a:spcPts val="1320"/>
+              </a:lnSpc>
+              <a:spcAft>
+                <a:spcPts val="330"/>
+              </a:spcAft>
+              <a:defRPr sz="1100" b="0">
+                <a:solidFill>
+                  <a:srgbClr val="89B4FA"/>
+                </a:solidFill>
+                <a:latin typeface="Cascadia Code"/>
+              </a:defRPr>
+            </a:pPr>
+            <a:r>
+              <a:t>requirements-</a:t>
+            </a:r>
+            <a:br/>
+            <a:r>
+              <a:t>patch</a:t>
+            </a:r>
+          </a:p>
+        </p:txBody>
+      </p:sp>
+      <p:sp>
+        <p:nvSpPr>
+          <p:cNvPr id="9" name="TextBox 8"/>
+          <p:cNvSpPr txBox="1"/>
+          <p:nvPr/>
+        </p:nvSpPr>
+        <p:spPr>
+          <a:xfrm>
+            <a:off x="2758287" y="2560320"/>
+            <a:ext cx="365760" cy="457200"/>
+          </a:xfrm>
+          <a:prstGeom prst="rect">
+            <a:avLst/>
+          </a:prstGeom>
+          <a:noFill/>
+        </p:spPr>
+        <p:txBody>
+          <a:bodyPr wrap="square">
+            <a:spAutoFit/>
+          </a:bodyPr>
+          <a:lstStyle/>
+          <a:p>
+            <a:pPr algn="ctr">
+              <a:lnSpc>
+                <a:spcPts val="2880"/>
+              </a:lnSpc>
+              <a:spcAft>
+                <a:spcPts val="720"/>
+              </a:spcAft>
+              <a:defRPr sz="2400" b="0">
+                <a:solidFill>
+                  <a:srgbClr val="6C7086"/>
+                </a:solidFill>
+                <a:latin typeface="Segoe UI"/>
+              </a:defRPr>
+            </a:pPr>
+            <a:r>
+              <a:t>→</a:t>
+            </a:r>
+          </a:p>
+        </p:txBody>
+      </p:sp>
+      <p:sp>
+        <p:nvSpPr>
+          <p:cNvPr id="10" name="RoundRect10"/>
+          <p:cNvSpPr/>
+          <p:nvPr/>
+        </p:nvSpPr>
+        <p:spPr>
+          <a:xfrm>
+            <a:off x="3124047" y="1828800"/>
+            <a:ext cx="1737360" cy="2286000"/>
+          </a:xfrm>
+          <a:prstGeom prst="roundRect">
+            <a:avLst/>
+          </a:prstGeom>
+          <a:solidFill>
+            <a:srgbClr val="313244"/>
+          </a:solidFill>
+          <a:ln>
+            <a:noFill/>
+          </a:ln>
+          <a:effectLst/>
+        </p:spPr>
+        <p:txBody>
+          <a:bodyPr rtlCol="0" anchor="ctr"/>
+          <a:lstStyle/>
+          <a:p>
+            <a:pPr algn="ctr"/>
+          </a:p>
+        </p:txBody>
+      </p:sp>
+      <p:sp>
+        <p:nvSpPr>
+          <p:cNvPr id="11" name="AccentBar11"/>
+          <p:cNvSpPr/>
+          <p:nvPr/>
+        </p:nvSpPr>
+        <p:spPr>
+          <a:xfrm>
+            <a:off x="3124047" y="1828800"/>
+            <a:ext cx="1737360" cy="54864"/>
+          </a:xfrm>
+          <a:prstGeom prst="rect">
+            <a:avLst/>
+          </a:prstGeom>
+          <a:solidFill>
+            <a:srgbClr val="89B4FA"/>
+          </a:solidFill>
+          <a:ln>
+            <a:noFill/>
+          </a:ln>
+        </p:spPr>
+        <p:txBody>
+          <a:bodyPr rtlCol="0" anchor="ctr"/>
+          <a:lstStyle/>
+          <a:p>
+            <a:pPr algn="ctr"/>
+          </a:p>
+        </p:txBody>
+      </p:sp>
+      <p:sp>
+        <p:nvSpPr>
+          <p:cNvPr id="12" name="TextBox 11"/>
+          <p:cNvSpPr txBox="1"/>
+          <p:nvPr/>
+        </p:nvSpPr>
+        <p:spPr>
+          <a:xfrm>
+            <a:off x="3169767" y="1965960"/>
+            <a:ext cx="1645920" cy="822960"/>
+          </a:xfrm>
+          <a:prstGeom prst="rect">
+            <a:avLst/>
+          </a:prstGeom>
+          <a:noFill/>
+        </p:spPr>
+        <p:txBody>
+          <a:bodyPr wrap="square">
+            <a:spAutoFit/>
+          </a:bodyPr>
+          <a:lstStyle/>
+          <a:p>
+            <a:pPr algn="ctr">
+              <a:lnSpc>
+                <a:spcPts val="1560"/>
+              </a:lnSpc>
+              <a:spcAft>
+                <a:spcPts val="390"/>
+              </a:spcAft>
+              <a:defRPr sz="1300" b="1">
+                <a:solidFill>
+                  <a:srgbClr val="CDD6F4"/>
+                </a:solidFill>
+                <a:latin typeface="Cascadia Code"/>
+              </a:defRPr>
+            </a:pPr>
+            <a:r>
+              <a:t>generate-</a:t>
+            </a:r>
+            <a:br/>
+            <a:r>
+              <a:t>spec-changes</a:t>
+            </a:r>
+          </a:p>
+        </p:txBody>
+      </p:sp>
+      <p:sp>
+        <p:nvSpPr>
+          <p:cNvPr id="13" name="TextBox 12"/>
+          <p:cNvSpPr txBox="1"/>
+          <p:nvPr/>
+        </p:nvSpPr>
+        <p:spPr>
+          <a:xfrm>
+            <a:off x="3169767" y="2926080"/>
+            <a:ext cx="1645920" cy="274320"/>
+          </a:xfrm>
+          <a:prstGeom prst="rect">
+            <a:avLst/>
+          </a:prstGeom>
+          <a:noFill/>
+        </p:spPr>
+        <p:txBody>
+          <a:bodyPr wrap="square">
+            <a:spAutoFit/>
+          </a:bodyPr>
+          <a:lstStyle/>
+          <a:p>
+            <a:pPr algn="ctr">
+              <a:lnSpc>
+                <a:spcPts val="1200"/>
+              </a:lnSpc>
+              <a:spcAft>
+                <a:spcPts val="300"/>
+              </a:spcAft>
+              <a:defRPr sz="1000" b="0">
+                <a:solidFill>
+                  <a:srgbClr val="6C7086"/>
+                </a:solidFill>
+                <a:latin typeface="Segoe UI"/>
+              </a:defRPr>
+            </a:pPr>
+            <a:r>
+              <a:t>produces ↓</a:t>
+            </a:r>
+          </a:p>
+        </p:txBody>
+      </p:sp>
+      <p:sp>
+        <p:nvSpPr>
+          <p:cNvPr id="14" name="TextBox 13"/>
+          <p:cNvSpPr txBox="1"/>
+          <p:nvPr/>
+        </p:nvSpPr>
+        <p:spPr>
+          <a:xfrm>
+            <a:off x="3169767" y="3200400"/>
+            <a:ext cx="1645920" cy="640080"/>
+          </a:xfrm>
+          <a:prstGeom prst="rect">
+            <a:avLst/>
+          </a:prstGeom>
+          <a:noFill/>
+        </p:spPr>
+        <p:txBody>
+          <a:bodyPr wrap="square">
+            <a:spAutoFit/>
+          </a:bodyPr>
+          <a:lstStyle/>
+          <a:p>
+            <a:pPr algn="ctr">
+              <a:lnSpc>
+                <a:spcPts val="1320"/>
+              </a:lnSpc>
+              <a:spcAft>
+                <a:spcPts val="330"/>
+              </a:spcAft>
+              <a:defRPr sz="1100" b="0">
+                <a:solidFill>
+                  <a:srgbClr val="89B4FA"/>
+                </a:solidFill>
+                <a:latin typeface="Cascadia Code"/>
+              </a:defRPr>
+            </a:pPr>
+            <a:r>
+              <a:t>spec-patch</a:t>
+            </a:r>
+          </a:p>
+        </p:txBody>
+      </p:sp>
+      <p:sp>
+        <p:nvSpPr>
+          <p:cNvPr id="15" name="TextBox 14"/>
+          <p:cNvSpPr txBox="1"/>
+          <p:nvPr/>
+        </p:nvSpPr>
+        <p:spPr>
+          <a:xfrm>
+            <a:off x="4861407" y="2560320"/>
+            <a:ext cx="365760" cy="457200"/>
+          </a:xfrm>
+          <a:prstGeom prst="rect">
+            <a:avLst/>
+          </a:prstGeom>
+          <a:noFill/>
+        </p:spPr>
+        <p:txBody>
+          <a:bodyPr wrap="square">
+            <a:spAutoFit/>
+          </a:bodyPr>
+          <a:lstStyle/>
+          <a:p>
+            <a:pPr algn="ctr">
+              <a:lnSpc>
+                <a:spcPts val="2880"/>
+              </a:lnSpc>
+              <a:spcAft>
+                <a:spcPts val="720"/>
+              </a:spcAft>
+              <a:defRPr sz="2400" b="0">
+                <a:solidFill>
+                  <a:srgbClr val="6C7086"/>
+                </a:solidFill>
+                <a:latin typeface="Segoe UI"/>
+              </a:defRPr>
+            </a:pPr>
+            <a:r>
+              <a:t>→</a:t>
+            </a:r>
+          </a:p>
+        </p:txBody>
+      </p:sp>
+      <p:sp>
+        <p:nvSpPr>
+          <p:cNvPr id="16" name="RoundRect16"/>
+          <p:cNvSpPr/>
+          <p:nvPr/>
+        </p:nvSpPr>
+        <p:spPr>
+          <a:xfrm>
+            <a:off x="5227167" y="1828800"/>
+            <a:ext cx="1737360" cy="2286000"/>
+          </a:xfrm>
+          <a:prstGeom prst="roundRect">
+            <a:avLst/>
+          </a:prstGeom>
+          <a:solidFill>
+            <a:srgbClr val="313244"/>
+          </a:solidFill>
+          <a:ln>
+            <a:noFill/>
+          </a:ln>
+          <a:effectLst/>
+        </p:spPr>
+        <p:txBody>
+          <a:bodyPr rtlCol="0" anchor="ctr"/>
+          <a:lstStyle/>
+          <a:p>
+            <a:pPr algn="ctr"/>
+          </a:p>
+        </p:txBody>
+      </p:sp>
+      <p:sp>
+        <p:nvSpPr>
+          <p:cNvPr id="17" name="AccentBar17"/>
+          <p:cNvSpPr/>
+          <p:nvPr/>
+        </p:nvSpPr>
+        <p:spPr>
+          <a:xfrm>
+            <a:off x="5227167" y="1828800"/>
+            <a:ext cx="1737360" cy="54864"/>
+          </a:xfrm>
+          <a:prstGeom prst="rect">
+            <a:avLst/>
+          </a:prstGeom>
+          <a:solidFill>
+            <a:srgbClr val="89B4FA"/>
+          </a:solidFill>
+          <a:ln>
+            <a:noFill/>
+          </a:ln>
+        </p:spPr>
+        <p:txBody>
+          <a:bodyPr rtlCol="0" anchor="ctr"/>
+          <a:lstStyle/>
+          <a:p>
+            <a:pPr algn="ctr"/>
+          </a:p>
+        </p:txBody>
+      </p:sp>
+      <p:sp>
+        <p:nvSpPr>
+          <p:cNvPr id="18" name="TextBox 17"/>
+          <p:cNvSpPr txBox="1"/>
+          <p:nvPr/>
+        </p:nvSpPr>
+        <p:spPr>
+          <a:xfrm>
+            <a:off x="5272887" y="1965960"/>
+            <a:ext cx="1645920" cy="822960"/>
+          </a:xfrm>
+          <a:prstGeom prst="rect">
+            <a:avLst/>
+          </a:prstGeom>
+          <a:noFill/>
+        </p:spPr>
+        <p:txBody>
+          <a:bodyPr wrap="square">
+            <a:spAutoFit/>
+          </a:bodyPr>
+          <a:lstStyle/>
+          <a:p>
+            <a:pPr algn="ctr">
+              <a:lnSpc>
+                <a:spcPts val="1560"/>
+              </a:lnSpc>
+              <a:spcAft>
+                <a:spcPts val="390"/>
+              </a:spcAft>
+              <a:defRPr sz="1300" b="1">
+                <a:solidFill>
+                  <a:srgbClr val="CDD6F4"/>
+                </a:solidFill>
+                <a:latin typeface="Cascadia Code"/>
+              </a:defRPr>
+            </a:pPr>
+            <a:r>
+              <a:t>audit-spec-</a:t>
+            </a:r>
+            <a:br/>
+            <a:r>
+              <a:t>alignment</a:t>
+            </a:r>
+          </a:p>
+        </p:txBody>
+      </p:sp>
+      <p:sp>
+        <p:nvSpPr>
+          <p:cNvPr id="19" name="TextBox 18"/>
+          <p:cNvSpPr txBox="1"/>
+          <p:nvPr/>
+        </p:nvSpPr>
+        <p:spPr>
+          <a:xfrm>
+            <a:off x="5272887" y="2926080"/>
+            <a:ext cx="1645920" cy="274320"/>
+          </a:xfrm>
+          <a:prstGeom prst="rect">
+            <a:avLst/>
+          </a:prstGeom>
+          <a:noFill/>
+        </p:spPr>
+        <p:txBody>
+          <a:bodyPr wrap="square">
+            <a:spAutoFit/>
+          </a:bodyPr>
+          <a:lstStyle/>
+          <a:p>
+            <a:pPr algn="ctr">
+              <a:lnSpc>
+                <a:spcPts val="1200"/>
+              </a:lnSpc>
+              <a:spcAft>
+                <a:spcPts val="300"/>
+              </a:spcAft>
+              <a:defRPr sz="1000" b="0">
+                <a:solidFill>
+                  <a:srgbClr val="6C7086"/>
+                </a:solidFill>
+                <a:latin typeface="Segoe UI"/>
+              </a:defRPr>
+            </a:pPr>
+            <a:r>
+              <a:t>produces ↓</a:t>
+            </a:r>
+          </a:p>
+        </p:txBody>
+      </p:sp>
+      <p:sp>
+        <p:nvSpPr>
+          <p:cNvPr id="20" name="TextBox 19"/>
+          <p:cNvSpPr txBox="1"/>
+          <p:nvPr/>
+        </p:nvSpPr>
+        <p:spPr>
+          <a:xfrm>
+            <a:off x="5272887" y="3200400"/>
+            <a:ext cx="1645920" cy="640080"/>
+          </a:xfrm>
+          <a:prstGeom prst="rect">
+            <a:avLst/>
+          </a:prstGeom>
+          <a:noFill/>
+        </p:spPr>
+        <p:txBody>
+          <a:bodyPr wrap="square">
+            <a:spAutoFit/>
+          </a:bodyPr>
+          <a:lstStyle/>
+          <a:p>
+            <a:pPr algn="ctr">
+              <a:lnSpc>
+                <a:spcPts val="1320"/>
+              </a:lnSpc>
+              <a:spcAft>
+                <a:spcPts val="330"/>
+              </a:spcAft>
+              <a:defRPr sz="1100" b="0">
+                <a:solidFill>
+                  <a:srgbClr val="89B4FA"/>
+                </a:solidFill>
+                <a:latin typeface="Cascadia Code"/>
+              </a:defRPr>
+            </a:pPr>
+            <a:r>
+              <a:t>investigation-</a:t>
+            </a:r>
+            <a:br/>
+            <a:r>
+              <a:t>report</a:t>
+            </a:r>
+          </a:p>
+        </p:txBody>
+      </p:sp>
+      <p:sp>
+        <p:nvSpPr>
+          <p:cNvPr id="21" name="TextBox 20"/>
+          <p:cNvSpPr txBox="1"/>
+          <p:nvPr/>
+        </p:nvSpPr>
+        <p:spPr>
+          <a:xfrm>
+            <a:off x="6964527" y="2560320"/>
+            <a:ext cx="365760" cy="457200"/>
+          </a:xfrm>
+          <a:prstGeom prst="rect">
+            <a:avLst/>
+          </a:prstGeom>
+          <a:noFill/>
+        </p:spPr>
+        <p:txBody>
+          <a:bodyPr wrap="square">
+            <a:spAutoFit/>
+          </a:bodyPr>
+          <a:lstStyle/>
+          <a:p>
+            <a:pPr algn="ctr">
+              <a:lnSpc>
+                <a:spcPts val="2880"/>
+              </a:lnSpc>
+              <a:spcAft>
+                <a:spcPts val="720"/>
+              </a:spcAft>
+              <a:defRPr sz="2400" b="0">
+                <a:solidFill>
+                  <a:srgbClr val="6C7086"/>
+                </a:solidFill>
+                <a:latin typeface="Segoe UI"/>
+              </a:defRPr>
+            </a:pPr>
+            <a:r>
+              <a:t>→</a:t>
+            </a:r>
+          </a:p>
+        </p:txBody>
+      </p:sp>
+      <p:sp>
+        <p:nvSpPr>
+          <p:cNvPr id="22" name="RoundRect22"/>
+          <p:cNvSpPr/>
+          <p:nvPr/>
+        </p:nvSpPr>
+        <p:spPr>
+          <a:xfrm>
+            <a:off x="7330287" y="1828800"/>
+            <a:ext cx="1737360" cy="2286000"/>
+          </a:xfrm>
+          <a:prstGeom prst="roundRect">
+            <a:avLst/>
+          </a:prstGeom>
+          <a:solidFill>
+            <a:srgbClr val="313244"/>
+          </a:solidFill>
+          <a:ln>
+            <a:noFill/>
+          </a:ln>
+          <a:effectLst/>
+        </p:spPr>
+        <p:txBody>
+          <a:bodyPr rtlCol="0" anchor="ctr"/>
+          <a:lstStyle/>
+          <a:p>
+            <a:pPr algn="ctr"/>
+          </a:p>
+        </p:txBody>
+      </p:sp>
+      <p:sp>
+        <p:nvSpPr>
+          <p:cNvPr id="23" name="AccentBar23"/>
+          <p:cNvSpPr/>
+          <p:nvPr/>
+        </p:nvSpPr>
+        <p:spPr>
+          <a:xfrm>
+            <a:off x="7330287" y="1828800"/>
+            <a:ext cx="1737360" cy="54864"/>
+          </a:xfrm>
+          <a:prstGeom prst="rect">
+            <a:avLst/>
+          </a:prstGeom>
+          <a:solidFill>
+            <a:srgbClr val="89B4FA"/>
+          </a:solidFill>
+          <a:ln>
+            <a:noFill/>
+          </a:ln>
+        </p:spPr>
+        <p:txBody>
+          <a:bodyPr rtlCol="0" anchor="ctr"/>
+          <a:lstStyle/>
+          <a:p>
+            <a:pPr algn="ctr"/>
+          </a:p>
+        </p:txBody>
+      </p:sp>
+      <p:sp>
+        <p:nvSpPr>
+          <p:cNvPr id="24" name="TextBox 23"/>
+          <p:cNvSpPr txBox="1"/>
+          <p:nvPr/>
+        </p:nvSpPr>
+        <p:spPr>
+          <a:xfrm>
+            <a:off x="7376007" y="1965960"/>
+            <a:ext cx="1645920" cy="822960"/>
+          </a:xfrm>
+          <a:prstGeom prst="rect">
+            <a:avLst/>
+          </a:prstGeom>
+          <a:noFill/>
+        </p:spPr>
+        <p:txBody>
+          <a:bodyPr wrap="square">
+            <a:spAutoFit/>
+          </a:bodyPr>
+          <a:lstStyle/>
+          <a:p>
+            <a:pPr algn="ctr">
+              <a:lnSpc>
+                <a:spcPts val="1560"/>
+              </a:lnSpc>
+              <a:spcAft>
+                <a:spcPts val="390"/>
+              </a:spcAft>
+              <a:defRPr sz="1300" b="1">
+                <a:solidFill>
+                  <a:srgbClr val="CDD6F4"/>
+                </a:solidFill>
+                <a:latin typeface="Cascadia Code"/>
+              </a:defRPr>
+            </a:pPr>
+            <a:r>
+              <a:t>generate-</a:t>
+            </a:r>
+            <a:br/>
+            <a:r>
+              <a:t>implementation-</a:t>
+            </a:r>
+            <a:br/>
+            <a:r>
+              <a:t>changes</a:t>
+            </a:r>
+          </a:p>
+        </p:txBody>
+      </p:sp>
+      <p:sp>
+        <p:nvSpPr>
+          <p:cNvPr id="25" name="TextBox 24"/>
+          <p:cNvSpPr txBox="1"/>
+          <p:nvPr/>
+        </p:nvSpPr>
+        <p:spPr>
+          <a:xfrm>
+            <a:off x="7376007" y="2926080"/>
+            <a:ext cx="1645920" cy="274320"/>
+          </a:xfrm>
+          <a:prstGeom prst="rect">
+            <a:avLst/>
+          </a:prstGeom>
+          <a:noFill/>
+        </p:spPr>
+        <p:txBody>
+          <a:bodyPr wrap="square">
+            <a:spAutoFit/>
+          </a:bodyPr>
+          <a:lstStyle/>
+          <a:p>
+            <a:pPr algn="ctr">
+              <a:lnSpc>
+                <a:spcPts val="1200"/>
+              </a:lnSpc>
+              <a:spcAft>
+                <a:spcPts val="300"/>
+              </a:spcAft>
+              <a:defRPr sz="1000" b="0">
+                <a:solidFill>
+                  <a:srgbClr val="6C7086"/>
+                </a:solidFill>
+                <a:latin typeface="Segoe UI"/>
+              </a:defRPr>
+            </a:pPr>
+            <a:r>
+              <a:t>produces ↓</a:t>
+            </a:r>
+          </a:p>
+        </p:txBody>
+      </p:sp>
+      <p:sp>
+        <p:nvSpPr>
+          <p:cNvPr id="26" name="TextBox 25"/>
+          <p:cNvSpPr txBox="1"/>
+          <p:nvPr/>
+        </p:nvSpPr>
+        <p:spPr>
+          <a:xfrm>
+            <a:off x="7376007" y="3200400"/>
+            <a:ext cx="1645920" cy="640080"/>
+          </a:xfrm>
+          <a:prstGeom prst="rect">
+            <a:avLst/>
+          </a:prstGeom>
+          <a:noFill/>
+        </p:spPr>
+        <p:txBody>
+          <a:bodyPr wrap="square">
+            <a:spAutoFit/>
+          </a:bodyPr>
+          <a:lstStyle/>
+          <a:p>
+            <a:pPr algn="ctr">
+              <a:lnSpc>
+                <a:spcPts val="1320"/>
+              </a:lnSpc>
+              <a:spcAft>
+                <a:spcPts val="330"/>
+              </a:spcAft>
+              <a:defRPr sz="1100" b="0">
+                <a:solidFill>
+                  <a:srgbClr val="89B4FA"/>
+                </a:solidFill>
+                <a:latin typeface="Cascadia Code"/>
+              </a:defRPr>
+            </a:pPr>
+            <a:r>
+              <a:t>implementation-</a:t>
+            </a:r>
+            <a:br/>
+            <a:r>
+              <a:t>patch</a:t>
+            </a:r>
+          </a:p>
+        </p:txBody>
+      </p:sp>
+      <p:sp>
+        <p:nvSpPr>
+          <p:cNvPr id="27" name="TextBox 26"/>
+          <p:cNvSpPr txBox="1"/>
+          <p:nvPr/>
+        </p:nvSpPr>
+        <p:spPr>
+          <a:xfrm>
+            <a:off x="9067647" y="2560320"/>
+            <a:ext cx="365760" cy="457200"/>
+          </a:xfrm>
+          <a:prstGeom prst="rect">
+            <a:avLst/>
+          </a:prstGeom>
+          <a:noFill/>
+        </p:spPr>
+        <p:txBody>
+          <a:bodyPr wrap="square">
+            <a:spAutoFit/>
+          </a:bodyPr>
+          <a:lstStyle/>
+          <a:p>
+            <a:pPr algn="ctr">
+              <a:lnSpc>
+                <a:spcPts val="2880"/>
+              </a:lnSpc>
+              <a:spcAft>
+                <a:spcPts val="720"/>
+              </a:spcAft>
+              <a:defRPr sz="2400" b="0">
+                <a:solidFill>
+                  <a:srgbClr val="6C7086"/>
+                </a:solidFill>
+                <a:latin typeface="Segoe UI"/>
+              </a:defRPr>
+            </a:pPr>
+            <a:r>
+              <a:t>→</a:t>
+            </a:r>
+          </a:p>
+        </p:txBody>
+      </p:sp>
+      <p:sp>
+        <p:nvSpPr>
+          <p:cNvPr id="28" name="RoundRect28"/>
+          <p:cNvSpPr/>
+          <p:nvPr/>
+        </p:nvSpPr>
+        <p:spPr>
+          <a:xfrm>
+            <a:off x="9433407" y="1828800"/>
+            <a:ext cx="1737360" cy="2286000"/>
+          </a:xfrm>
+          <a:prstGeom prst="roundRect">
+            <a:avLst/>
+          </a:prstGeom>
+          <a:solidFill>
+            <a:srgbClr val="313244"/>
+          </a:solidFill>
+          <a:ln>
+            <a:noFill/>
+          </a:ln>
+          <a:effectLst/>
+        </p:spPr>
+        <p:txBody>
+          <a:bodyPr rtlCol="0" anchor="ctr"/>
+          <a:lstStyle/>
+          <a:p>
+            <a:pPr algn="ctr"/>
+          </a:p>
+        </p:txBody>
+      </p:sp>
+      <p:sp>
+        <p:nvSpPr>
+          <p:cNvPr id="29" name="AccentBar29"/>
+          <p:cNvSpPr/>
+          <p:nvPr/>
+        </p:nvSpPr>
+        <p:spPr>
+          <a:xfrm>
+            <a:off x="9433407" y="1828800"/>
+            <a:ext cx="1737360" cy="54864"/>
+          </a:xfrm>
+          <a:prstGeom prst="rect">
+            <a:avLst/>
+          </a:prstGeom>
+          <a:solidFill>
+            <a:srgbClr val="89B4FA"/>
+          </a:solidFill>
+          <a:ln>
+            <a:noFill/>
+          </a:ln>
+        </p:spPr>
+        <p:txBody>
+          <a:bodyPr rtlCol="0" anchor="ctr"/>
+          <a:lstStyle/>
+          <a:p>
+            <a:pPr algn="ctr"/>
+          </a:p>
+        </p:txBody>
+      </p:sp>
+      <p:sp>
+        <p:nvSpPr>
+          <p:cNvPr id="30" name="TextBox 29"/>
+          <p:cNvSpPr txBox="1"/>
+          <p:nvPr/>
+        </p:nvSpPr>
+        <p:spPr>
+          <a:xfrm>
+            <a:off x="9479127" y="1965960"/>
+            <a:ext cx="1645920" cy="822960"/>
+          </a:xfrm>
+          <a:prstGeom prst="rect">
+            <a:avLst/>
+          </a:prstGeom>
+          <a:noFill/>
+        </p:spPr>
+        <p:txBody>
+          <a:bodyPr wrap="square">
+            <a:spAutoFit/>
+          </a:bodyPr>
+          <a:lstStyle/>
+          <a:p>
+            <a:pPr algn="ctr">
+              <a:lnSpc>
+                <a:spcPts val="1560"/>
+              </a:lnSpc>
+              <a:spcAft>
+                <a:spcPts val="390"/>
+              </a:spcAft>
+              <a:defRPr sz="1300" b="1">
+                <a:solidFill>
+                  <a:srgbClr val="CDD6F4"/>
+                </a:solidFill>
+                <a:latin typeface="Cascadia Code"/>
+              </a:defRPr>
+            </a:pPr>
+            <a:r>
+              <a:t>audit-</a:t>
+            </a:r>
+            <a:br/>
+            <a:r>
+              <a:t>implementation-</a:t>
+            </a:r>
+            <a:br/>
+            <a:r>
+              <a:t>alignment</a:t>
+            </a:r>
+          </a:p>
+        </p:txBody>
+      </p:sp>
+      <p:sp>
+        <p:nvSpPr>
+          <p:cNvPr id="31" name="TextBox 30"/>
+          <p:cNvSpPr txBox="1"/>
+          <p:nvPr/>
+        </p:nvSpPr>
+        <p:spPr>
+          <a:xfrm>
+            <a:off x="9479127" y="2926080"/>
+            <a:ext cx="1645920" cy="274320"/>
+          </a:xfrm>
+          <a:prstGeom prst="rect">
+            <a:avLst/>
+          </a:prstGeom>
+          <a:noFill/>
+        </p:spPr>
+        <p:txBody>
+          <a:bodyPr wrap="square">
+            <a:spAutoFit/>
+          </a:bodyPr>
+          <a:lstStyle/>
+          <a:p>
+            <a:pPr algn="ctr">
+              <a:lnSpc>
+                <a:spcPts val="1200"/>
+              </a:lnSpc>
+              <a:spcAft>
+                <a:spcPts val="300"/>
+              </a:spcAft>
+              <a:defRPr sz="1000" b="0">
+                <a:solidFill>
+                  <a:srgbClr val="6C7086"/>
+                </a:solidFill>
+                <a:latin typeface="Segoe UI"/>
+              </a:defRPr>
+            </a:pPr>
+            <a:r>
+              <a:t>produces ↓</a:t>
+            </a:r>
+          </a:p>
+        </p:txBody>
+      </p:sp>
+      <p:sp>
+        <p:nvSpPr>
+          <p:cNvPr id="32" name="TextBox 31"/>
+          <p:cNvSpPr txBox="1"/>
+          <p:nvPr/>
+        </p:nvSpPr>
+        <p:spPr>
+          <a:xfrm>
+            <a:off x="9479127" y="3200400"/>
+            <a:ext cx="1645920" cy="640080"/>
+          </a:xfrm>
+          <a:prstGeom prst="rect">
+            <a:avLst/>
+          </a:prstGeom>
+          <a:noFill/>
+        </p:spPr>
+        <p:txBody>
+          <a:bodyPr wrap="square">
+            <a:spAutoFit/>
+          </a:bodyPr>
+          <a:lstStyle/>
+          <a:p>
+            <a:pPr algn="ctr">
+              <a:lnSpc>
+                <a:spcPts val="1320"/>
+              </a:lnSpc>
+              <a:spcAft>
+                <a:spcPts val="330"/>
+              </a:spcAft>
+              <a:defRPr sz="1100" b="0">
+                <a:solidFill>
+                  <a:srgbClr val="89B4FA"/>
+                </a:solidFill>
+                <a:latin typeface="Cascadia Code"/>
+              </a:defRPr>
+            </a:pPr>
+            <a:r>
+              <a:t>investigation-</a:t>
+            </a:r>
+            <a:br/>
+            <a:r>
+              <a:t>report</a:t>
+            </a:r>
+          </a:p>
+        </p:txBody>
+      </p:sp>
+      <p:sp>
+        <p:nvSpPr>
+          <p:cNvPr id="33" name="TextBox 32"/>
+          <p:cNvSpPr txBox="1"/>
+          <p:nvPr/>
+        </p:nvSpPr>
+        <p:spPr>
+          <a:xfrm>
+            <a:off x="822960" y="4389120"/>
+            <a:ext cx="10058400" cy="1371600"/>
+          </a:xfrm>
+          <a:prstGeom prst="rect">
+            <a:avLst/>
+          </a:prstGeom>
+          <a:noFill/>
+        </p:spPr>
+        <p:txBody>
+          <a:bodyPr wrap="square">
+            <a:spAutoFit/>
+          </a:bodyPr>
+          <a:lstStyle/>
+          <a:p>
+            <a:pPr algn="ctr">
               <a:lnSpc>
                 <a:spcPts val="1680"/>
               </a:lnSpc>
@@ -10952,580 +12798,19 @@
                 <a:solidFill>
                   <a:srgbClr val="CDD6F4"/>
                 </a:solidFill>
-                <a:latin typeface="Cascadia Code"/>
+                <a:latin typeface="Segoe UI"/>
               </a:defRPr>
             </a:pPr>
             <a:r>
-              <a:t>npx @alan-jowett/promptkit</a:t>
-            </a:r>
-          </a:p>
-        </p:txBody>
-      </p:sp>
-      <p:sp>
-        <p:nvSpPr>
-          <p:cNvPr id="7" name="TextBox 6"/>
-          <p:cNvSpPr txBox="1"/>
-          <p:nvPr/>
-        </p:nvSpPr>
-        <p:spPr>
-          <a:xfrm>
-            <a:off x="6400800" y="1463040"/>
-            <a:ext cx="5029200" cy="731520"/>
-          </a:xfrm>
-          <a:prstGeom prst="rect">
-            <a:avLst/>
-          </a:prstGeom>
-          <a:noFill/>
-        </p:spPr>
-        <p:txBody>
-          <a:bodyPr wrap="square">
-            <a:spAutoFit/>
-          </a:bodyPr>
-          <a:lstStyle/>
-          <a:p>
-            <a:pPr algn="l">
-              <a:lnSpc>
-                <a:spcPts val="1560"/>
-              </a:lnSpc>
-              <a:spcAft>
-                <a:spcPts val="390"/>
-              </a:spcAft>
-              <a:defRPr sz="1300" b="0">
-                <a:solidFill>
-                  <a:srgbClr val="6C7086"/>
-                </a:solidFill>
-                <a:latin typeface="Segoe UI"/>
-              </a:defRPr>
-            </a:pPr>
-            <a:r>
-              <a:t>Zero install — just run it. Walks you through</a:t>
+              <a:t>Human-in-the-loop: user reviews and approves after each audit stage.</a:t>
             </a:r>
             <a:br/>
             <a:r>
-              <a:t>template selection and prompt assembly.</a:t>
-            </a:r>
-          </a:p>
-        </p:txBody>
-      </p:sp>
-      <p:sp>
-        <p:nvSpPr>
-          <p:cNvPr id="8" name="Rectangle 7"/>
-          <p:cNvSpPr/>
-          <p:nvPr/>
-        </p:nvSpPr>
-        <p:spPr>
-          <a:xfrm>
-            <a:off x="822960" y="2651760"/>
-            <a:ext cx="54864" cy="822960"/>
-          </a:xfrm>
-          <a:prstGeom prst="rect">
-            <a:avLst/>
-          </a:prstGeom>
-          <a:solidFill>
-            <a:srgbClr val="A6E3A1"/>
-          </a:solidFill>
-          <a:ln>
-            <a:noFill/>
-          </a:ln>
-        </p:spPr>
-        <p:style>
-          <a:lnRef idx="1">
-            <a:schemeClr val="accent1"/>
-          </a:lnRef>
-          <a:fillRef idx="3">
-            <a:schemeClr val="accent1"/>
-          </a:fillRef>
-          <a:effectRef idx="2">
-            <a:schemeClr val="accent1"/>
-          </a:effectRef>
-          <a:fontRef idx="minor">
-            <a:schemeClr val="lt1"/>
-          </a:fontRef>
-        </p:style>
-        <p:txBody>
-          <a:bodyPr rtlCol="0" anchor="ctr"/>
-          <a:lstStyle/>
-          <a:p>
-            <a:pPr algn="ctr"/>
-          </a:p>
-        </p:txBody>
-      </p:sp>
-      <p:sp>
-        <p:nvSpPr>
-          <p:cNvPr id="9" name="TextBox 8"/>
-          <p:cNvSpPr txBox="1"/>
-          <p:nvPr/>
-        </p:nvSpPr>
-        <p:spPr>
-          <a:xfrm>
-            <a:off x="1097280" y="2633472"/>
-            <a:ext cx="3657600" cy="320040"/>
-          </a:xfrm>
-          <a:prstGeom prst="rect">
-            <a:avLst/>
-          </a:prstGeom>
-          <a:noFill/>
-        </p:spPr>
-        <p:txBody>
-          <a:bodyPr wrap="square">
-            <a:spAutoFit/>
-          </a:bodyPr>
-          <a:lstStyle/>
-          <a:p>
-            <a:pPr algn="l">
-              <a:lnSpc>
-                <a:spcPts val="2400"/>
-              </a:lnSpc>
-              <a:spcAft>
-                <a:spcPts val="600"/>
-              </a:spcAft>
-              <a:defRPr sz="2000" b="1">
-                <a:solidFill>
-                  <a:srgbClr val="A6E3A1"/>
-                </a:solidFill>
-                <a:latin typeface="Segoe UI"/>
-              </a:defRPr>
-            </a:pPr>
-            <a:r>
-              <a:t>Browse the repo</a:t>
-            </a:r>
-          </a:p>
-        </p:txBody>
-      </p:sp>
-      <p:sp>
-        <p:nvSpPr>
-          <p:cNvPr id="10" name="TextBox 9"/>
-          <p:cNvSpPr txBox="1"/>
-          <p:nvPr/>
-        </p:nvSpPr>
-        <p:spPr>
-          <a:xfrm>
-            <a:off x="1097280" y="2971800"/>
-            <a:ext cx="4572000" cy="320040"/>
-          </a:xfrm>
-          <a:prstGeom prst="rect">
-            <a:avLst/>
-          </a:prstGeom>
-          <a:noFill/>
-        </p:spPr>
-        <p:txBody>
-          <a:bodyPr wrap="square">
-            <a:spAutoFit/>
-          </a:bodyPr>
-          <a:lstStyle/>
-          <a:p>
-            <a:pPr algn="l">
-              <a:lnSpc>
-                <a:spcPts val="1680"/>
-              </a:lnSpc>
-              <a:spcAft>
-                <a:spcPts val="420"/>
-              </a:spcAft>
-              <a:defRPr sz="1400" b="0">
-                <a:solidFill>
-                  <a:srgbClr val="CDD6F4"/>
-                </a:solidFill>
-                <a:latin typeface="Cascadia Code"/>
-              </a:defRPr>
-            </a:pPr>
-            <a:r>
-              <a:t>aka.ms/PromptKit</a:t>
-            </a:r>
-          </a:p>
-        </p:txBody>
-      </p:sp>
-      <p:sp>
-        <p:nvSpPr>
-          <p:cNvPr id="11" name="TextBox 10"/>
-          <p:cNvSpPr txBox="1"/>
-          <p:nvPr/>
-        </p:nvSpPr>
-        <p:spPr>
-          <a:xfrm>
-            <a:off x="6400800" y="2697480"/>
-            <a:ext cx="5029200" cy="731520"/>
-          </a:xfrm>
-          <a:prstGeom prst="rect">
-            <a:avLst/>
-          </a:prstGeom>
-          <a:noFill/>
-        </p:spPr>
-        <p:txBody>
-          <a:bodyPr wrap="square">
-            <a:spAutoFit/>
-          </a:bodyPr>
-          <a:lstStyle/>
-          <a:p>
-            <a:pPr algn="l">
-              <a:lnSpc>
-                <a:spcPts val="1560"/>
-              </a:lnSpc>
-              <a:spcAft>
-                <a:spcPts val="390"/>
-              </a:spcAft>
-              <a:defRPr sz="1300" b="0">
-                <a:solidFill>
-                  <a:srgbClr val="6C7086"/>
-                </a:solidFill>
-                <a:latin typeface="Segoe UI"/>
-              </a:defRPr>
-            </a:pPr>
-            <a:r>
-              <a:t>Read the templates, protocols, personas.</a:t>
+              <a:t>Adversarial audits use the falsification protocol — actively try to break the output.</a:t>
             </a:r>
             <a:br/>
             <a:r>
-              <a:t>Understand the composition model.</a:t>
-            </a:r>
-          </a:p>
-        </p:txBody>
-      </p:sp>
-      <p:sp>
-        <p:nvSpPr>
-          <p:cNvPr id="12" name="Rectangle 11"/>
-          <p:cNvSpPr/>
-          <p:nvPr/>
-        </p:nvSpPr>
-        <p:spPr>
-          <a:xfrm>
-            <a:off x="822960" y="3886200"/>
-            <a:ext cx="54864" cy="822960"/>
-          </a:xfrm>
-          <a:prstGeom prst="rect">
-            <a:avLst/>
-          </a:prstGeom>
-          <a:solidFill>
-            <a:srgbClr val="F9E2AF"/>
-          </a:solidFill>
-          <a:ln>
-            <a:noFill/>
-          </a:ln>
-        </p:spPr>
-        <p:style>
-          <a:lnRef idx="1">
-            <a:schemeClr val="accent1"/>
-          </a:lnRef>
-          <a:fillRef idx="3">
-            <a:schemeClr val="accent1"/>
-          </a:fillRef>
-          <a:effectRef idx="2">
-            <a:schemeClr val="accent1"/>
-          </a:effectRef>
-          <a:fontRef idx="minor">
-            <a:schemeClr val="lt1"/>
-          </a:fontRef>
-        </p:style>
-        <p:txBody>
-          <a:bodyPr rtlCol="0" anchor="ctr"/>
-          <a:lstStyle/>
-          <a:p>
-            <a:pPr algn="ctr"/>
-          </a:p>
-        </p:txBody>
-      </p:sp>
-      <p:sp>
-        <p:nvSpPr>
-          <p:cNvPr id="13" name="TextBox 12"/>
-          <p:cNvSpPr txBox="1"/>
-          <p:nvPr/>
-        </p:nvSpPr>
-        <p:spPr>
-          <a:xfrm>
-            <a:off x="1097280" y="3867912"/>
-            <a:ext cx="3657600" cy="320040"/>
-          </a:xfrm>
-          <a:prstGeom prst="rect">
-            <a:avLst/>
-          </a:prstGeom>
-          <a:noFill/>
-        </p:spPr>
-        <p:txBody>
-          <a:bodyPr wrap="square">
-            <a:spAutoFit/>
-          </a:bodyPr>
-          <a:lstStyle/>
-          <a:p>
-            <a:pPr algn="l">
-              <a:lnSpc>
-                <a:spcPts val="2400"/>
-              </a:lnSpc>
-              <a:spcAft>
-                <a:spcPts val="600"/>
-              </a:spcAft>
-              <a:defRPr sz="2000" b="1">
-                <a:solidFill>
-                  <a:srgbClr val="F9E2AF"/>
-                </a:solidFill>
-                <a:latin typeface="Segoe UI"/>
-              </a:defRPr>
-            </a:pPr>
-            <a:r>
-              <a:t>Contribute</a:t>
-            </a:r>
-          </a:p>
-        </p:txBody>
-      </p:sp>
-      <p:sp>
-        <p:nvSpPr>
-          <p:cNvPr id="14" name="TextBox 13"/>
-          <p:cNvSpPr txBox="1"/>
-          <p:nvPr/>
-        </p:nvSpPr>
-        <p:spPr>
-          <a:xfrm>
-            <a:off x="1097280" y="4206240"/>
-            <a:ext cx="4572000" cy="320040"/>
-          </a:xfrm>
-          <a:prstGeom prst="rect">
-            <a:avLst/>
-          </a:prstGeom>
-          <a:noFill/>
-        </p:spPr>
-        <p:txBody>
-          <a:bodyPr wrap="square">
-            <a:spAutoFit/>
-          </a:bodyPr>
-          <a:lstStyle/>
-          <a:p>
-            <a:pPr algn="l">
-              <a:lnSpc>
-                <a:spcPts val="1680"/>
-              </a:lnSpc>
-              <a:spcAft>
-                <a:spcPts val="420"/>
-              </a:spcAft>
-              <a:defRPr sz="1400" b="0">
-                <a:solidFill>
-                  <a:srgbClr val="CDD6F4"/>
-                </a:solidFill>
-                <a:latin typeface="Cascadia Code"/>
-              </a:defRPr>
-            </a:pPr>
-            <a:r>
-              <a:t>Use the extend-library template</a:t>
-            </a:r>
-          </a:p>
-        </p:txBody>
-      </p:sp>
-      <p:sp>
-        <p:nvSpPr>
-          <p:cNvPr id="15" name="TextBox 14"/>
-          <p:cNvSpPr txBox="1"/>
-          <p:nvPr/>
-        </p:nvSpPr>
-        <p:spPr>
-          <a:xfrm>
-            <a:off x="6400800" y="3931920"/>
-            <a:ext cx="5029200" cy="731520"/>
-          </a:xfrm>
-          <a:prstGeom prst="rect">
-            <a:avLst/>
-          </a:prstGeom>
-          <a:noFill/>
-        </p:spPr>
-        <p:txBody>
-          <a:bodyPr wrap="square">
-            <a:spAutoFit/>
-          </a:bodyPr>
-          <a:lstStyle/>
-          <a:p>
-            <a:pPr algn="l">
-              <a:lnSpc>
-                <a:spcPts val="1560"/>
-              </a:lnSpc>
-              <a:spcAft>
-                <a:spcPts val="390"/>
-              </a:spcAft>
-              <a:defRPr sz="1300" b="0">
-                <a:solidFill>
-                  <a:srgbClr val="6C7086"/>
-                </a:solidFill>
-                <a:latin typeface="Segoe UI"/>
-              </a:defRPr>
-            </a:pPr>
-            <a:r>
-              <a:t>Add your own personas, protocols, or templates.</a:t>
-            </a:r>
-            <a:br/>
-            <a:r>
-              <a:t>PromptKit eats its own dog food — the contribution</a:t>
-            </a:r>
-            <a:br/>
-            <a:r>
-              <a:t>workflow is itself a PromptKit template.</a:t>
-            </a:r>
-          </a:p>
-        </p:txBody>
-      </p:sp>
-      <p:sp>
-        <p:nvSpPr>
-          <p:cNvPr id="16" name="Rectangle 15"/>
-          <p:cNvSpPr/>
-          <p:nvPr/>
-        </p:nvSpPr>
-        <p:spPr>
-          <a:xfrm>
-            <a:off x="822960" y="5120640"/>
-            <a:ext cx="54864" cy="822960"/>
-          </a:xfrm>
-          <a:prstGeom prst="rect">
-            <a:avLst/>
-          </a:prstGeom>
-          <a:solidFill>
-            <a:srgbClr val="FAB387"/>
-          </a:solidFill>
-          <a:ln>
-            <a:noFill/>
-          </a:ln>
-        </p:spPr>
-        <p:style>
-          <a:lnRef idx="1">
-            <a:schemeClr val="accent1"/>
-          </a:lnRef>
-          <a:fillRef idx="3">
-            <a:schemeClr val="accent1"/>
-          </a:fillRef>
-          <a:effectRef idx="2">
-            <a:schemeClr val="accent1"/>
-          </a:effectRef>
-          <a:fontRef idx="minor">
-            <a:schemeClr val="lt1"/>
-          </a:fontRef>
-        </p:style>
-        <p:txBody>
-          <a:bodyPr rtlCol="0" anchor="ctr"/>
-          <a:lstStyle/>
-          <a:p>
-            <a:pPr algn="ctr"/>
-          </a:p>
-        </p:txBody>
-      </p:sp>
-      <p:sp>
-        <p:nvSpPr>
-          <p:cNvPr id="17" name="TextBox 16"/>
-          <p:cNvSpPr txBox="1"/>
-          <p:nvPr/>
-        </p:nvSpPr>
-        <p:spPr>
-          <a:xfrm>
-            <a:off x="1097280" y="5102352"/>
-            <a:ext cx="3657600" cy="320040"/>
-          </a:xfrm>
-          <a:prstGeom prst="rect">
-            <a:avLst/>
-          </a:prstGeom>
-          <a:noFill/>
-        </p:spPr>
-        <p:txBody>
-          <a:bodyPr wrap="square">
-            <a:spAutoFit/>
-          </a:bodyPr>
-          <a:lstStyle/>
-          <a:p>
-            <a:pPr algn="l">
-              <a:lnSpc>
-                <a:spcPts val="2400"/>
-              </a:lnSpc>
-              <a:spcAft>
-                <a:spcPts val="600"/>
-              </a:spcAft>
-              <a:defRPr sz="2000" b="1">
-                <a:solidFill>
-                  <a:srgbClr val="FAB387"/>
-                </a:solidFill>
-                <a:latin typeface="Segoe UI"/>
-              </a:defRPr>
-            </a:pPr>
-            <a:r>
-              <a:t>Share feedback</a:t>
-            </a:r>
-          </a:p>
-        </p:txBody>
-      </p:sp>
-      <p:sp>
-        <p:nvSpPr>
-          <p:cNvPr id="18" name="TextBox 17"/>
-          <p:cNvSpPr txBox="1"/>
-          <p:nvPr/>
-        </p:nvSpPr>
-        <p:spPr>
-          <a:xfrm>
-            <a:off x="1097280" y="5440680"/>
-            <a:ext cx="4572000" cy="320040"/>
-          </a:xfrm>
-          <a:prstGeom prst="rect">
-            <a:avLst/>
-          </a:prstGeom>
-          <a:noFill/>
-        </p:spPr>
-        <p:txBody>
-          <a:bodyPr wrap="square">
-            <a:spAutoFit/>
-          </a:bodyPr>
-          <a:lstStyle/>
-          <a:p>
-            <a:pPr algn="l">
-              <a:lnSpc>
-                <a:spcPts val="1680"/>
-              </a:lnSpc>
-              <a:spcAft>
-                <a:spcPts val="420"/>
-              </a:spcAft>
-              <a:defRPr sz="1400" b="0">
-                <a:solidFill>
-                  <a:srgbClr val="CDD6F4"/>
-                </a:solidFill>
-                <a:latin typeface="Cascadia Code"/>
-              </a:defRPr>
-            </a:pPr>
-            <a:r>
-              <a:t>File issues or start discussions</a:t>
-            </a:r>
-          </a:p>
-        </p:txBody>
-      </p:sp>
-      <p:sp>
-        <p:nvSpPr>
-          <p:cNvPr id="19" name="TextBox 18"/>
-          <p:cNvSpPr txBox="1"/>
-          <p:nvPr/>
-        </p:nvSpPr>
-        <p:spPr>
-          <a:xfrm>
-            <a:off x="6400800" y="5166360"/>
-            <a:ext cx="5029200" cy="731520"/>
-          </a:xfrm>
-          <a:prstGeom prst="rect">
-            <a:avLst/>
-          </a:prstGeom>
-          <a:noFill/>
-        </p:spPr>
-        <p:txBody>
-          <a:bodyPr wrap="square">
-            <a:spAutoFit/>
-          </a:bodyPr>
-          <a:lstStyle/>
-          <a:p>
-            <a:pPr algn="l">
-              <a:lnSpc>
-                <a:spcPts val="1560"/>
-              </a:lnSpc>
-              <a:spcAft>
-                <a:spcPts val="390"/>
-              </a:spcAft>
-              <a:defRPr sz="1300" b="0">
-                <a:solidFill>
-                  <a:srgbClr val="6C7086"/>
-                </a:solidFill>
-                <a:latin typeface="Segoe UI"/>
-              </a:defRPr>
-            </a:pPr>
-            <a:r>
-              <a:t>What templates are missing? What workflows</a:t>
-            </a:r>
-            <a:br/>
-            <a:r>
-              <a:t>do you wish PromptKit supported?</a:t>
+              <a:t>Each stage is a full PromptKit template: persona + protocols + format + task.</a:t>
             </a:r>
           </a:p>
         </p:txBody>
